--- a/docs/content/05-teaching-resources/slides/cyber-security/04-cryptography-and-digital-certificates.pptx
+++ b/docs/content/05-teaching-resources/slides/cyber-security/04-cryptography-and-digital-certificates.pptx
@@ -8,7 +8,7 @@
     <p:sldId id="256" r:id="rId7"/>
     <p:sldId id="257" r:id="rId8"/>
     <p:sldId id="258" r:id="rId9"/>
-    <p:sldId id="259" r:id="rId11"/>
+    <p:sldId id="259" r:id="rId10"/>
     <p:sldId id="260" r:id="rId12"/>
     <p:sldId id="261" r:id="rId13"/>
     <p:sldId id="262" r:id="rId14"/>
@@ -16,6 +16,14 @@
     <p:sldId id="264" r:id="rId16"/>
     <p:sldId id="265" r:id="rId17"/>
     <p:sldId id="266" r:id="rId18"/>
+    <p:sldId id="267" r:id="rId19"/>
+    <p:sldId id="268" r:id="rId20"/>
+    <p:sldId id="269" r:id="rId21"/>
+    <p:sldId id="270" r:id="rId22"/>
+    <p:sldId id="271" r:id="rId23"/>
+    <p:sldId id="272" r:id="rId24"/>
+    <p:sldId id="273" r:id="rId25"/>
+    <p:sldId id="274" r:id="rId26"/>
   </p:sldIdLst>
   <p:sldSz cx="12191695" cy="6858000" type="screen4x3"/>
   <p:notesSz cx="6858000" cy="9144000"/>
@@ -582,7 +590,22 @@
           <a:lstStyle/>
           <a:p>
             <a:r>
-              <a:t>Give students a few minutes to answer on mini whiteboards or paper, then reveal the answers on the next slide.</a:t>
+              <a:t>Answers:</a:t>
+            </a:r>
+          </a:p>
+          <a:p>
+            <a:r>
+              <a:t>1. The sender can't deny sending the message.</a:t>
+            </a:r>
+          </a:p>
+          <a:p>
+            <a:r>
+              <a:t>2. A digital signature.</a:t>
+            </a:r>
+          </a:p>
+          <a:p>
+            <a:r>
+              <a:t>3. An integrity check such as an HMAC.</a:t>
             </a:r>
           </a:p>
         </p:txBody>
@@ -652,7 +675,22 @@
           <a:lstStyle/>
           <a:p>
             <a:r>
-              <a:t>Talk through any answers the class found difficult.</a:t>
+              <a:t>Answers:</a:t>
+            </a:r>
+          </a:p>
+          <a:p>
+            <a:r>
+              <a:t>1. No, hashing is one way.</a:t>
+            </a:r>
+          </a:p>
+          <a:p>
+            <a:r>
+              <a:t>2. Symmetric.</a:t>
+            </a:r>
+          </a:p>
+          <a:p>
+            <a:r>
+              <a:t>3. Hashes can't be reversed, so stolen hashes don't reveal passwords directly.</a:t>
             </a:r>
           </a:p>
         </p:txBody>
@@ -678,6 +716,316 @@
 </file>
 
 <file path=ppt/notesSlides/notesSlide4.xml><?xml version="1.0" encoding="utf-8"?>
+<p:notes xmlns:a="http://schemas.openxmlformats.org/drawingml/2006/main" xmlns:p="http://schemas.openxmlformats.org/presentationml/2006/main" xmlns:r="http://schemas.openxmlformats.org/officeDocument/2006/relationships">
+  <p:cSld>
+    <p:spTree>
+      <p:nvGrpSpPr>
+        <p:cNvPr id="1" name=""/>
+        <p:cNvGrpSpPr/>
+        <p:nvPr/>
+      </p:nvGrpSpPr>
+      <p:grpSpPr>
+        <a:xfrm>
+          <a:off x="0" y="0"/>
+          <a:ext cx="0" cy="0"/>
+          <a:chOff x="0" y="0"/>
+          <a:chExt cx="0" cy="0"/>
+        </a:xfrm>
+      </p:grpSpPr>
+      <p:sp>
+        <p:nvSpPr>
+          <p:cNvPr id="2" name="Slide Image Placeholder 1"/>
+          <p:cNvSpPr>
+            <a:spLocks noGrp="1"/>
+          </p:cNvSpPr>
+          <p:nvPr>
+            <p:ph type="sldImg" idx="2"/>
+          </p:nvPr>
+        </p:nvSpPr>
+        <p:spPr/>
+      </p:sp>
+      <p:sp>
+        <p:nvSpPr>
+          <p:cNvPr id="3" name="Notes Placeholder 2"/>
+          <p:cNvSpPr>
+            <a:spLocks noGrp="1"/>
+          </p:cNvSpPr>
+          <p:nvPr>
+            <p:ph type="body" idx="3" sz="quarter"/>
+          </p:nvPr>
+        </p:nvSpPr>
+        <p:spPr/>
+        <p:txBody>
+          <a:bodyPr/>
+          <a:lstStyle/>
+          <a:p>
+            <a:r>
+              <a:t>Answers:</a:t>
+            </a:r>
+          </a:p>
+          <a:p>
+            <a:r>
+              <a:t>1. A Certificate Authority (CA).</a:t>
+            </a:r>
+          </a:p>
+          <a:p>
+            <a:r>
+              <a:t>2. Any three: holder name, serial number, expiry, public key, CA signature.</a:t>
+            </a:r>
+          </a:p>
+          <a:p>
+            <a:r>
+              <a:t>3. The software's author and that it hasn't been altered.</a:t>
+            </a:r>
+          </a:p>
+        </p:txBody>
+      </p:sp>
+      <p:sp>
+        <p:nvSpPr>
+          <p:cNvPr id="4" name="Slide Number Placeholder 3"/>
+          <p:cNvSpPr>
+            <a:spLocks noGrp="1"/>
+          </p:cNvSpPr>
+          <p:nvPr>
+            <p:ph type="sldNum" idx="5" sz="quarter"/>
+          </p:nvPr>
+        </p:nvSpPr>
+        <p:spPr/>
+      </p:sp>
+    </p:spTree>
+  </p:cSld>
+  <p:clrMapOvr>
+    <a:masterClrMapping/>
+  </p:clrMapOvr>
+</p:notes>
+</file>
+
+<file path=ppt/notesSlides/notesSlide5.xml><?xml version="1.0" encoding="utf-8"?>
+<p:notes xmlns:a="http://schemas.openxmlformats.org/drawingml/2006/main" xmlns:p="http://schemas.openxmlformats.org/presentationml/2006/main" xmlns:r="http://schemas.openxmlformats.org/officeDocument/2006/relationships">
+  <p:cSld>
+    <p:spTree>
+      <p:nvGrpSpPr>
+        <p:cNvPr id="1" name=""/>
+        <p:cNvGrpSpPr/>
+        <p:nvPr/>
+      </p:nvGrpSpPr>
+      <p:grpSpPr>
+        <a:xfrm>
+          <a:off x="0" y="0"/>
+          <a:ext cx="0" cy="0"/>
+          <a:chOff x="0" y="0"/>
+          <a:chExt cx="0" cy="0"/>
+        </a:xfrm>
+      </p:grpSpPr>
+      <p:sp>
+        <p:nvSpPr>
+          <p:cNvPr id="2" name="Slide Image Placeholder 1"/>
+          <p:cNvSpPr>
+            <a:spLocks noGrp="1"/>
+          </p:cNvSpPr>
+          <p:nvPr>
+            <p:ph type="sldImg" idx="2"/>
+          </p:nvPr>
+        </p:nvSpPr>
+        <p:spPr/>
+      </p:sp>
+      <p:sp>
+        <p:nvSpPr>
+          <p:cNvPr id="3" name="Notes Placeholder 2"/>
+          <p:cNvSpPr>
+            <a:spLocks noGrp="1"/>
+          </p:cNvSpPr>
+          <p:nvPr>
+            <p:ph type="body" idx="3" sz="quarter"/>
+          </p:nvPr>
+        </p:nvSpPr>
+        <p:spPr/>
+        <p:txBody>
+          <a:bodyPr/>
+          <a:lstStyle/>
+          <a:p>
+            <a:r>
+              <a:t>Answers:</a:t>
+            </a:r>
+          </a:p>
+          <a:p>
+            <a:r>
+              <a:t>1. A Certificate Signing Request.</a:t>
+            </a:r>
+          </a:p>
+          <a:p>
+            <a:r>
+              <a:t>2. No, it never leaves the server.</a:t>
+            </a:r>
+          </a:p>
+          <a:p>
+            <a:r>
+              <a:t>3. If its private key has been compromised.</a:t>
+            </a:r>
+          </a:p>
+        </p:txBody>
+      </p:sp>
+      <p:sp>
+        <p:nvSpPr>
+          <p:cNvPr id="4" name="Slide Number Placeholder 3"/>
+          <p:cNvSpPr>
+            <a:spLocks noGrp="1"/>
+          </p:cNvSpPr>
+          <p:nvPr>
+            <p:ph type="sldNum" idx="5" sz="quarter"/>
+          </p:nvPr>
+        </p:nvSpPr>
+        <p:spPr/>
+      </p:sp>
+    </p:spTree>
+  </p:cSld>
+  <p:clrMapOvr>
+    <a:masterClrMapping/>
+  </p:clrMapOvr>
+</p:notes>
+</file>
+
+<file path=ppt/notesSlides/notesSlide6.xml><?xml version="1.0" encoding="utf-8"?>
+<p:notes xmlns:a="http://schemas.openxmlformats.org/drawingml/2006/main" xmlns:p="http://schemas.openxmlformats.org/presentationml/2006/main" xmlns:r="http://schemas.openxmlformats.org/officeDocument/2006/relationships">
+  <p:cSld>
+    <p:spTree>
+      <p:nvGrpSpPr>
+        <p:cNvPr id="1" name=""/>
+        <p:cNvGrpSpPr/>
+        <p:nvPr/>
+      </p:nvGrpSpPr>
+      <p:grpSpPr>
+        <a:xfrm>
+          <a:off x="0" y="0"/>
+          <a:ext cx="0" cy="0"/>
+          <a:chOff x="0" y="0"/>
+          <a:chExt cx="0" cy="0"/>
+        </a:xfrm>
+      </p:grpSpPr>
+      <p:sp>
+        <p:nvSpPr>
+          <p:cNvPr id="2" name="Slide Image Placeholder 1"/>
+          <p:cNvSpPr>
+            <a:spLocks noGrp="1"/>
+          </p:cNvSpPr>
+          <p:nvPr>
+            <p:ph type="sldImg" idx="2"/>
+          </p:nvPr>
+        </p:nvSpPr>
+        <p:spPr/>
+      </p:sp>
+      <p:sp>
+        <p:nvSpPr>
+          <p:cNvPr id="3" name="Notes Placeholder 2"/>
+          <p:cNvSpPr>
+            <a:spLocks noGrp="1"/>
+          </p:cNvSpPr>
+          <p:nvPr>
+            <p:ph type="body" idx="3" sz="quarter"/>
+          </p:nvPr>
+        </p:nvSpPr>
+        <p:spPr/>
+        <p:txBody>
+          <a:bodyPr/>
+          <a:lstStyle/>
+          <a:p>
+            <a:r>
+              <a:t>Give students a few minutes to answer on mini whiteboards or paper, then reveal the answers on the next slide.</a:t>
+            </a:r>
+          </a:p>
+        </p:txBody>
+      </p:sp>
+      <p:sp>
+        <p:nvSpPr>
+          <p:cNvPr id="4" name="Slide Number Placeholder 3"/>
+          <p:cNvSpPr>
+            <a:spLocks noGrp="1"/>
+          </p:cNvSpPr>
+          <p:nvPr>
+            <p:ph type="sldNum" idx="5" sz="quarter"/>
+          </p:nvPr>
+        </p:nvSpPr>
+        <p:spPr/>
+      </p:sp>
+    </p:spTree>
+  </p:cSld>
+  <p:clrMapOvr>
+    <a:masterClrMapping/>
+  </p:clrMapOvr>
+</p:notes>
+</file>
+
+<file path=ppt/notesSlides/notesSlide7.xml><?xml version="1.0" encoding="utf-8"?>
+<p:notes xmlns:a="http://schemas.openxmlformats.org/drawingml/2006/main" xmlns:p="http://schemas.openxmlformats.org/presentationml/2006/main" xmlns:r="http://schemas.openxmlformats.org/officeDocument/2006/relationships">
+  <p:cSld>
+    <p:spTree>
+      <p:nvGrpSpPr>
+        <p:cNvPr id="1" name=""/>
+        <p:cNvGrpSpPr/>
+        <p:nvPr/>
+      </p:nvGrpSpPr>
+      <p:grpSpPr>
+        <a:xfrm>
+          <a:off x="0" y="0"/>
+          <a:ext cx="0" cy="0"/>
+          <a:chOff x="0" y="0"/>
+          <a:chExt cx="0" cy="0"/>
+        </a:xfrm>
+      </p:grpSpPr>
+      <p:sp>
+        <p:nvSpPr>
+          <p:cNvPr id="2" name="Slide Image Placeholder 1"/>
+          <p:cNvSpPr>
+            <a:spLocks noGrp="1"/>
+          </p:cNvSpPr>
+          <p:nvPr>
+            <p:ph type="sldImg" idx="2"/>
+          </p:nvPr>
+        </p:nvSpPr>
+        <p:spPr/>
+      </p:sp>
+      <p:sp>
+        <p:nvSpPr>
+          <p:cNvPr id="3" name="Notes Placeholder 2"/>
+          <p:cNvSpPr>
+            <a:spLocks noGrp="1"/>
+          </p:cNvSpPr>
+          <p:nvPr>
+            <p:ph type="body" idx="3" sz="quarter"/>
+          </p:nvPr>
+        </p:nvSpPr>
+        <p:spPr/>
+        <p:txBody>
+          <a:bodyPr/>
+          <a:lstStyle/>
+          <a:p>
+            <a:r>
+              <a:t>Talk through any answers the class found difficult.</a:t>
+            </a:r>
+          </a:p>
+        </p:txBody>
+      </p:sp>
+      <p:sp>
+        <p:nvSpPr>
+          <p:cNvPr id="4" name="Slide Number Placeholder 3"/>
+          <p:cNvSpPr>
+            <a:spLocks noGrp="1"/>
+          </p:cNvSpPr>
+          <p:nvPr>
+            <p:ph type="sldNum" idx="5" sz="quarter"/>
+          </p:nvPr>
+        </p:nvSpPr>
+        <p:spPr/>
+      </p:sp>
+    </p:spTree>
+  </p:cSld>
+  <p:clrMapOvr>
+    <a:masterClrMapping/>
+  </p:clrMapOvr>
+</p:notes>
+</file>
+
+<file path=ppt/notesSlides/notesSlide8.xml><?xml version="1.0" encoding="utf-8"?>
 <p:notes xmlns:a="http://schemas.openxmlformats.org/drawingml/2006/main" xmlns:p="http://schemas.openxmlformats.org/presentationml/2006/main" xmlns:r="http://schemas.openxmlformats.org/officeDocument/2006/relationships">
   <p:cSld>
     <p:spTree>
@@ -4126,7 +4474,7 @@
                 </a:solidFill>
                 <a:latin typeface="Cambria"/>
               </a:rPr>
-              <a:t>Activity: Inspect and hash</a:t>
+              <a:t>Digital certificates</a:t>
             </a:r>
           </a:p>
         </p:txBody>
@@ -4193,6 +4541,4499 @@
                 <a:latin typeface="Calibri"/>
               </a:rPr>
               <a:t>10</a:t>
+            </a:r>
+          </a:p>
+        </p:txBody>
+      </p:sp>
+      <p:sp>
+        <p:nvSpPr>
+          <p:cNvPr id="6" name="TextBox 5"/>
+          <p:cNvSpPr txBox="1"/>
+          <p:nvPr/>
+        </p:nvSpPr>
+        <p:spPr>
+          <a:xfrm>
+            <a:off x="548640" y="1554480"/>
+            <a:ext cx="6720840" cy="4617720"/>
+          </a:xfrm>
+          <a:prstGeom prst="rect">
+            <a:avLst/>
+          </a:prstGeom>
+          <a:noFill/>
+        </p:spPr>
+        <p:txBody>
+          <a:bodyPr wrap="square" lIns="0" rIns="0" tIns="0" bIns="0">
+            <a:spAutoFit/>
+          </a:bodyPr>
+          <a:lstStyle/>
+          <a:p>
+            <a:pPr>
+              <a:spcAft>
+                <a:spcPts val="1260"/>
+              </a:spcAft>
+            </a:pPr>
+            <a:r>
+              <a:rPr sz="2100" b="0">
+                <a:solidFill>
+                  <a:srgbClr val="202122"/>
+                </a:solidFill>
+                <a:latin typeface="Calibri"/>
+              </a:rPr>
+              <a:t>A digital certificate proves that a public key really belongs to a particular server, device or user.</a:t>
+            </a:r>
+          </a:p>
+          <a:p>
+            <a:pPr>
+              <a:spcAft>
+                <a:spcPts val="1260"/>
+              </a:spcAft>
+            </a:pPr>
+            <a:r>
+              <a:rPr sz="2100" b="0">
+                <a:solidFill>
+                  <a:srgbClr val="202122"/>
+                </a:solidFill>
+                <a:latin typeface="Calibri"/>
+              </a:rPr>
+              <a:t>It contains the holder's name, a unique serial number, an expiry date, the holder's public key and the digital signature of the Certificate Authority (CA) that issued it. Your device trusts the certificate because it trusts the CA.</a:t>
+            </a:r>
+          </a:p>
+          <a:p>
+            <a:pPr>
+              <a:spcAft>
+                <a:spcPts val="1260"/>
+              </a:spcAft>
+            </a:pPr>
+            <a:r>
+              <a:rPr sz="2100" b="0">
+                <a:solidFill>
+                  <a:srgbClr val="202122"/>
+                </a:solidFill>
+                <a:latin typeface="Calibri"/>
+              </a:rPr>
+              <a:t>Server certificates let clients check a website is genuine. Client certificates let a device prove its identity to a server. Code signing certificates let an operating system check software's author and integrity.</a:t>
+            </a:r>
+          </a:p>
+        </p:txBody>
+      </p:sp>
+      <p:sp>
+        <p:nvSpPr>
+          <p:cNvPr id="7" name="Rounded Rectangle 6"/>
+          <p:cNvSpPr/>
+          <p:nvPr/>
+        </p:nvSpPr>
+        <p:spPr>
+          <a:xfrm>
+            <a:off x="7772400" y="1554480"/>
+            <a:ext cx="3867912" cy="4526280"/>
+          </a:xfrm>
+          <a:prstGeom prst="roundRect">
+            <a:avLst>
+              <a:gd name="adj" fmla="val 8000"/>
+            </a:avLst>
+          </a:prstGeom>
+          <a:solidFill>
+            <a:srgbClr val="03306E"/>
+          </a:solidFill>
+          <a:ln>
+            <a:noFill/>
+          </a:ln>
+          <a:effectLst/>
+        </p:spPr>
+        <p:style>
+          <a:lnRef idx="1">
+            <a:schemeClr val="accent1"/>
+          </a:lnRef>
+          <a:fillRef idx="3">
+            <a:schemeClr val="accent1"/>
+          </a:fillRef>
+          <a:effectRef idx="2">
+            <a:schemeClr val="accent1"/>
+          </a:effectRef>
+          <a:fontRef idx="minor">
+            <a:schemeClr val="lt1"/>
+          </a:fontRef>
+        </p:style>
+        <p:txBody>
+          <a:bodyPr rtlCol="0" anchor="ctr"/>
+          <a:lstStyle/>
+          <a:p/>
+        </p:txBody>
+      </p:sp>
+      <p:sp>
+        <p:nvSpPr>
+          <p:cNvPr id="8" name="Oval 7"/>
+          <p:cNvSpPr/>
+          <p:nvPr/>
+        </p:nvSpPr>
+        <p:spPr>
+          <a:xfrm>
+            <a:off x="8046720" y="1828800"/>
+            <a:ext cx="548640" cy="548640"/>
+          </a:xfrm>
+          <a:prstGeom prst="ellipse">
+            <a:avLst/>
+          </a:prstGeom>
+          <a:solidFill>
+            <a:srgbClr val="E0463A"/>
+          </a:solidFill>
+          <a:ln>
+            <a:noFill/>
+          </a:ln>
+          <a:effectLst/>
+        </p:spPr>
+        <p:style>
+          <a:lnRef idx="1">
+            <a:schemeClr val="accent1"/>
+          </a:lnRef>
+          <a:fillRef idx="3">
+            <a:schemeClr val="accent1"/>
+          </a:fillRef>
+          <a:effectRef idx="2">
+            <a:schemeClr val="accent1"/>
+          </a:effectRef>
+          <a:fontRef idx="minor">
+            <a:schemeClr val="lt1"/>
+          </a:fontRef>
+        </p:style>
+        <p:txBody>
+          <a:bodyPr rtlCol="0" anchor="ctr" lIns="0" rIns="0" tIns="0" bIns="0"/>
+          <a:lstStyle/>
+          <a:p>
+            <a:pPr algn="ctr"/>
+            <a:r>
+              <a:rPr sz="1300" b="1">
+                <a:solidFill>
+                  <a:srgbClr val="FFFFFF"/>
+                </a:solidFill>
+                <a:latin typeface="Calibri"/>
+              </a:rPr>
+              <a:t>e.g.</a:t>
+            </a:r>
+          </a:p>
+        </p:txBody>
+      </p:sp>
+      <p:sp>
+        <p:nvSpPr>
+          <p:cNvPr id="9" name="TextBox 8"/>
+          <p:cNvSpPr txBox="1"/>
+          <p:nvPr/>
+        </p:nvSpPr>
+        <p:spPr>
+          <a:xfrm>
+            <a:off x="8046720" y="2560320"/>
+            <a:ext cx="3291840" cy="365760"/>
+          </a:xfrm>
+          <a:prstGeom prst="rect">
+            <a:avLst/>
+          </a:prstGeom>
+          <a:noFill/>
+        </p:spPr>
+        <p:txBody>
+          <a:bodyPr wrap="square" anchor="t" lIns="0" rIns="0" tIns="0" bIns="0"/>
+          <a:lstStyle/>
+          <a:p>
+            <a:pPr algn="l"/>
+            <a:r>
+              <a:rPr sz="1300" b="1" i="0">
+                <a:solidFill>
+                  <a:srgbClr val="A9C8F0"/>
+                </a:solidFill>
+                <a:latin typeface="Calibri"/>
+              </a:rPr>
+              <a:t>EXAMPLE</a:t>
+            </a:r>
+          </a:p>
+        </p:txBody>
+      </p:sp>
+      <p:sp>
+        <p:nvSpPr>
+          <p:cNvPr id="10" name="TextBox 9"/>
+          <p:cNvSpPr txBox="1"/>
+          <p:nvPr/>
+        </p:nvSpPr>
+        <p:spPr>
+          <a:xfrm>
+            <a:off x="8046720" y="2971800"/>
+            <a:ext cx="3291840" cy="2971800"/>
+          </a:xfrm>
+          <a:prstGeom prst="rect">
+            <a:avLst/>
+          </a:prstGeom>
+          <a:noFill/>
+        </p:spPr>
+        <p:txBody>
+          <a:bodyPr wrap="square" anchor="t" lIns="0" rIns="0" tIns="0" bIns="0"/>
+          <a:lstStyle/>
+          <a:p>
+            <a:pPr algn="l"/>
+            <a:r>
+              <a:rPr sz="1900" b="0" i="0">
+                <a:solidFill>
+                  <a:srgbClr val="FFFFFF"/>
+                </a:solidFill>
+                <a:latin typeface="Cambria"/>
+              </a:rPr>
+              <a:t>The padlock in your browser means the site's certificate was signed by a trusted CA and matches the domain. It doesn't mean the site itself is honest.</a:t>
+            </a:r>
+          </a:p>
+        </p:txBody>
+      </p:sp>
+    </p:spTree>
+  </p:cSld>
+  <p:clrMapOvr>
+    <a:masterClrMapping/>
+  </p:clrMapOvr>
+</p:sld>
+</file>
+
+<file path=ppt/slides/slide11.xml><?xml version="1.0" encoding="utf-8"?>
+<p:sld xmlns:a="http://schemas.openxmlformats.org/drawingml/2006/main" xmlns:p="http://schemas.openxmlformats.org/presentationml/2006/main" xmlns:r="http://schemas.openxmlformats.org/officeDocument/2006/relationships">
+  <p:cSld>
+    <p:bg>
+      <p:bgPr>
+        <a:solidFill>
+          <a:srgbClr val="FFFFFF"/>
+        </a:solidFill>
+        <a:effectLst/>
+      </p:bgPr>
+    </p:bg>
+    <p:spTree>
+      <p:nvGrpSpPr>
+        <p:cNvPr id="1" name=""/>
+        <p:cNvGrpSpPr/>
+        <p:nvPr/>
+      </p:nvGrpSpPr>
+      <p:grpSpPr/>
+      <p:sp>
+        <p:nvSpPr>
+          <p:cNvPr id="2" name="TextBox 1"/>
+          <p:cNvSpPr txBox="1"/>
+          <p:nvPr/>
+        </p:nvSpPr>
+        <p:spPr>
+          <a:xfrm>
+            <a:off x="548640" y="320040"/>
+            <a:ext cx="11094415" cy="274320"/>
+          </a:xfrm>
+          <a:prstGeom prst="rect">
+            <a:avLst/>
+          </a:prstGeom>
+          <a:noFill/>
+        </p:spPr>
+        <p:txBody>
+          <a:bodyPr wrap="square" anchor="t" lIns="0" rIns="0" tIns="0" bIns="0"/>
+          <a:lstStyle/>
+          <a:p>
+            <a:pPr algn="l"/>
+            <a:r>
+              <a:rPr sz="1100" b="1" i="0">
+                <a:solidFill>
+                  <a:srgbClr val="54595D"/>
+                </a:solidFill>
+                <a:latin typeface="Calibri"/>
+              </a:rPr>
+              <a:t>CYBER SECURITY  ·  Cyber Security Content Areas 1 and 2</a:t>
+            </a:r>
+          </a:p>
+        </p:txBody>
+      </p:sp>
+      <p:sp>
+        <p:nvSpPr>
+          <p:cNvPr id="3" name="TextBox 2"/>
+          <p:cNvSpPr txBox="1"/>
+          <p:nvPr/>
+        </p:nvSpPr>
+        <p:spPr>
+          <a:xfrm>
+            <a:off x="548640" y="566928"/>
+            <a:ext cx="11094415" cy="822960"/>
+          </a:xfrm>
+          <a:prstGeom prst="rect">
+            <a:avLst/>
+          </a:prstGeom>
+          <a:noFill/>
+        </p:spPr>
+        <p:txBody>
+          <a:bodyPr wrap="square" anchor="ctr" lIns="0" rIns="0" tIns="0" bIns="0"/>
+          <a:lstStyle/>
+          <a:p>
+            <a:pPr algn="l"/>
+            <a:r>
+              <a:rPr sz="3200" b="1" i="0">
+                <a:solidFill>
+                  <a:srgbClr val="03306E"/>
+                </a:solidFill>
+                <a:latin typeface="Cambria"/>
+              </a:rPr>
+              <a:t>Digital certificates</a:t>
+            </a:r>
+          </a:p>
+        </p:txBody>
+      </p:sp>
+      <p:sp>
+        <p:nvSpPr>
+          <p:cNvPr id="4" name="TextBox 3"/>
+          <p:cNvSpPr txBox="1"/>
+          <p:nvPr/>
+        </p:nvSpPr>
+        <p:spPr>
+          <a:xfrm>
+            <a:off x="548640" y="6446520"/>
+            <a:ext cx="8229600" cy="274320"/>
+          </a:xfrm>
+          <a:prstGeom prst="rect">
+            <a:avLst/>
+          </a:prstGeom>
+          <a:noFill/>
+        </p:spPr>
+        <p:txBody>
+          <a:bodyPr wrap="square" anchor="t" lIns="0" rIns="0" tIns="0" bIns="0"/>
+          <a:lstStyle/>
+          <a:p>
+            <a:pPr algn="l"/>
+            <a:r>
+              <a:rPr sz="1000" b="0" i="0">
+                <a:solidFill>
+                  <a:srgbClr val="54595D"/>
+                </a:solidFill>
+                <a:latin typeface="Calibri"/>
+              </a:rPr>
+              <a:t>Digital Support and Security T Level  ·  Cryptography and Digital Certificates</a:t>
+            </a:r>
+          </a:p>
+        </p:txBody>
+      </p:sp>
+      <p:sp>
+        <p:nvSpPr>
+          <p:cNvPr id="5" name="TextBox 4"/>
+          <p:cNvSpPr txBox="1"/>
+          <p:nvPr/>
+        </p:nvSpPr>
+        <p:spPr>
+          <a:xfrm>
+            <a:off x="10728655" y="6446520"/>
+            <a:ext cx="914400" cy="274320"/>
+          </a:xfrm>
+          <a:prstGeom prst="rect">
+            <a:avLst/>
+          </a:prstGeom>
+          <a:noFill/>
+        </p:spPr>
+        <p:txBody>
+          <a:bodyPr wrap="square" anchor="t" lIns="0" rIns="0" tIns="0" bIns="0"/>
+          <a:lstStyle/>
+          <a:p>
+            <a:pPr algn="r"/>
+            <a:r>
+              <a:rPr sz="1000" b="0" i="0">
+                <a:solidFill>
+                  <a:srgbClr val="54595D"/>
+                </a:solidFill>
+                <a:latin typeface="Calibri"/>
+              </a:rPr>
+              <a:t>11</a:t>
+            </a:r>
+          </a:p>
+        </p:txBody>
+      </p:sp>
+      <p:sp>
+        <p:nvSpPr>
+          <p:cNvPr id="6" name="Rounded Rectangle 5"/>
+          <p:cNvSpPr/>
+          <p:nvPr/>
+        </p:nvSpPr>
+        <p:spPr>
+          <a:xfrm>
+            <a:off x="548640" y="1600200"/>
+            <a:ext cx="3515258" cy="4572000"/>
+          </a:xfrm>
+          <a:prstGeom prst="roundRect">
+            <a:avLst>
+              <a:gd name="adj" fmla="val 6000"/>
+            </a:avLst>
+          </a:prstGeom>
+          <a:solidFill>
+            <a:srgbClr val="EAF3FF"/>
+          </a:solidFill>
+          <a:ln>
+            <a:noFill/>
+          </a:ln>
+          <a:effectLst/>
+        </p:spPr>
+        <p:style>
+          <a:lnRef idx="1">
+            <a:schemeClr val="accent1"/>
+          </a:lnRef>
+          <a:fillRef idx="3">
+            <a:schemeClr val="accent1"/>
+          </a:fillRef>
+          <a:effectRef idx="2">
+            <a:schemeClr val="accent1"/>
+          </a:effectRef>
+          <a:fontRef idx="minor">
+            <a:schemeClr val="lt1"/>
+          </a:fontRef>
+        </p:style>
+        <p:txBody>
+          <a:bodyPr rtlCol="0" anchor="ctr"/>
+          <a:lstStyle/>
+          <a:p/>
+        </p:txBody>
+      </p:sp>
+      <p:sp>
+        <p:nvSpPr>
+          <p:cNvPr id="7" name="Oval 6"/>
+          <p:cNvSpPr/>
+          <p:nvPr/>
+        </p:nvSpPr>
+        <p:spPr>
+          <a:xfrm>
+            <a:off x="777240" y="1828800"/>
+            <a:ext cx="457200" cy="457200"/>
+          </a:xfrm>
+          <a:prstGeom prst="ellipse">
+            <a:avLst/>
+          </a:prstGeom>
+          <a:solidFill>
+            <a:srgbClr val="E0463A"/>
+          </a:solidFill>
+          <a:ln>
+            <a:noFill/>
+          </a:ln>
+          <a:effectLst/>
+        </p:spPr>
+        <p:style>
+          <a:lnRef idx="1">
+            <a:schemeClr val="accent1"/>
+          </a:lnRef>
+          <a:fillRef idx="3">
+            <a:schemeClr val="accent1"/>
+          </a:fillRef>
+          <a:effectRef idx="2">
+            <a:schemeClr val="accent1"/>
+          </a:effectRef>
+          <a:fontRef idx="minor">
+            <a:schemeClr val="lt1"/>
+          </a:fontRef>
+        </p:style>
+        <p:txBody>
+          <a:bodyPr rtlCol="0" anchor="ctr" lIns="0" rIns="0" tIns="0" bIns="0"/>
+          <a:lstStyle/>
+          <a:p>
+            <a:pPr algn="ctr"/>
+            <a:r>
+              <a:rPr sz="1500" b="1">
+                <a:solidFill>
+                  <a:srgbClr val="FFFFFF"/>
+                </a:solidFill>
+                <a:latin typeface="Calibri"/>
+              </a:rPr>
+              <a:t>1</a:t>
+            </a:r>
+          </a:p>
+        </p:txBody>
+      </p:sp>
+      <p:sp>
+        <p:nvSpPr>
+          <p:cNvPr id="8" name="TextBox 7"/>
+          <p:cNvSpPr txBox="1"/>
+          <p:nvPr/>
+        </p:nvSpPr>
+        <p:spPr>
+          <a:xfrm>
+            <a:off x="1371600" y="1801368"/>
+            <a:ext cx="2509418" cy="512064"/>
+          </a:xfrm>
+          <a:prstGeom prst="rect">
+            <a:avLst/>
+          </a:prstGeom>
+          <a:noFill/>
+        </p:spPr>
+        <p:txBody>
+          <a:bodyPr wrap="square" anchor="ctr" lIns="0" rIns="0" tIns="0" bIns="0"/>
+          <a:lstStyle/>
+          <a:p>
+            <a:pPr algn="l"/>
+            <a:r>
+              <a:rPr sz="1900" b="1" i="0">
+                <a:solidFill>
+                  <a:srgbClr val="03306E"/>
+                </a:solidFill>
+                <a:latin typeface="Calibri"/>
+              </a:rPr>
+              <a:t>Purpose</a:t>
+            </a:r>
+          </a:p>
+        </p:txBody>
+      </p:sp>
+      <p:sp>
+        <p:nvSpPr>
+          <p:cNvPr id="9" name="TextBox 8"/>
+          <p:cNvSpPr txBox="1"/>
+          <p:nvPr/>
+        </p:nvSpPr>
+        <p:spPr>
+          <a:xfrm>
+            <a:off x="777240" y="2468880"/>
+            <a:ext cx="3058058" cy="3566160"/>
+          </a:xfrm>
+          <a:prstGeom prst="rect">
+            <a:avLst/>
+          </a:prstGeom>
+          <a:noFill/>
+        </p:spPr>
+        <p:txBody>
+          <a:bodyPr wrap="square" anchor="t" lIns="0" rIns="0" tIns="0" bIns="0"/>
+          <a:lstStyle/>
+          <a:p>
+            <a:pPr algn="l"/>
+            <a:r>
+              <a:rPr sz="2000" b="0" i="0">
+                <a:solidFill>
+                  <a:srgbClr val="202122"/>
+                </a:solidFill>
+                <a:latin typeface="Calibri"/>
+              </a:rPr>
+              <a:t>Prove the authenticity of a device, server or user using asymmetric cryptography.</a:t>
+            </a:r>
+          </a:p>
+        </p:txBody>
+      </p:sp>
+      <p:sp>
+        <p:nvSpPr>
+          <p:cNvPr id="10" name="Rounded Rectangle 9"/>
+          <p:cNvSpPr/>
+          <p:nvPr/>
+        </p:nvSpPr>
+        <p:spPr>
+          <a:xfrm>
+            <a:off x="4338218" y="1600200"/>
+            <a:ext cx="3515258" cy="4572000"/>
+          </a:xfrm>
+          <a:prstGeom prst="roundRect">
+            <a:avLst>
+              <a:gd name="adj" fmla="val 6000"/>
+            </a:avLst>
+          </a:prstGeom>
+          <a:solidFill>
+            <a:srgbClr val="EAF3FF"/>
+          </a:solidFill>
+          <a:ln>
+            <a:noFill/>
+          </a:ln>
+          <a:effectLst/>
+        </p:spPr>
+        <p:style>
+          <a:lnRef idx="1">
+            <a:schemeClr val="accent1"/>
+          </a:lnRef>
+          <a:fillRef idx="3">
+            <a:schemeClr val="accent1"/>
+          </a:fillRef>
+          <a:effectRef idx="2">
+            <a:schemeClr val="accent1"/>
+          </a:effectRef>
+          <a:fontRef idx="minor">
+            <a:schemeClr val="lt1"/>
+          </a:fontRef>
+        </p:style>
+        <p:txBody>
+          <a:bodyPr rtlCol="0" anchor="ctr"/>
+          <a:lstStyle/>
+          <a:p/>
+        </p:txBody>
+      </p:sp>
+      <p:sp>
+        <p:nvSpPr>
+          <p:cNvPr id="11" name="Oval 10"/>
+          <p:cNvSpPr/>
+          <p:nvPr/>
+        </p:nvSpPr>
+        <p:spPr>
+          <a:xfrm>
+            <a:off x="4566818" y="1828800"/>
+            <a:ext cx="457200" cy="457200"/>
+          </a:xfrm>
+          <a:prstGeom prst="ellipse">
+            <a:avLst/>
+          </a:prstGeom>
+          <a:solidFill>
+            <a:srgbClr val="E0463A"/>
+          </a:solidFill>
+          <a:ln>
+            <a:noFill/>
+          </a:ln>
+          <a:effectLst/>
+        </p:spPr>
+        <p:style>
+          <a:lnRef idx="1">
+            <a:schemeClr val="accent1"/>
+          </a:lnRef>
+          <a:fillRef idx="3">
+            <a:schemeClr val="accent1"/>
+          </a:fillRef>
+          <a:effectRef idx="2">
+            <a:schemeClr val="accent1"/>
+          </a:effectRef>
+          <a:fontRef idx="minor">
+            <a:schemeClr val="lt1"/>
+          </a:fontRef>
+        </p:style>
+        <p:txBody>
+          <a:bodyPr rtlCol="0" anchor="ctr" lIns="0" rIns="0" tIns="0" bIns="0"/>
+          <a:lstStyle/>
+          <a:p>
+            <a:pPr algn="ctr"/>
+            <a:r>
+              <a:rPr sz="1500" b="1">
+                <a:solidFill>
+                  <a:srgbClr val="FFFFFF"/>
+                </a:solidFill>
+                <a:latin typeface="Calibri"/>
+              </a:rPr>
+              <a:t>2</a:t>
+            </a:r>
+          </a:p>
+        </p:txBody>
+      </p:sp>
+      <p:sp>
+        <p:nvSpPr>
+          <p:cNvPr id="12" name="TextBox 11"/>
+          <p:cNvSpPr txBox="1"/>
+          <p:nvPr/>
+        </p:nvSpPr>
+        <p:spPr>
+          <a:xfrm>
+            <a:off x="5161178" y="1801368"/>
+            <a:ext cx="2509418" cy="512064"/>
+          </a:xfrm>
+          <a:prstGeom prst="rect">
+            <a:avLst/>
+          </a:prstGeom>
+          <a:noFill/>
+        </p:spPr>
+        <p:txBody>
+          <a:bodyPr wrap="square" anchor="ctr" lIns="0" rIns="0" tIns="0" bIns="0"/>
+          <a:lstStyle/>
+          <a:p>
+            <a:pPr algn="l"/>
+            <a:r>
+              <a:rPr sz="1900" b="1" i="0">
+                <a:solidFill>
+                  <a:srgbClr val="03306E"/>
+                </a:solidFill>
+                <a:latin typeface="Calibri"/>
+              </a:rPr>
+              <a:t>Features</a:t>
+            </a:r>
+          </a:p>
+        </p:txBody>
+      </p:sp>
+      <p:sp>
+        <p:nvSpPr>
+          <p:cNvPr id="13" name="TextBox 12"/>
+          <p:cNvSpPr txBox="1"/>
+          <p:nvPr/>
+        </p:nvSpPr>
+        <p:spPr>
+          <a:xfrm>
+            <a:off x="4566818" y="2468880"/>
+            <a:ext cx="3058058" cy="3566160"/>
+          </a:xfrm>
+          <a:prstGeom prst="rect">
+            <a:avLst/>
+          </a:prstGeom>
+          <a:noFill/>
+        </p:spPr>
+        <p:txBody>
+          <a:bodyPr wrap="square" anchor="t" lIns="0" rIns="0" tIns="0" bIns="0"/>
+          <a:lstStyle/>
+          <a:p>
+            <a:pPr algn="l"/>
+            <a:r>
+              <a:rPr sz="2000" b="0" i="0">
+                <a:solidFill>
+                  <a:srgbClr val="202122"/>
+                </a:solidFill>
+                <a:latin typeface="Calibri"/>
+              </a:rPr>
+              <a:t>Holder name, serial number, expiry date, holder's public key, issuer's signature.</a:t>
+            </a:r>
+          </a:p>
+        </p:txBody>
+      </p:sp>
+      <p:sp>
+        <p:nvSpPr>
+          <p:cNvPr id="14" name="Rounded Rectangle 13"/>
+          <p:cNvSpPr/>
+          <p:nvPr/>
+        </p:nvSpPr>
+        <p:spPr>
+          <a:xfrm>
+            <a:off x="8127796" y="1600200"/>
+            <a:ext cx="3515258" cy="4572000"/>
+          </a:xfrm>
+          <a:prstGeom prst="roundRect">
+            <a:avLst>
+              <a:gd name="adj" fmla="val 6000"/>
+            </a:avLst>
+          </a:prstGeom>
+          <a:solidFill>
+            <a:srgbClr val="EAF3FF"/>
+          </a:solidFill>
+          <a:ln>
+            <a:noFill/>
+          </a:ln>
+          <a:effectLst/>
+        </p:spPr>
+        <p:style>
+          <a:lnRef idx="1">
+            <a:schemeClr val="accent1"/>
+          </a:lnRef>
+          <a:fillRef idx="3">
+            <a:schemeClr val="accent1"/>
+          </a:fillRef>
+          <a:effectRef idx="2">
+            <a:schemeClr val="accent1"/>
+          </a:effectRef>
+          <a:fontRef idx="minor">
+            <a:schemeClr val="lt1"/>
+          </a:fontRef>
+        </p:style>
+        <p:txBody>
+          <a:bodyPr rtlCol="0" anchor="ctr"/>
+          <a:lstStyle/>
+          <a:p/>
+        </p:txBody>
+      </p:sp>
+      <p:sp>
+        <p:nvSpPr>
+          <p:cNvPr id="15" name="Oval 14"/>
+          <p:cNvSpPr/>
+          <p:nvPr/>
+        </p:nvSpPr>
+        <p:spPr>
+          <a:xfrm>
+            <a:off x="8356396" y="1828800"/>
+            <a:ext cx="457200" cy="457200"/>
+          </a:xfrm>
+          <a:prstGeom prst="ellipse">
+            <a:avLst/>
+          </a:prstGeom>
+          <a:solidFill>
+            <a:srgbClr val="E0463A"/>
+          </a:solidFill>
+          <a:ln>
+            <a:noFill/>
+          </a:ln>
+          <a:effectLst/>
+        </p:spPr>
+        <p:style>
+          <a:lnRef idx="1">
+            <a:schemeClr val="accent1"/>
+          </a:lnRef>
+          <a:fillRef idx="3">
+            <a:schemeClr val="accent1"/>
+          </a:fillRef>
+          <a:effectRef idx="2">
+            <a:schemeClr val="accent1"/>
+          </a:effectRef>
+          <a:fontRef idx="minor">
+            <a:schemeClr val="lt1"/>
+          </a:fontRef>
+        </p:style>
+        <p:txBody>
+          <a:bodyPr rtlCol="0" anchor="ctr" lIns="0" rIns="0" tIns="0" bIns="0"/>
+          <a:lstStyle/>
+          <a:p>
+            <a:pPr algn="ctr"/>
+            <a:r>
+              <a:rPr sz="1500" b="1">
+                <a:solidFill>
+                  <a:srgbClr val="FFFFFF"/>
+                </a:solidFill>
+                <a:latin typeface="Calibri"/>
+              </a:rPr>
+              <a:t>3</a:t>
+            </a:r>
+          </a:p>
+        </p:txBody>
+      </p:sp>
+      <p:sp>
+        <p:nvSpPr>
+          <p:cNvPr id="16" name="TextBox 15"/>
+          <p:cNvSpPr txBox="1"/>
+          <p:nvPr/>
+        </p:nvSpPr>
+        <p:spPr>
+          <a:xfrm>
+            <a:off x="8950756" y="1801368"/>
+            <a:ext cx="2509418" cy="512064"/>
+          </a:xfrm>
+          <a:prstGeom prst="rect">
+            <a:avLst/>
+          </a:prstGeom>
+          <a:noFill/>
+        </p:spPr>
+        <p:txBody>
+          <a:bodyPr wrap="square" anchor="ctr" lIns="0" rIns="0" tIns="0" bIns="0"/>
+          <a:lstStyle/>
+          <a:p>
+            <a:pPr algn="l"/>
+            <a:r>
+              <a:rPr sz="1900" b="1" i="0">
+                <a:solidFill>
+                  <a:srgbClr val="03306E"/>
+                </a:solidFill>
+                <a:latin typeface="Calibri"/>
+              </a:rPr>
+              <a:t>Types</a:t>
+            </a:r>
+          </a:p>
+        </p:txBody>
+      </p:sp>
+      <p:sp>
+        <p:nvSpPr>
+          <p:cNvPr id="17" name="TextBox 16"/>
+          <p:cNvSpPr txBox="1"/>
+          <p:nvPr/>
+        </p:nvSpPr>
+        <p:spPr>
+          <a:xfrm>
+            <a:off x="8356396" y="2468880"/>
+            <a:ext cx="3058058" cy="3566160"/>
+          </a:xfrm>
+          <a:prstGeom prst="rect">
+            <a:avLst/>
+          </a:prstGeom>
+          <a:noFill/>
+        </p:spPr>
+        <p:txBody>
+          <a:bodyPr wrap="square" anchor="t" lIns="0" rIns="0" tIns="0" bIns="0"/>
+          <a:lstStyle/>
+          <a:p>
+            <a:pPr algn="l"/>
+            <a:r>
+              <a:rPr sz="2000" b="0" i="0">
+                <a:solidFill>
+                  <a:srgbClr val="202122"/>
+                </a:solidFill>
+                <a:latin typeface="Calibri"/>
+              </a:rPr>
+              <a:t>Server-side (client checks server), client-side (client proves itself), code signing (OS checks software).</a:t>
+            </a:r>
+          </a:p>
+        </p:txBody>
+      </p:sp>
+    </p:spTree>
+  </p:cSld>
+  <p:clrMapOvr>
+    <a:masterClrMapping/>
+  </p:clrMapOvr>
+</p:sld>
+</file>
+
+<file path=ppt/slides/slide12.xml><?xml version="1.0" encoding="utf-8"?>
+<p:sld xmlns:a="http://schemas.openxmlformats.org/drawingml/2006/main" xmlns:p="http://schemas.openxmlformats.org/presentationml/2006/main" xmlns:r="http://schemas.openxmlformats.org/officeDocument/2006/relationships">
+  <p:cSld>
+    <p:bg>
+      <p:bgPr>
+        <a:solidFill>
+          <a:srgbClr val="FFFFFF"/>
+        </a:solidFill>
+        <a:effectLst/>
+      </p:bgPr>
+    </p:bg>
+    <p:spTree>
+      <p:nvGrpSpPr>
+        <p:cNvPr id="1" name=""/>
+        <p:cNvGrpSpPr/>
+        <p:nvPr/>
+      </p:nvGrpSpPr>
+      <p:grpSpPr/>
+      <p:sp>
+        <p:nvSpPr>
+          <p:cNvPr id="2" name="TextBox 1"/>
+          <p:cNvSpPr txBox="1"/>
+          <p:nvPr/>
+        </p:nvSpPr>
+        <p:spPr>
+          <a:xfrm>
+            <a:off x="548640" y="320040"/>
+            <a:ext cx="11094415" cy="274320"/>
+          </a:xfrm>
+          <a:prstGeom prst="rect">
+            <a:avLst/>
+          </a:prstGeom>
+          <a:noFill/>
+        </p:spPr>
+        <p:txBody>
+          <a:bodyPr wrap="square" anchor="t" lIns="0" rIns="0" tIns="0" bIns="0"/>
+          <a:lstStyle/>
+          <a:p>
+            <a:pPr algn="l"/>
+            <a:r>
+              <a:rPr sz="1100" b="1" i="0">
+                <a:solidFill>
+                  <a:srgbClr val="54595D"/>
+                </a:solidFill>
+                <a:latin typeface="Calibri"/>
+              </a:rPr>
+              <a:t>CYBER SECURITY  ·  Cyber Security Content Areas 1 and 2</a:t>
+            </a:r>
+          </a:p>
+        </p:txBody>
+      </p:sp>
+      <p:sp>
+        <p:nvSpPr>
+          <p:cNvPr id="3" name="TextBox 2"/>
+          <p:cNvSpPr txBox="1"/>
+          <p:nvPr/>
+        </p:nvSpPr>
+        <p:spPr>
+          <a:xfrm>
+            <a:off x="548640" y="566928"/>
+            <a:ext cx="11094415" cy="822960"/>
+          </a:xfrm>
+          <a:prstGeom prst="rect">
+            <a:avLst/>
+          </a:prstGeom>
+          <a:noFill/>
+        </p:spPr>
+        <p:txBody>
+          <a:bodyPr wrap="square" anchor="ctr" lIns="0" rIns="0" tIns="0" bIns="0"/>
+          <a:lstStyle/>
+          <a:p>
+            <a:pPr algn="l"/>
+            <a:r>
+              <a:rPr sz="3200" b="1" i="0">
+                <a:solidFill>
+                  <a:srgbClr val="03306E"/>
+                </a:solidFill>
+                <a:latin typeface="Cambria"/>
+              </a:rPr>
+              <a:t>Quick check: Digital certificates</a:t>
+            </a:r>
+          </a:p>
+        </p:txBody>
+      </p:sp>
+      <p:sp>
+        <p:nvSpPr>
+          <p:cNvPr id="4" name="TextBox 3"/>
+          <p:cNvSpPr txBox="1"/>
+          <p:nvPr/>
+        </p:nvSpPr>
+        <p:spPr>
+          <a:xfrm>
+            <a:off x="548640" y="6446520"/>
+            <a:ext cx="8229600" cy="274320"/>
+          </a:xfrm>
+          <a:prstGeom prst="rect">
+            <a:avLst/>
+          </a:prstGeom>
+          <a:noFill/>
+        </p:spPr>
+        <p:txBody>
+          <a:bodyPr wrap="square" anchor="t" lIns="0" rIns="0" tIns="0" bIns="0"/>
+          <a:lstStyle/>
+          <a:p>
+            <a:pPr algn="l"/>
+            <a:r>
+              <a:rPr sz="1000" b="0" i="0">
+                <a:solidFill>
+                  <a:srgbClr val="54595D"/>
+                </a:solidFill>
+                <a:latin typeface="Calibri"/>
+              </a:rPr>
+              <a:t>Digital Support and Security T Level  ·  Cryptography and Digital Certificates</a:t>
+            </a:r>
+          </a:p>
+        </p:txBody>
+      </p:sp>
+      <p:sp>
+        <p:nvSpPr>
+          <p:cNvPr id="5" name="TextBox 4"/>
+          <p:cNvSpPr txBox="1"/>
+          <p:nvPr/>
+        </p:nvSpPr>
+        <p:spPr>
+          <a:xfrm>
+            <a:off x="10728655" y="6446520"/>
+            <a:ext cx="914400" cy="274320"/>
+          </a:xfrm>
+          <a:prstGeom prst="rect">
+            <a:avLst/>
+          </a:prstGeom>
+          <a:noFill/>
+        </p:spPr>
+        <p:txBody>
+          <a:bodyPr wrap="square" anchor="t" lIns="0" rIns="0" tIns="0" bIns="0"/>
+          <a:lstStyle/>
+          <a:p>
+            <a:pPr algn="r"/>
+            <a:r>
+              <a:rPr sz="1000" b="0" i="0">
+                <a:solidFill>
+                  <a:srgbClr val="54595D"/>
+                </a:solidFill>
+                <a:latin typeface="Calibri"/>
+              </a:rPr>
+              <a:t>12</a:t>
+            </a:r>
+          </a:p>
+        </p:txBody>
+      </p:sp>
+      <p:sp>
+        <p:nvSpPr>
+          <p:cNvPr id="6" name="Oval 5"/>
+          <p:cNvSpPr/>
+          <p:nvPr/>
+        </p:nvSpPr>
+        <p:spPr>
+          <a:xfrm>
+            <a:off x="548640" y="1691640"/>
+            <a:ext cx="502920" cy="502920"/>
+          </a:xfrm>
+          <a:prstGeom prst="ellipse">
+            <a:avLst/>
+          </a:prstGeom>
+          <a:solidFill>
+            <a:srgbClr val="E0463A"/>
+          </a:solidFill>
+          <a:ln>
+            <a:noFill/>
+          </a:ln>
+          <a:effectLst/>
+        </p:spPr>
+        <p:style>
+          <a:lnRef idx="1">
+            <a:schemeClr val="accent1"/>
+          </a:lnRef>
+          <a:fillRef idx="3">
+            <a:schemeClr val="accent1"/>
+          </a:fillRef>
+          <a:effectRef idx="2">
+            <a:schemeClr val="accent1"/>
+          </a:effectRef>
+          <a:fontRef idx="minor">
+            <a:schemeClr val="lt1"/>
+          </a:fontRef>
+        </p:style>
+        <p:txBody>
+          <a:bodyPr rtlCol="0" anchor="ctr" lIns="0" rIns="0" tIns="0" bIns="0"/>
+          <a:lstStyle/>
+          <a:p>
+            <a:pPr algn="ctr"/>
+            <a:r>
+              <a:rPr sz="1600" b="1">
+                <a:solidFill>
+                  <a:srgbClr val="FFFFFF"/>
+                </a:solidFill>
+                <a:latin typeface="Calibri"/>
+              </a:rPr>
+              <a:t>1</a:t>
+            </a:r>
+          </a:p>
+        </p:txBody>
+      </p:sp>
+      <p:sp>
+        <p:nvSpPr>
+          <p:cNvPr id="7" name="TextBox 6"/>
+          <p:cNvSpPr txBox="1"/>
+          <p:nvPr/>
+        </p:nvSpPr>
+        <p:spPr>
+          <a:xfrm>
+            <a:off x="1371600" y="1645920"/>
+            <a:ext cx="10271455" cy="1188720"/>
+          </a:xfrm>
+          <a:prstGeom prst="rect">
+            <a:avLst/>
+          </a:prstGeom>
+          <a:noFill/>
+        </p:spPr>
+        <p:txBody>
+          <a:bodyPr wrap="square" anchor="t" lIns="0" rIns="0" tIns="0" bIns="0"/>
+          <a:lstStyle/>
+          <a:p>
+            <a:pPr algn="l"/>
+            <a:r>
+              <a:rPr sz="2400" b="0" i="0">
+                <a:solidFill>
+                  <a:srgbClr val="202122"/>
+                </a:solidFill>
+                <a:latin typeface="Calibri"/>
+              </a:rPr>
+              <a:t>Who issues digital certificates?</a:t>
+            </a:r>
+          </a:p>
+        </p:txBody>
+      </p:sp>
+      <p:sp>
+        <p:nvSpPr>
+          <p:cNvPr id="8" name="Oval 7"/>
+          <p:cNvSpPr/>
+          <p:nvPr/>
+        </p:nvSpPr>
+        <p:spPr>
+          <a:xfrm>
+            <a:off x="548640" y="3108960"/>
+            <a:ext cx="502920" cy="502920"/>
+          </a:xfrm>
+          <a:prstGeom prst="ellipse">
+            <a:avLst/>
+          </a:prstGeom>
+          <a:solidFill>
+            <a:srgbClr val="E0463A"/>
+          </a:solidFill>
+          <a:ln>
+            <a:noFill/>
+          </a:ln>
+          <a:effectLst/>
+        </p:spPr>
+        <p:style>
+          <a:lnRef idx="1">
+            <a:schemeClr val="accent1"/>
+          </a:lnRef>
+          <a:fillRef idx="3">
+            <a:schemeClr val="accent1"/>
+          </a:fillRef>
+          <a:effectRef idx="2">
+            <a:schemeClr val="accent1"/>
+          </a:effectRef>
+          <a:fontRef idx="minor">
+            <a:schemeClr val="lt1"/>
+          </a:fontRef>
+        </p:style>
+        <p:txBody>
+          <a:bodyPr rtlCol="0" anchor="ctr" lIns="0" rIns="0" tIns="0" bIns="0"/>
+          <a:lstStyle/>
+          <a:p>
+            <a:pPr algn="ctr"/>
+            <a:r>
+              <a:rPr sz="1600" b="1">
+                <a:solidFill>
+                  <a:srgbClr val="FFFFFF"/>
+                </a:solidFill>
+                <a:latin typeface="Calibri"/>
+              </a:rPr>
+              <a:t>2</a:t>
+            </a:r>
+          </a:p>
+        </p:txBody>
+      </p:sp>
+      <p:sp>
+        <p:nvSpPr>
+          <p:cNvPr id="9" name="TextBox 8"/>
+          <p:cNvSpPr txBox="1"/>
+          <p:nvPr/>
+        </p:nvSpPr>
+        <p:spPr>
+          <a:xfrm>
+            <a:off x="1371600" y="3063240"/>
+            <a:ext cx="10271455" cy="1188720"/>
+          </a:xfrm>
+          <a:prstGeom prst="rect">
+            <a:avLst/>
+          </a:prstGeom>
+          <a:noFill/>
+        </p:spPr>
+        <p:txBody>
+          <a:bodyPr wrap="square" anchor="t" lIns="0" rIns="0" tIns="0" bIns="0"/>
+          <a:lstStyle/>
+          <a:p>
+            <a:pPr algn="l"/>
+            <a:r>
+              <a:rPr sz="2400" b="0" i="0">
+                <a:solidFill>
+                  <a:srgbClr val="202122"/>
+                </a:solidFill>
+                <a:latin typeface="Calibri"/>
+              </a:rPr>
+              <a:t>Name three things a certificate contains.</a:t>
+            </a:r>
+          </a:p>
+        </p:txBody>
+      </p:sp>
+      <p:sp>
+        <p:nvSpPr>
+          <p:cNvPr id="10" name="Oval 9"/>
+          <p:cNvSpPr/>
+          <p:nvPr/>
+        </p:nvSpPr>
+        <p:spPr>
+          <a:xfrm>
+            <a:off x="548640" y="4526280"/>
+            <a:ext cx="502920" cy="502920"/>
+          </a:xfrm>
+          <a:prstGeom prst="ellipse">
+            <a:avLst/>
+          </a:prstGeom>
+          <a:solidFill>
+            <a:srgbClr val="E0463A"/>
+          </a:solidFill>
+          <a:ln>
+            <a:noFill/>
+          </a:ln>
+          <a:effectLst/>
+        </p:spPr>
+        <p:style>
+          <a:lnRef idx="1">
+            <a:schemeClr val="accent1"/>
+          </a:lnRef>
+          <a:fillRef idx="3">
+            <a:schemeClr val="accent1"/>
+          </a:fillRef>
+          <a:effectRef idx="2">
+            <a:schemeClr val="accent1"/>
+          </a:effectRef>
+          <a:fontRef idx="minor">
+            <a:schemeClr val="lt1"/>
+          </a:fontRef>
+        </p:style>
+        <p:txBody>
+          <a:bodyPr rtlCol="0" anchor="ctr" lIns="0" rIns="0" tIns="0" bIns="0"/>
+          <a:lstStyle/>
+          <a:p>
+            <a:pPr algn="ctr"/>
+            <a:r>
+              <a:rPr sz="1600" b="1">
+                <a:solidFill>
+                  <a:srgbClr val="FFFFFF"/>
+                </a:solidFill>
+                <a:latin typeface="Calibri"/>
+              </a:rPr>
+              <a:t>3</a:t>
+            </a:r>
+          </a:p>
+        </p:txBody>
+      </p:sp>
+      <p:sp>
+        <p:nvSpPr>
+          <p:cNvPr id="11" name="TextBox 10"/>
+          <p:cNvSpPr txBox="1"/>
+          <p:nvPr/>
+        </p:nvSpPr>
+        <p:spPr>
+          <a:xfrm>
+            <a:off x="1371600" y="4480560"/>
+            <a:ext cx="10271455" cy="1188720"/>
+          </a:xfrm>
+          <a:prstGeom prst="rect">
+            <a:avLst/>
+          </a:prstGeom>
+          <a:noFill/>
+        </p:spPr>
+        <p:txBody>
+          <a:bodyPr wrap="square" anchor="t" lIns="0" rIns="0" tIns="0" bIns="0"/>
+          <a:lstStyle/>
+          <a:p>
+            <a:pPr algn="l"/>
+            <a:r>
+              <a:rPr sz="2400" b="0" i="0">
+                <a:solidFill>
+                  <a:srgbClr val="202122"/>
+                </a:solidFill>
+                <a:latin typeface="Calibri"/>
+              </a:rPr>
+              <a:t>What does a code signing certificate prove?</a:t>
+            </a:r>
+          </a:p>
+        </p:txBody>
+      </p:sp>
+      <p:sp>
+        <p:nvSpPr>
+          <p:cNvPr id="12" name="TextBox 11"/>
+          <p:cNvSpPr txBox="1"/>
+          <p:nvPr/>
+        </p:nvSpPr>
+        <p:spPr>
+          <a:xfrm>
+            <a:off x="548640" y="5852160"/>
+            <a:ext cx="11094415" cy="365760"/>
+          </a:xfrm>
+          <a:prstGeom prst="rect">
+            <a:avLst/>
+          </a:prstGeom>
+          <a:noFill/>
+        </p:spPr>
+        <p:txBody>
+          <a:bodyPr wrap="square" anchor="t" lIns="0" rIns="0" tIns="0" bIns="0"/>
+          <a:lstStyle/>
+          <a:p>
+            <a:pPr algn="l"/>
+            <a:r>
+              <a:rPr sz="1300" b="0" i="1">
+                <a:solidFill>
+                  <a:srgbClr val="54595D"/>
+                </a:solidFill>
+                <a:latin typeface="Calibri"/>
+              </a:rPr>
+              <a:t>Answer on mini whiteboards or in your book. Answers are in the speaker notes.</a:t>
+            </a:r>
+          </a:p>
+        </p:txBody>
+      </p:sp>
+    </p:spTree>
+  </p:cSld>
+  <p:clrMapOvr>
+    <a:masterClrMapping/>
+  </p:clrMapOvr>
+</p:sld>
+</file>
+
+<file path=ppt/slides/slide13.xml><?xml version="1.0" encoding="utf-8"?>
+<p:sld xmlns:a="http://schemas.openxmlformats.org/drawingml/2006/main" xmlns:p="http://schemas.openxmlformats.org/presentationml/2006/main" xmlns:r="http://schemas.openxmlformats.org/officeDocument/2006/relationships">
+  <p:cSld>
+    <p:bg>
+      <p:bgPr>
+        <a:solidFill>
+          <a:srgbClr val="FFFFFF"/>
+        </a:solidFill>
+        <a:effectLst/>
+      </p:bgPr>
+    </p:bg>
+    <p:spTree>
+      <p:nvGrpSpPr>
+        <p:cNvPr id="1" name=""/>
+        <p:cNvGrpSpPr/>
+        <p:nvPr/>
+      </p:nvGrpSpPr>
+      <p:grpSpPr/>
+      <p:sp>
+        <p:nvSpPr>
+          <p:cNvPr id="2" name="TextBox 1"/>
+          <p:cNvSpPr txBox="1"/>
+          <p:nvPr/>
+        </p:nvSpPr>
+        <p:spPr>
+          <a:xfrm>
+            <a:off x="548640" y="320040"/>
+            <a:ext cx="11094415" cy="274320"/>
+          </a:xfrm>
+          <a:prstGeom prst="rect">
+            <a:avLst/>
+          </a:prstGeom>
+          <a:noFill/>
+        </p:spPr>
+        <p:txBody>
+          <a:bodyPr wrap="square" anchor="t" lIns="0" rIns="0" tIns="0" bIns="0"/>
+          <a:lstStyle/>
+          <a:p>
+            <a:pPr algn="l"/>
+            <a:r>
+              <a:rPr sz="1100" b="1" i="0">
+                <a:solidFill>
+                  <a:srgbClr val="54595D"/>
+                </a:solidFill>
+                <a:latin typeface="Calibri"/>
+              </a:rPr>
+              <a:t>CYBER SECURITY  ·  Cyber Security Content Areas 1 and 2</a:t>
+            </a:r>
+          </a:p>
+        </p:txBody>
+      </p:sp>
+      <p:sp>
+        <p:nvSpPr>
+          <p:cNvPr id="3" name="TextBox 2"/>
+          <p:cNvSpPr txBox="1"/>
+          <p:nvPr/>
+        </p:nvSpPr>
+        <p:spPr>
+          <a:xfrm>
+            <a:off x="548640" y="566928"/>
+            <a:ext cx="11094415" cy="822960"/>
+          </a:xfrm>
+          <a:prstGeom prst="rect">
+            <a:avLst/>
+          </a:prstGeom>
+          <a:noFill/>
+        </p:spPr>
+        <p:txBody>
+          <a:bodyPr wrap="square" anchor="ctr" lIns="0" rIns="0" tIns="0" bIns="0"/>
+          <a:lstStyle/>
+          <a:p>
+            <a:pPr algn="l"/>
+            <a:r>
+              <a:rPr sz="3200" b="1" i="0">
+                <a:solidFill>
+                  <a:srgbClr val="03306E"/>
+                </a:solidFill>
+                <a:latin typeface="Cambria"/>
+              </a:rPr>
+              <a:t>Generating a certificate</a:t>
+            </a:r>
+          </a:p>
+        </p:txBody>
+      </p:sp>
+      <p:sp>
+        <p:nvSpPr>
+          <p:cNvPr id="4" name="TextBox 3"/>
+          <p:cNvSpPr txBox="1"/>
+          <p:nvPr/>
+        </p:nvSpPr>
+        <p:spPr>
+          <a:xfrm>
+            <a:off x="548640" y="6446520"/>
+            <a:ext cx="8229600" cy="274320"/>
+          </a:xfrm>
+          <a:prstGeom prst="rect">
+            <a:avLst/>
+          </a:prstGeom>
+          <a:noFill/>
+        </p:spPr>
+        <p:txBody>
+          <a:bodyPr wrap="square" anchor="t" lIns="0" rIns="0" tIns="0" bIns="0"/>
+          <a:lstStyle/>
+          <a:p>
+            <a:pPr algn="l"/>
+            <a:r>
+              <a:rPr sz="1000" b="0" i="0">
+                <a:solidFill>
+                  <a:srgbClr val="54595D"/>
+                </a:solidFill>
+                <a:latin typeface="Calibri"/>
+              </a:rPr>
+              <a:t>Digital Support and Security T Level  ·  Cryptography and Digital Certificates</a:t>
+            </a:r>
+          </a:p>
+        </p:txBody>
+      </p:sp>
+      <p:sp>
+        <p:nvSpPr>
+          <p:cNvPr id="5" name="TextBox 4"/>
+          <p:cNvSpPr txBox="1"/>
+          <p:nvPr/>
+        </p:nvSpPr>
+        <p:spPr>
+          <a:xfrm>
+            <a:off x="10728655" y="6446520"/>
+            <a:ext cx="914400" cy="274320"/>
+          </a:xfrm>
+          <a:prstGeom prst="rect">
+            <a:avLst/>
+          </a:prstGeom>
+          <a:noFill/>
+        </p:spPr>
+        <p:txBody>
+          <a:bodyPr wrap="square" anchor="t" lIns="0" rIns="0" tIns="0" bIns="0"/>
+          <a:lstStyle/>
+          <a:p>
+            <a:pPr algn="r"/>
+            <a:r>
+              <a:rPr sz="1000" b="0" i="0">
+                <a:solidFill>
+                  <a:srgbClr val="54595D"/>
+                </a:solidFill>
+                <a:latin typeface="Calibri"/>
+              </a:rPr>
+              <a:t>13</a:t>
+            </a:r>
+          </a:p>
+        </p:txBody>
+      </p:sp>
+      <p:sp>
+        <p:nvSpPr>
+          <p:cNvPr id="6" name="TextBox 5"/>
+          <p:cNvSpPr txBox="1"/>
+          <p:nvPr/>
+        </p:nvSpPr>
+        <p:spPr>
+          <a:xfrm>
+            <a:off x="548640" y="1554480"/>
+            <a:ext cx="6720840" cy="4617720"/>
+          </a:xfrm>
+          <a:prstGeom prst="rect">
+            <a:avLst/>
+          </a:prstGeom>
+          <a:noFill/>
+        </p:spPr>
+        <p:txBody>
+          <a:bodyPr wrap="square" lIns="0" rIns="0" tIns="0" bIns="0">
+            <a:spAutoFit/>
+          </a:bodyPr>
+          <a:lstStyle/>
+          <a:p>
+            <a:pPr>
+              <a:spcAft>
+                <a:spcPts val="1140"/>
+              </a:spcAft>
+            </a:pPr>
+            <a:r>
+              <a:rPr sz="1900" b="0">
+                <a:solidFill>
+                  <a:srgbClr val="202122"/>
+                </a:solidFill>
+                <a:latin typeface="Calibri"/>
+              </a:rPr>
+              <a:t>Getting a certificate follows four steps.</a:t>
+            </a:r>
+          </a:p>
+          <a:p>
+            <a:pPr>
+              <a:spcAft>
+                <a:spcPts val="1140"/>
+              </a:spcAft>
+            </a:pPr>
+            <a:r>
+              <a:rPr sz="1900" b="0">
+                <a:solidFill>
+                  <a:srgbClr val="202122"/>
+                </a:solidFill>
+                <a:latin typeface="Calibri"/>
+              </a:rPr>
+              <a:t>First, generate a public and private key pair. The private key never leaves the server.</a:t>
+            </a:r>
+          </a:p>
+          <a:p>
+            <a:pPr>
+              <a:spcAft>
+                <a:spcPts val="1140"/>
+              </a:spcAft>
+            </a:pPr>
+            <a:r>
+              <a:rPr sz="1900" b="0">
+                <a:solidFill>
+                  <a:srgbClr val="202122"/>
+                </a:solidFill>
+                <a:latin typeface="Calibri"/>
+              </a:rPr>
+              <a:t>Next, create a Certificate Signing Request (CSR) containing the public key and the identity details.</a:t>
+            </a:r>
+          </a:p>
+          <a:p>
+            <a:pPr>
+              <a:spcAft>
+                <a:spcPts val="1140"/>
+              </a:spcAft>
+            </a:pPr>
+            <a:r>
+              <a:rPr sz="1900" b="0">
+                <a:solidFill>
+                  <a:srgbClr val="202122"/>
+                </a:solidFill>
+                <a:latin typeface="Calibri"/>
+              </a:rPr>
+              <a:t>Then a trusted Certificate Authority checks the details and issues a signed certificate.</a:t>
+            </a:r>
+          </a:p>
+          <a:p>
+            <a:pPr>
+              <a:spcAft>
+                <a:spcPts val="1140"/>
+              </a:spcAft>
+            </a:pPr>
+            <a:r>
+              <a:rPr sz="1900" b="0">
+                <a:solidFill>
+                  <a:srgbClr val="202122"/>
+                </a:solidFill>
+                <a:latin typeface="Calibri"/>
+              </a:rPr>
+              <a:t>Finally, install the certificate on the server or client.</a:t>
+            </a:r>
+          </a:p>
+          <a:p>
+            <a:pPr>
+              <a:spcAft>
+                <a:spcPts val="1140"/>
+              </a:spcAft>
+            </a:pPr>
+            <a:r>
+              <a:rPr sz="1900" b="0">
+                <a:solidFill>
+                  <a:srgbClr val="202122"/>
+                </a:solidFill>
+                <a:latin typeface="Calibri"/>
+              </a:rPr>
+              <a:t>Certificate management tools then monitor expiry dates, renew certificates automatically, revoke compromised ones early, and help diagnose certificate errors.</a:t>
+            </a:r>
+          </a:p>
+        </p:txBody>
+      </p:sp>
+      <p:sp>
+        <p:nvSpPr>
+          <p:cNvPr id="7" name="Rounded Rectangle 6"/>
+          <p:cNvSpPr/>
+          <p:nvPr/>
+        </p:nvSpPr>
+        <p:spPr>
+          <a:xfrm>
+            <a:off x="7772400" y="1554480"/>
+            <a:ext cx="3867912" cy="4526280"/>
+          </a:xfrm>
+          <a:prstGeom prst="roundRect">
+            <a:avLst>
+              <a:gd name="adj" fmla="val 8000"/>
+            </a:avLst>
+          </a:prstGeom>
+          <a:solidFill>
+            <a:srgbClr val="03306E"/>
+          </a:solidFill>
+          <a:ln>
+            <a:noFill/>
+          </a:ln>
+          <a:effectLst/>
+        </p:spPr>
+        <p:style>
+          <a:lnRef idx="1">
+            <a:schemeClr val="accent1"/>
+          </a:lnRef>
+          <a:fillRef idx="3">
+            <a:schemeClr val="accent1"/>
+          </a:fillRef>
+          <a:effectRef idx="2">
+            <a:schemeClr val="accent1"/>
+          </a:effectRef>
+          <a:fontRef idx="minor">
+            <a:schemeClr val="lt1"/>
+          </a:fontRef>
+        </p:style>
+        <p:txBody>
+          <a:bodyPr rtlCol="0" anchor="ctr"/>
+          <a:lstStyle/>
+          <a:p/>
+        </p:txBody>
+      </p:sp>
+      <p:sp>
+        <p:nvSpPr>
+          <p:cNvPr id="8" name="Oval 7"/>
+          <p:cNvSpPr/>
+          <p:nvPr/>
+        </p:nvSpPr>
+        <p:spPr>
+          <a:xfrm>
+            <a:off x="8046720" y="1828800"/>
+            <a:ext cx="548640" cy="548640"/>
+          </a:xfrm>
+          <a:prstGeom prst="ellipse">
+            <a:avLst/>
+          </a:prstGeom>
+          <a:solidFill>
+            <a:srgbClr val="E0463A"/>
+          </a:solidFill>
+          <a:ln>
+            <a:noFill/>
+          </a:ln>
+          <a:effectLst/>
+        </p:spPr>
+        <p:style>
+          <a:lnRef idx="1">
+            <a:schemeClr val="accent1"/>
+          </a:lnRef>
+          <a:fillRef idx="3">
+            <a:schemeClr val="accent1"/>
+          </a:fillRef>
+          <a:effectRef idx="2">
+            <a:schemeClr val="accent1"/>
+          </a:effectRef>
+          <a:fontRef idx="minor">
+            <a:schemeClr val="lt1"/>
+          </a:fontRef>
+        </p:style>
+        <p:txBody>
+          <a:bodyPr rtlCol="0" anchor="ctr" lIns="0" rIns="0" tIns="0" bIns="0"/>
+          <a:lstStyle/>
+          <a:p>
+            <a:pPr algn="ctr"/>
+            <a:r>
+              <a:rPr sz="1300" b="1">
+                <a:solidFill>
+                  <a:srgbClr val="FFFFFF"/>
+                </a:solidFill>
+                <a:latin typeface="Calibri"/>
+              </a:rPr>
+              <a:t>e.g.</a:t>
+            </a:r>
+          </a:p>
+        </p:txBody>
+      </p:sp>
+      <p:sp>
+        <p:nvSpPr>
+          <p:cNvPr id="9" name="TextBox 8"/>
+          <p:cNvSpPr txBox="1"/>
+          <p:nvPr/>
+        </p:nvSpPr>
+        <p:spPr>
+          <a:xfrm>
+            <a:off x="8046720" y="2560320"/>
+            <a:ext cx="3291840" cy="365760"/>
+          </a:xfrm>
+          <a:prstGeom prst="rect">
+            <a:avLst/>
+          </a:prstGeom>
+          <a:noFill/>
+        </p:spPr>
+        <p:txBody>
+          <a:bodyPr wrap="square" anchor="t" lIns="0" rIns="0" tIns="0" bIns="0"/>
+          <a:lstStyle/>
+          <a:p>
+            <a:pPr algn="l"/>
+            <a:r>
+              <a:rPr sz="1300" b="1" i="0">
+                <a:solidFill>
+                  <a:srgbClr val="A9C8F0"/>
+                </a:solidFill>
+                <a:latin typeface="Calibri"/>
+              </a:rPr>
+              <a:t>EXAMPLE</a:t>
+            </a:r>
+          </a:p>
+        </p:txBody>
+      </p:sp>
+      <p:sp>
+        <p:nvSpPr>
+          <p:cNvPr id="10" name="TextBox 9"/>
+          <p:cNvSpPr txBox="1"/>
+          <p:nvPr/>
+        </p:nvSpPr>
+        <p:spPr>
+          <a:xfrm>
+            <a:off x="8046720" y="2971800"/>
+            <a:ext cx="3291840" cy="2971800"/>
+          </a:xfrm>
+          <a:prstGeom prst="rect">
+            <a:avLst/>
+          </a:prstGeom>
+          <a:noFill/>
+        </p:spPr>
+        <p:txBody>
+          <a:bodyPr wrap="square" anchor="t" lIns="0" rIns="0" tIns="0" bIns="0"/>
+          <a:lstStyle/>
+          <a:p>
+            <a:pPr algn="l"/>
+            <a:r>
+              <a:rPr sz="1900" b="0" i="0">
+                <a:solidFill>
+                  <a:srgbClr val="FFFFFF"/>
+                </a:solidFill>
+                <a:latin typeface="Cambria"/>
+              </a:rPr>
+              <a:t>A company's website suddenly shows security warnings because its certificate expired over the weekend: exactly what auto-renewal tools prevent.</a:t>
+            </a:r>
+          </a:p>
+        </p:txBody>
+      </p:sp>
+    </p:spTree>
+  </p:cSld>
+  <p:clrMapOvr>
+    <a:masterClrMapping/>
+  </p:clrMapOvr>
+</p:sld>
+</file>
+
+<file path=ppt/slides/slide14.xml><?xml version="1.0" encoding="utf-8"?>
+<p:sld xmlns:a="http://schemas.openxmlformats.org/drawingml/2006/main" xmlns:p="http://schemas.openxmlformats.org/presentationml/2006/main" xmlns:r="http://schemas.openxmlformats.org/officeDocument/2006/relationships">
+  <p:cSld>
+    <p:bg>
+      <p:bgPr>
+        <a:solidFill>
+          <a:srgbClr val="FFFFFF"/>
+        </a:solidFill>
+        <a:effectLst/>
+      </p:bgPr>
+    </p:bg>
+    <p:spTree>
+      <p:nvGrpSpPr>
+        <p:cNvPr id="1" name=""/>
+        <p:cNvGrpSpPr/>
+        <p:nvPr/>
+      </p:nvGrpSpPr>
+      <p:grpSpPr/>
+      <p:sp>
+        <p:nvSpPr>
+          <p:cNvPr id="2" name="TextBox 1"/>
+          <p:cNvSpPr txBox="1"/>
+          <p:nvPr/>
+        </p:nvSpPr>
+        <p:spPr>
+          <a:xfrm>
+            <a:off x="548640" y="320040"/>
+            <a:ext cx="11094415" cy="274320"/>
+          </a:xfrm>
+          <a:prstGeom prst="rect">
+            <a:avLst/>
+          </a:prstGeom>
+          <a:noFill/>
+        </p:spPr>
+        <p:txBody>
+          <a:bodyPr wrap="square" anchor="t" lIns="0" rIns="0" tIns="0" bIns="0"/>
+          <a:lstStyle/>
+          <a:p>
+            <a:pPr algn="l"/>
+            <a:r>
+              <a:rPr sz="1100" b="1" i="0">
+                <a:solidFill>
+                  <a:srgbClr val="54595D"/>
+                </a:solidFill>
+                <a:latin typeface="Calibri"/>
+              </a:rPr>
+              <a:t>CYBER SECURITY  ·  Cyber Security Content Areas 1 and 2</a:t>
+            </a:r>
+          </a:p>
+        </p:txBody>
+      </p:sp>
+      <p:sp>
+        <p:nvSpPr>
+          <p:cNvPr id="3" name="TextBox 2"/>
+          <p:cNvSpPr txBox="1"/>
+          <p:nvPr/>
+        </p:nvSpPr>
+        <p:spPr>
+          <a:xfrm>
+            <a:off x="548640" y="566928"/>
+            <a:ext cx="11094415" cy="822960"/>
+          </a:xfrm>
+          <a:prstGeom prst="rect">
+            <a:avLst/>
+          </a:prstGeom>
+          <a:noFill/>
+        </p:spPr>
+        <p:txBody>
+          <a:bodyPr wrap="square" anchor="ctr" lIns="0" rIns="0" tIns="0" bIns="0"/>
+          <a:lstStyle/>
+          <a:p>
+            <a:pPr algn="l"/>
+            <a:r>
+              <a:rPr sz="3200" b="1" i="0">
+                <a:solidFill>
+                  <a:srgbClr val="03306E"/>
+                </a:solidFill>
+                <a:latin typeface="Cambria"/>
+              </a:rPr>
+              <a:t>Generating a certificate</a:t>
+            </a:r>
+          </a:p>
+        </p:txBody>
+      </p:sp>
+      <p:sp>
+        <p:nvSpPr>
+          <p:cNvPr id="4" name="TextBox 3"/>
+          <p:cNvSpPr txBox="1"/>
+          <p:nvPr/>
+        </p:nvSpPr>
+        <p:spPr>
+          <a:xfrm>
+            <a:off x="548640" y="6446520"/>
+            <a:ext cx="8229600" cy="274320"/>
+          </a:xfrm>
+          <a:prstGeom prst="rect">
+            <a:avLst/>
+          </a:prstGeom>
+          <a:noFill/>
+        </p:spPr>
+        <p:txBody>
+          <a:bodyPr wrap="square" anchor="t" lIns="0" rIns="0" tIns="0" bIns="0"/>
+          <a:lstStyle/>
+          <a:p>
+            <a:pPr algn="l"/>
+            <a:r>
+              <a:rPr sz="1000" b="0" i="0">
+                <a:solidFill>
+                  <a:srgbClr val="54595D"/>
+                </a:solidFill>
+                <a:latin typeface="Calibri"/>
+              </a:rPr>
+              <a:t>Digital Support and Security T Level  ·  Cryptography and Digital Certificates</a:t>
+            </a:r>
+          </a:p>
+        </p:txBody>
+      </p:sp>
+      <p:sp>
+        <p:nvSpPr>
+          <p:cNvPr id="5" name="TextBox 4"/>
+          <p:cNvSpPr txBox="1"/>
+          <p:nvPr/>
+        </p:nvSpPr>
+        <p:spPr>
+          <a:xfrm>
+            <a:off x="10728655" y="6446520"/>
+            <a:ext cx="914400" cy="274320"/>
+          </a:xfrm>
+          <a:prstGeom prst="rect">
+            <a:avLst/>
+          </a:prstGeom>
+          <a:noFill/>
+        </p:spPr>
+        <p:txBody>
+          <a:bodyPr wrap="square" anchor="t" lIns="0" rIns="0" tIns="0" bIns="0"/>
+          <a:lstStyle/>
+          <a:p>
+            <a:pPr algn="r"/>
+            <a:r>
+              <a:rPr sz="1000" b="0" i="0">
+                <a:solidFill>
+                  <a:srgbClr val="54595D"/>
+                </a:solidFill>
+                <a:latin typeface="Calibri"/>
+              </a:rPr>
+              <a:t>14</a:t>
+            </a:r>
+          </a:p>
+        </p:txBody>
+      </p:sp>
+      <p:sp>
+        <p:nvSpPr>
+          <p:cNvPr id="6" name="Rectangle 5"/>
+          <p:cNvSpPr/>
+          <p:nvPr/>
+        </p:nvSpPr>
+        <p:spPr>
+          <a:xfrm>
+            <a:off x="1884006" y="2382012"/>
+            <a:ext cx="8423681" cy="36576"/>
+          </a:xfrm>
+          <a:prstGeom prst="rect">
+            <a:avLst/>
+          </a:prstGeom>
+          <a:solidFill>
+            <a:srgbClr val="A9C8F0"/>
+          </a:solidFill>
+          <a:ln>
+            <a:noFill/>
+          </a:ln>
+          <a:effectLst/>
+        </p:spPr>
+        <p:style>
+          <a:lnRef idx="1">
+            <a:schemeClr val="accent1"/>
+          </a:lnRef>
+          <a:fillRef idx="3">
+            <a:schemeClr val="accent1"/>
+          </a:fillRef>
+          <a:effectRef idx="2">
+            <a:schemeClr val="accent1"/>
+          </a:effectRef>
+          <a:fontRef idx="minor">
+            <a:schemeClr val="lt1"/>
+          </a:fontRef>
+        </p:style>
+        <p:txBody>
+          <a:bodyPr rtlCol="0" anchor="ctr"/>
+          <a:lstStyle/>
+          <a:p/>
+        </p:txBody>
+      </p:sp>
+      <p:sp>
+        <p:nvSpPr>
+          <p:cNvPr id="7" name="Oval 6"/>
+          <p:cNvSpPr/>
+          <p:nvPr/>
+        </p:nvSpPr>
+        <p:spPr>
+          <a:xfrm>
+            <a:off x="1563966" y="2080260"/>
+            <a:ext cx="640080" cy="640080"/>
+          </a:xfrm>
+          <a:prstGeom prst="ellipse">
+            <a:avLst/>
+          </a:prstGeom>
+          <a:solidFill>
+            <a:srgbClr val="E0463A"/>
+          </a:solidFill>
+          <a:ln>
+            <a:noFill/>
+          </a:ln>
+          <a:effectLst/>
+        </p:spPr>
+        <p:style>
+          <a:lnRef idx="1">
+            <a:schemeClr val="accent1"/>
+          </a:lnRef>
+          <a:fillRef idx="3">
+            <a:schemeClr val="accent1"/>
+          </a:fillRef>
+          <a:effectRef idx="2">
+            <a:schemeClr val="accent1"/>
+          </a:effectRef>
+          <a:fontRef idx="minor">
+            <a:schemeClr val="lt1"/>
+          </a:fontRef>
+        </p:style>
+        <p:txBody>
+          <a:bodyPr rtlCol="0" anchor="ctr" lIns="0" rIns="0" tIns="0" bIns="0"/>
+          <a:lstStyle/>
+          <a:p>
+            <a:pPr algn="ctr"/>
+            <a:r>
+              <a:rPr sz="2000" b="1">
+                <a:solidFill>
+                  <a:srgbClr val="FFFFFF"/>
+                </a:solidFill>
+                <a:latin typeface="Calibri"/>
+              </a:rPr>
+              <a:t>1</a:t>
+            </a:r>
+          </a:p>
+        </p:txBody>
+      </p:sp>
+      <p:sp>
+        <p:nvSpPr>
+          <p:cNvPr id="8" name="TextBox 7"/>
+          <p:cNvSpPr txBox="1"/>
+          <p:nvPr/>
+        </p:nvSpPr>
+        <p:spPr>
+          <a:xfrm>
+            <a:off x="548640" y="2857500"/>
+            <a:ext cx="2670733" cy="731520"/>
+          </a:xfrm>
+          <a:prstGeom prst="rect">
+            <a:avLst/>
+          </a:prstGeom>
+          <a:noFill/>
+        </p:spPr>
+        <p:txBody>
+          <a:bodyPr wrap="square" anchor="t" lIns="0" rIns="0" tIns="0" bIns="0"/>
+          <a:lstStyle/>
+          <a:p>
+            <a:pPr algn="ctr"/>
+            <a:r>
+              <a:rPr sz="1700" b="1" i="0">
+                <a:solidFill>
+                  <a:srgbClr val="03306E"/>
+                </a:solidFill>
+                <a:latin typeface="Calibri"/>
+              </a:rPr>
+              <a:t>Key pair</a:t>
+            </a:r>
+          </a:p>
+        </p:txBody>
+      </p:sp>
+      <p:sp>
+        <p:nvSpPr>
+          <p:cNvPr id="9" name="Rounded Rectangle 8"/>
+          <p:cNvSpPr/>
+          <p:nvPr/>
+        </p:nvSpPr>
+        <p:spPr>
+          <a:xfrm>
+            <a:off x="548640" y="3634740"/>
+            <a:ext cx="2670733" cy="1234439"/>
+          </a:xfrm>
+          <a:prstGeom prst="roundRect">
+            <a:avLst>
+              <a:gd name="adj" fmla="val 6000"/>
+            </a:avLst>
+          </a:prstGeom>
+          <a:solidFill>
+            <a:srgbClr val="EAF3FF"/>
+          </a:solidFill>
+          <a:ln>
+            <a:noFill/>
+          </a:ln>
+          <a:effectLst/>
+        </p:spPr>
+        <p:style>
+          <a:lnRef idx="1">
+            <a:schemeClr val="accent1"/>
+          </a:lnRef>
+          <a:fillRef idx="3">
+            <a:schemeClr val="accent1"/>
+          </a:fillRef>
+          <a:effectRef idx="2">
+            <a:schemeClr val="accent1"/>
+          </a:effectRef>
+          <a:fontRef idx="minor">
+            <a:schemeClr val="lt1"/>
+          </a:fontRef>
+        </p:style>
+        <p:txBody>
+          <a:bodyPr rtlCol="0" anchor="ctr"/>
+          <a:lstStyle/>
+          <a:p/>
+        </p:txBody>
+      </p:sp>
+      <p:sp>
+        <p:nvSpPr>
+          <p:cNvPr id="10" name="TextBox 9"/>
+          <p:cNvSpPr txBox="1"/>
+          <p:nvPr/>
+        </p:nvSpPr>
+        <p:spPr>
+          <a:xfrm>
+            <a:off x="685800" y="3771900"/>
+            <a:ext cx="2396413" cy="960119"/>
+          </a:xfrm>
+          <a:prstGeom prst="rect">
+            <a:avLst/>
+          </a:prstGeom>
+          <a:noFill/>
+        </p:spPr>
+        <p:txBody>
+          <a:bodyPr wrap="square" anchor="t" lIns="0" rIns="0" tIns="0" bIns="0"/>
+          <a:lstStyle/>
+          <a:p>
+            <a:pPr algn="l"/>
+            <a:r>
+              <a:rPr sz="1800" b="0" i="0">
+                <a:solidFill>
+                  <a:srgbClr val="202122"/>
+                </a:solidFill>
+                <a:latin typeface="Calibri"/>
+              </a:rPr>
+              <a:t>Generate a public and private key.</a:t>
+            </a:r>
+          </a:p>
+        </p:txBody>
+      </p:sp>
+      <p:sp>
+        <p:nvSpPr>
+          <p:cNvPr id="11" name="Oval 10"/>
+          <p:cNvSpPr/>
+          <p:nvPr/>
+        </p:nvSpPr>
+        <p:spPr>
+          <a:xfrm>
+            <a:off x="4371860" y="2080260"/>
+            <a:ext cx="640080" cy="640080"/>
+          </a:xfrm>
+          <a:prstGeom prst="ellipse">
+            <a:avLst/>
+          </a:prstGeom>
+          <a:solidFill>
+            <a:srgbClr val="E0463A"/>
+          </a:solidFill>
+          <a:ln>
+            <a:noFill/>
+          </a:ln>
+          <a:effectLst/>
+        </p:spPr>
+        <p:style>
+          <a:lnRef idx="1">
+            <a:schemeClr val="accent1"/>
+          </a:lnRef>
+          <a:fillRef idx="3">
+            <a:schemeClr val="accent1"/>
+          </a:fillRef>
+          <a:effectRef idx="2">
+            <a:schemeClr val="accent1"/>
+          </a:effectRef>
+          <a:fontRef idx="minor">
+            <a:schemeClr val="lt1"/>
+          </a:fontRef>
+        </p:style>
+        <p:txBody>
+          <a:bodyPr rtlCol="0" anchor="ctr" lIns="0" rIns="0" tIns="0" bIns="0"/>
+          <a:lstStyle/>
+          <a:p>
+            <a:pPr algn="ctr"/>
+            <a:r>
+              <a:rPr sz="2000" b="1">
+                <a:solidFill>
+                  <a:srgbClr val="FFFFFF"/>
+                </a:solidFill>
+                <a:latin typeface="Calibri"/>
+              </a:rPr>
+              <a:t>2</a:t>
+            </a:r>
+          </a:p>
+        </p:txBody>
+      </p:sp>
+      <p:sp>
+        <p:nvSpPr>
+          <p:cNvPr id="12" name="TextBox 11"/>
+          <p:cNvSpPr txBox="1"/>
+          <p:nvPr/>
+        </p:nvSpPr>
+        <p:spPr>
+          <a:xfrm>
+            <a:off x="3356533" y="2857500"/>
+            <a:ext cx="2670733" cy="731520"/>
+          </a:xfrm>
+          <a:prstGeom prst="rect">
+            <a:avLst/>
+          </a:prstGeom>
+          <a:noFill/>
+        </p:spPr>
+        <p:txBody>
+          <a:bodyPr wrap="square" anchor="t" lIns="0" rIns="0" tIns="0" bIns="0"/>
+          <a:lstStyle/>
+          <a:p>
+            <a:pPr algn="ctr"/>
+            <a:r>
+              <a:rPr sz="1700" b="1" i="0">
+                <a:solidFill>
+                  <a:srgbClr val="03306E"/>
+                </a:solidFill>
+                <a:latin typeface="Calibri"/>
+              </a:rPr>
+              <a:t>CSR</a:t>
+            </a:r>
+          </a:p>
+        </p:txBody>
+      </p:sp>
+      <p:sp>
+        <p:nvSpPr>
+          <p:cNvPr id="13" name="Rounded Rectangle 12"/>
+          <p:cNvSpPr/>
+          <p:nvPr/>
+        </p:nvSpPr>
+        <p:spPr>
+          <a:xfrm>
+            <a:off x="3356533" y="3634740"/>
+            <a:ext cx="2670733" cy="1234439"/>
+          </a:xfrm>
+          <a:prstGeom prst="roundRect">
+            <a:avLst>
+              <a:gd name="adj" fmla="val 6000"/>
+            </a:avLst>
+          </a:prstGeom>
+          <a:solidFill>
+            <a:srgbClr val="EAF3FF"/>
+          </a:solidFill>
+          <a:ln>
+            <a:noFill/>
+          </a:ln>
+          <a:effectLst/>
+        </p:spPr>
+        <p:style>
+          <a:lnRef idx="1">
+            <a:schemeClr val="accent1"/>
+          </a:lnRef>
+          <a:fillRef idx="3">
+            <a:schemeClr val="accent1"/>
+          </a:fillRef>
+          <a:effectRef idx="2">
+            <a:schemeClr val="accent1"/>
+          </a:effectRef>
+          <a:fontRef idx="minor">
+            <a:schemeClr val="lt1"/>
+          </a:fontRef>
+        </p:style>
+        <p:txBody>
+          <a:bodyPr rtlCol="0" anchor="ctr"/>
+          <a:lstStyle/>
+          <a:p/>
+        </p:txBody>
+      </p:sp>
+      <p:sp>
+        <p:nvSpPr>
+          <p:cNvPr id="14" name="TextBox 13"/>
+          <p:cNvSpPr txBox="1"/>
+          <p:nvPr/>
+        </p:nvSpPr>
+        <p:spPr>
+          <a:xfrm>
+            <a:off x="3493693" y="3771900"/>
+            <a:ext cx="2396413" cy="960119"/>
+          </a:xfrm>
+          <a:prstGeom prst="rect">
+            <a:avLst/>
+          </a:prstGeom>
+          <a:noFill/>
+        </p:spPr>
+        <p:txBody>
+          <a:bodyPr wrap="square" anchor="t" lIns="0" rIns="0" tIns="0" bIns="0"/>
+          <a:lstStyle/>
+          <a:p>
+            <a:pPr algn="l"/>
+            <a:r>
+              <a:rPr sz="1800" b="0" i="0">
+                <a:solidFill>
+                  <a:srgbClr val="202122"/>
+                </a:solidFill>
+                <a:latin typeface="Calibri"/>
+              </a:rPr>
+              <a:t>Create a Certificate Signing Request.</a:t>
+            </a:r>
+          </a:p>
+        </p:txBody>
+      </p:sp>
+      <p:sp>
+        <p:nvSpPr>
+          <p:cNvPr id="15" name="Oval 14"/>
+          <p:cNvSpPr/>
+          <p:nvPr/>
+        </p:nvSpPr>
+        <p:spPr>
+          <a:xfrm>
+            <a:off x="7179754" y="2080260"/>
+            <a:ext cx="640080" cy="640080"/>
+          </a:xfrm>
+          <a:prstGeom prst="ellipse">
+            <a:avLst/>
+          </a:prstGeom>
+          <a:solidFill>
+            <a:srgbClr val="E0463A"/>
+          </a:solidFill>
+          <a:ln>
+            <a:noFill/>
+          </a:ln>
+          <a:effectLst/>
+        </p:spPr>
+        <p:style>
+          <a:lnRef idx="1">
+            <a:schemeClr val="accent1"/>
+          </a:lnRef>
+          <a:fillRef idx="3">
+            <a:schemeClr val="accent1"/>
+          </a:fillRef>
+          <a:effectRef idx="2">
+            <a:schemeClr val="accent1"/>
+          </a:effectRef>
+          <a:fontRef idx="minor">
+            <a:schemeClr val="lt1"/>
+          </a:fontRef>
+        </p:style>
+        <p:txBody>
+          <a:bodyPr rtlCol="0" anchor="ctr" lIns="0" rIns="0" tIns="0" bIns="0"/>
+          <a:lstStyle/>
+          <a:p>
+            <a:pPr algn="ctr"/>
+            <a:r>
+              <a:rPr sz="2000" b="1">
+                <a:solidFill>
+                  <a:srgbClr val="FFFFFF"/>
+                </a:solidFill>
+                <a:latin typeface="Calibri"/>
+              </a:rPr>
+              <a:t>3</a:t>
+            </a:r>
+          </a:p>
+        </p:txBody>
+      </p:sp>
+      <p:sp>
+        <p:nvSpPr>
+          <p:cNvPr id="16" name="TextBox 15"/>
+          <p:cNvSpPr txBox="1"/>
+          <p:nvPr/>
+        </p:nvSpPr>
+        <p:spPr>
+          <a:xfrm>
+            <a:off x="6164427" y="2857500"/>
+            <a:ext cx="2670733" cy="731520"/>
+          </a:xfrm>
+          <a:prstGeom prst="rect">
+            <a:avLst/>
+          </a:prstGeom>
+          <a:noFill/>
+        </p:spPr>
+        <p:txBody>
+          <a:bodyPr wrap="square" anchor="t" lIns="0" rIns="0" tIns="0" bIns="0"/>
+          <a:lstStyle/>
+          <a:p>
+            <a:pPr algn="ctr"/>
+            <a:r>
+              <a:rPr sz="1700" b="1" i="0">
+                <a:solidFill>
+                  <a:srgbClr val="03306E"/>
+                </a:solidFill>
+                <a:latin typeface="Calibri"/>
+              </a:rPr>
+              <a:t>CA signs</a:t>
+            </a:r>
+          </a:p>
+        </p:txBody>
+      </p:sp>
+      <p:sp>
+        <p:nvSpPr>
+          <p:cNvPr id="17" name="Rounded Rectangle 16"/>
+          <p:cNvSpPr/>
+          <p:nvPr/>
+        </p:nvSpPr>
+        <p:spPr>
+          <a:xfrm>
+            <a:off x="6164427" y="3634740"/>
+            <a:ext cx="2670733" cy="1234439"/>
+          </a:xfrm>
+          <a:prstGeom prst="roundRect">
+            <a:avLst>
+              <a:gd name="adj" fmla="val 6000"/>
+            </a:avLst>
+          </a:prstGeom>
+          <a:solidFill>
+            <a:srgbClr val="EAF3FF"/>
+          </a:solidFill>
+          <a:ln>
+            <a:noFill/>
+          </a:ln>
+          <a:effectLst/>
+        </p:spPr>
+        <p:style>
+          <a:lnRef idx="1">
+            <a:schemeClr val="accent1"/>
+          </a:lnRef>
+          <a:fillRef idx="3">
+            <a:schemeClr val="accent1"/>
+          </a:fillRef>
+          <a:effectRef idx="2">
+            <a:schemeClr val="accent1"/>
+          </a:effectRef>
+          <a:fontRef idx="minor">
+            <a:schemeClr val="lt1"/>
+          </a:fontRef>
+        </p:style>
+        <p:txBody>
+          <a:bodyPr rtlCol="0" anchor="ctr"/>
+          <a:lstStyle/>
+          <a:p/>
+        </p:txBody>
+      </p:sp>
+      <p:sp>
+        <p:nvSpPr>
+          <p:cNvPr id="18" name="TextBox 17"/>
+          <p:cNvSpPr txBox="1"/>
+          <p:nvPr/>
+        </p:nvSpPr>
+        <p:spPr>
+          <a:xfrm>
+            <a:off x="6301587" y="3771900"/>
+            <a:ext cx="2396413" cy="960119"/>
+          </a:xfrm>
+          <a:prstGeom prst="rect">
+            <a:avLst/>
+          </a:prstGeom>
+          <a:noFill/>
+        </p:spPr>
+        <p:txBody>
+          <a:bodyPr wrap="square" anchor="t" lIns="0" rIns="0" tIns="0" bIns="0"/>
+          <a:lstStyle/>
+          <a:p>
+            <a:pPr algn="l"/>
+            <a:r>
+              <a:rPr sz="1800" b="0" i="0">
+                <a:solidFill>
+                  <a:srgbClr val="202122"/>
+                </a:solidFill>
+                <a:latin typeface="Calibri"/>
+              </a:rPr>
+              <a:t>A trusted Certificate Authority issues and signs it.</a:t>
+            </a:r>
+          </a:p>
+        </p:txBody>
+      </p:sp>
+      <p:sp>
+        <p:nvSpPr>
+          <p:cNvPr id="19" name="Oval 18"/>
+          <p:cNvSpPr/>
+          <p:nvPr/>
+        </p:nvSpPr>
+        <p:spPr>
+          <a:xfrm>
+            <a:off x="9987648" y="2080260"/>
+            <a:ext cx="640080" cy="640080"/>
+          </a:xfrm>
+          <a:prstGeom prst="ellipse">
+            <a:avLst/>
+          </a:prstGeom>
+          <a:solidFill>
+            <a:srgbClr val="E0463A"/>
+          </a:solidFill>
+          <a:ln>
+            <a:noFill/>
+          </a:ln>
+          <a:effectLst/>
+        </p:spPr>
+        <p:style>
+          <a:lnRef idx="1">
+            <a:schemeClr val="accent1"/>
+          </a:lnRef>
+          <a:fillRef idx="3">
+            <a:schemeClr val="accent1"/>
+          </a:fillRef>
+          <a:effectRef idx="2">
+            <a:schemeClr val="accent1"/>
+          </a:effectRef>
+          <a:fontRef idx="minor">
+            <a:schemeClr val="lt1"/>
+          </a:fontRef>
+        </p:style>
+        <p:txBody>
+          <a:bodyPr rtlCol="0" anchor="ctr" lIns="0" rIns="0" tIns="0" bIns="0"/>
+          <a:lstStyle/>
+          <a:p>
+            <a:pPr algn="ctr"/>
+            <a:r>
+              <a:rPr sz="2000" b="1">
+                <a:solidFill>
+                  <a:srgbClr val="FFFFFF"/>
+                </a:solidFill>
+                <a:latin typeface="Calibri"/>
+              </a:rPr>
+              <a:t>4</a:t>
+            </a:r>
+          </a:p>
+        </p:txBody>
+      </p:sp>
+      <p:sp>
+        <p:nvSpPr>
+          <p:cNvPr id="20" name="TextBox 19"/>
+          <p:cNvSpPr txBox="1"/>
+          <p:nvPr/>
+        </p:nvSpPr>
+        <p:spPr>
+          <a:xfrm>
+            <a:off x="8972321" y="2857500"/>
+            <a:ext cx="2670733" cy="731520"/>
+          </a:xfrm>
+          <a:prstGeom prst="rect">
+            <a:avLst/>
+          </a:prstGeom>
+          <a:noFill/>
+        </p:spPr>
+        <p:txBody>
+          <a:bodyPr wrap="square" anchor="t" lIns="0" rIns="0" tIns="0" bIns="0"/>
+          <a:lstStyle/>
+          <a:p>
+            <a:pPr algn="ctr"/>
+            <a:r>
+              <a:rPr sz="1700" b="1" i="0">
+                <a:solidFill>
+                  <a:srgbClr val="03306E"/>
+                </a:solidFill>
+                <a:latin typeface="Calibri"/>
+              </a:rPr>
+              <a:t>Install</a:t>
+            </a:r>
+          </a:p>
+        </p:txBody>
+      </p:sp>
+      <p:sp>
+        <p:nvSpPr>
+          <p:cNvPr id="21" name="Rounded Rectangle 20"/>
+          <p:cNvSpPr/>
+          <p:nvPr/>
+        </p:nvSpPr>
+        <p:spPr>
+          <a:xfrm>
+            <a:off x="8972321" y="3634740"/>
+            <a:ext cx="2670733" cy="1234439"/>
+          </a:xfrm>
+          <a:prstGeom prst="roundRect">
+            <a:avLst>
+              <a:gd name="adj" fmla="val 6000"/>
+            </a:avLst>
+          </a:prstGeom>
+          <a:solidFill>
+            <a:srgbClr val="EAF3FF"/>
+          </a:solidFill>
+          <a:ln>
+            <a:noFill/>
+          </a:ln>
+          <a:effectLst/>
+        </p:spPr>
+        <p:style>
+          <a:lnRef idx="1">
+            <a:schemeClr val="accent1"/>
+          </a:lnRef>
+          <a:fillRef idx="3">
+            <a:schemeClr val="accent1"/>
+          </a:fillRef>
+          <a:effectRef idx="2">
+            <a:schemeClr val="accent1"/>
+          </a:effectRef>
+          <a:fontRef idx="minor">
+            <a:schemeClr val="lt1"/>
+          </a:fontRef>
+        </p:style>
+        <p:txBody>
+          <a:bodyPr rtlCol="0" anchor="ctr"/>
+          <a:lstStyle/>
+          <a:p/>
+        </p:txBody>
+      </p:sp>
+      <p:sp>
+        <p:nvSpPr>
+          <p:cNvPr id="22" name="TextBox 21"/>
+          <p:cNvSpPr txBox="1"/>
+          <p:nvPr/>
+        </p:nvSpPr>
+        <p:spPr>
+          <a:xfrm>
+            <a:off x="9109481" y="3771900"/>
+            <a:ext cx="2396413" cy="960119"/>
+          </a:xfrm>
+          <a:prstGeom prst="rect">
+            <a:avLst/>
+          </a:prstGeom>
+          <a:noFill/>
+        </p:spPr>
+        <p:txBody>
+          <a:bodyPr wrap="square" anchor="t" lIns="0" rIns="0" tIns="0" bIns="0"/>
+          <a:lstStyle/>
+          <a:p>
+            <a:pPr algn="l"/>
+            <a:r>
+              <a:rPr sz="1800" b="0" i="0">
+                <a:solidFill>
+                  <a:srgbClr val="202122"/>
+                </a:solidFill>
+                <a:latin typeface="Calibri"/>
+              </a:rPr>
+              <a:t>Install it on the server or client.</a:t>
+            </a:r>
+          </a:p>
+        </p:txBody>
+      </p:sp>
+      <p:sp>
+        <p:nvSpPr>
+          <p:cNvPr id="23" name="TextBox 22"/>
+          <p:cNvSpPr txBox="1"/>
+          <p:nvPr/>
+        </p:nvSpPr>
+        <p:spPr>
+          <a:xfrm>
+            <a:off x="548640" y="5143500"/>
+            <a:ext cx="11094415" cy="548640"/>
+          </a:xfrm>
+          <a:prstGeom prst="rect">
+            <a:avLst/>
+          </a:prstGeom>
+          <a:noFill/>
+        </p:spPr>
+        <p:txBody>
+          <a:bodyPr wrap="square" anchor="t" lIns="0" rIns="0" tIns="0" bIns="0"/>
+          <a:lstStyle/>
+          <a:p>
+            <a:pPr algn="l"/>
+            <a:r>
+              <a:rPr sz="1600" b="0" i="1">
+                <a:solidFill>
+                  <a:srgbClr val="54595D"/>
+                </a:solidFill>
+                <a:latin typeface="Calibri"/>
+              </a:rPr>
+              <a:t>Management tools monitor expiry, revoke early, auto-renew, audit deployment and diagnose certificate problems.</a:t>
+            </a:r>
+          </a:p>
+        </p:txBody>
+      </p:sp>
+    </p:spTree>
+  </p:cSld>
+  <p:clrMapOvr>
+    <a:masterClrMapping/>
+  </p:clrMapOvr>
+</p:sld>
+</file>
+
+<file path=ppt/slides/slide15.xml><?xml version="1.0" encoding="utf-8"?>
+<p:sld xmlns:a="http://schemas.openxmlformats.org/drawingml/2006/main" xmlns:p="http://schemas.openxmlformats.org/presentationml/2006/main" xmlns:r="http://schemas.openxmlformats.org/officeDocument/2006/relationships">
+  <p:cSld>
+    <p:bg>
+      <p:bgPr>
+        <a:solidFill>
+          <a:srgbClr val="FFFFFF"/>
+        </a:solidFill>
+        <a:effectLst/>
+      </p:bgPr>
+    </p:bg>
+    <p:spTree>
+      <p:nvGrpSpPr>
+        <p:cNvPr id="1" name=""/>
+        <p:cNvGrpSpPr/>
+        <p:nvPr/>
+      </p:nvGrpSpPr>
+      <p:grpSpPr/>
+      <p:sp>
+        <p:nvSpPr>
+          <p:cNvPr id="2" name="TextBox 1"/>
+          <p:cNvSpPr txBox="1"/>
+          <p:nvPr/>
+        </p:nvSpPr>
+        <p:spPr>
+          <a:xfrm>
+            <a:off x="548640" y="320040"/>
+            <a:ext cx="11094415" cy="274320"/>
+          </a:xfrm>
+          <a:prstGeom prst="rect">
+            <a:avLst/>
+          </a:prstGeom>
+          <a:noFill/>
+        </p:spPr>
+        <p:txBody>
+          <a:bodyPr wrap="square" anchor="t" lIns="0" rIns="0" tIns="0" bIns="0"/>
+          <a:lstStyle/>
+          <a:p>
+            <a:pPr algn="l"/>
+            <a:r>
+              <a:rPr sz="1100" b="1" i="0">
+                <a:solidFill>
+                  <a:srgbClr val="54595D"/>
+                </a:solidFill>
+                <a:latin typeface="Calibri"/>
+              </a:rPr>
+              <a:t>CYBER SECURITY  ·  Cyber Security Content Areas 1 and 2</a:t>
+            </a:r>
+          </a:p>
+        </p:txBody>
+      </p:sp>
+      <p:sp>
+        <p:nvSpPr>
+          <p:cNvPr id="3" name="TextBox 2"/>
+          <p:cNvSpPr txBox="1"/>
+          <p:nvPr/>
+        </p:nvSpPr>
+        <p:spPr>
+          <a:xfrm>
+            <a:off x="548640" y="566928"/>
+            <a:ext cx="11094415" cy="822960"/>
+          </a:xfrm>
+          <a:prstGeom prst="rect">
+            <a:avLst/>
+          </a:prstGeom>
+          <a:noFill/>
+        </p:spPr>
+        <p:txBody>
+          <a:bodyPr wrap="square" anchor="ctr" lIns="0" rIns="0" tIns="0" bIns="0"/>
+          <a:lstStyle/>
+          <a:p>
+            <a:pPr algn="l"/>
+            <a:r>
+              <a:rPr sz="3200" b="1" i="0">
+                <a:solidFill>
+                  <a:srgbClr val="03306E"/>
+                </a:solidFill>
+                <a:latin typeface="Cambria"/>
+              </a:rPr>
+              <a:t>Quick check: Generating a certificate</a:t>
+            </a:r>
+          </a:p>
+        </p:txBody>
+      </p:sp>
+      <p:sp>
+        <p:nvSpPr>
+          <p:cNvPr id="4" name="TextBox 3"/>
+          <p:cNvSpPr txBox="1"/>
+          <p:nvPr/>
+        </p:nvSpPr>
+        <p:spPr>
+          <a:xfrm>
+            <a:off x="548640" y="6446520"/>
+            <a:ext cx="8229600" cy="274320"/>
+          </a:xfrm>
+          <a:prstGeom prst="rect">
+            <a:avLst/>
+          </a:prstGeom>
+          <a:noFill/>
+        </p:spPr>
+        <p:txBody>
+          <a:bodyPr wrap="square" anchor="t" lIns="0" rIns="0" tIns="0" bIns="0"/>
+          <a:lstStyle/>
+          <a:p>
+            <a:pPr algn="l"/>
+            <a:r>
+              <a:rPr sz="1000" b="0" i="0">
+                <a:solidFill>
+                  <a:srgbClr val="54595D"/>
+                </a:solidFill>
+                <a:latin typeface="Calibri"/>
+              </a:rPr>
+              <a:t>Digital Support and Security T Level  ·  Cryptography and Digital Certificates</a:t>
+            </a:r>
+          </a:p>
+        </p:txBody>
+      </p:sp>
+      <p:sp>
+        <p:nvSpPr>
+          <p:cNvPr id="5" name="TextBox 4"/>
+          <p:cNvSpPr txBox="1"/>
+          <p:nvPr/>
+        </p:nvSpPr>
+        <p:spPr>
+          <a:xfrm>
+            <a:off x="10728655" y="6446520"/>
+            <a:ext cx="914400" cy="274320"/>
+          </a:xfrm>
+          <a:prstGeom prst="rect">
+            <a:avLst/>
+          </a:prstGeom>
+          <a:noFill/>
+        </p:spPr>
+        <p:txBody>
+          <a:bodyPr wrap="square" anchor="t" lIns="0" rIns="0" tIns="0" bIns="0"/>
+          <a:lstStyle/>
+          <a:p>
+            <a:pPr algn="r"/>
+            <a:r>
+              <a:rPr sz="1000" b="0" i="0">
+                <a:solidFill>
+                  <a:srgbClr val="54595D"/>
+                </a:solidFill>
+                <a:latin typeface="Calibri"/>
+              </a:rPr>
+              <a:t>15</a:t>
+            </a:r>
+          </a:p>
+        </p:txBody>
+      </p:sp>
+      <p:sp>
+        <p:nvSpPr>
+          <p:cNvPr id="6" name="Oval 5"/>
+          <p:cNvSpPr/>
+          <p:nvPr/>
+        </p:nvSpPr>
+        <p:spPr>
+          <a:xfrm>
+            <a:off x="548640" y="1691640"/>
+            <a:ext cx="502920" cy="502920"/>
+          </a:xfrm>
+          <a:prstGeom prst="ellipse">
+            <a:avLst/>
+          </a:prstGeom>
+          <a:solidFill>
+            <a:srgbClr val="E0463A"/>
+          </a:solidFill>
+          <a:ln>
+            <a:noFill/>
+          </a:ln>
+          <a:effectLst/>
+        </p:spPr>
+        <p:style>
+          <a:lnRef idx="1">
+            <a:schemeClr val="accent1"/>
+          </a:lnRef>
+          <a:fillRef idx="3">
+            <a:schemeClr val="accent1"/>
+          </a:fillRef>
+          <a:effectRef idx="2">
+            <a:schemeClr val="accent1"/>
+          </a:effectRef>
+          <a:fontRef idx="minor">
+            <a:schemeClr val="lt1"/>
+          </a:fontRef>
+        </p:style>
+        <p:txBody>
+          <a:bodyPr rtlCol="0" anchor="ctr" lIns="0" rIns="0" tIns="0" bIns="0"/>
+          <a:lstStyle/>
+          <a:p>
+            <a:pPr algn="ctr"/>
+            <a:r>
+              <a:rPr sz="1600" b="1">
+                <a:solidFill>
+                  <a:srgbClr val="FFFFFF"/>
+                </a:solidFill>
+                <a:latin typeface="Calibri"/>
+              </a:rPr>
+              <a:t>1</a:t>
+            </a:r>
+          </a:p>
+        </p:txBody>
+      </p:sp>
+      <p:sp>
+        <p:nvSpPr>
+          <p:cNvPr id="7" name="TextBox 6"/>
+          <p:cNvSpPr txBox="1"/>
+          <p:nvPr/>
+        </p:nvSpPr>
+        <p:spPr>
+          <a:xfrm>
+            <a:off x="1371600" y="1645920"/>
+            <a:ext cx="10271455" cy="1188720"/>
+          </a:xfrm>
+          <a:prstGeom prst="rect">
+            <a:avLst/>
+          </a:prstGeom>
+          <a:noFill/>
+        </p:spPr>
+        <p:txBody>
+          <a:bodyPr wrap="square" anchor="t" lIns="0" rIns="0" tIns="0" bIns="0"/>
+          <a:lstStyle/>
+          <a:p>
+            <a:pPr algn="l"/>
+            <a:r>
+              <a:rPr sz="2400" b="0" i="0">
+                <a:solidFill>
+                  <a:srgbClr val="202122"/>
+                </a:solidFill>
+                <a:latin typeface="Calibri"/>
+              </a:rPr>
+              <a:t>What is a CSR?</a:t>
+            </a:r>
+          </a:p>
+        </p:txBody>
+      </p:sp>
+      <p:sp>
+        <p:nvSpPr>
+          <p:cNvPr id="8" name="Oval 7"/>
+          <p:cNvSpPr/>
+          <p:nvPr/>
+        </p:nvSpPr>
+        <p:spPr>
+          <a:xfrm>
+            <a:off x="548640" y="3108960"/>
+            <a:ext cx="502920" cy="502920"/>
+          </a:xfrm>
+          <a:prstGeom prst="ellipse">
+            <a:avLst/>
+          </a:prstGeom>
+          <a:solidFill>
+            <a:srgbClr val="E0463A"/>
+          </a:solidFill>
+          <a:ln>
+            <a:noFill/>
+          </a:ln>
+          <a:effectLst/>
+        </p:spPr>
+        <p:style>
+          <a:lnRef idx="1">
+            <a:schemeClr val="accent1"/>
+          </a:lnRef>
+          <a:fillRef idx="3">
+            <a:schemeClr val="accent1"/>
+          </a:fillRef>
+          <a:effectRef idx="2">
+            <a:schemeClr val="accent1"/>
+          </a:effectRef>
+          <a:fontRef idx="minor">
+            <a:schemeClr val="lt1"/>
+          </a:fontRef>
+        </p:style>
+        <p:txBody>
+          <a:bodyPr rtlCol="0" anchor="ctr" lIns="0" rIns="0" tIns="0" bIns="0"/>
+          <a:lstStyle/>
+          <a:p>
+            <a:pPr algn="ctr"/>
+            <a:r>
+              <a:rPr sz="1600" b="1">
+                <a:solidFill>
+                  <a:srgbClr val="FFFFFF"/>
+                </a:solidFill>
+                <a:latin typeface="Calibri"/>
+              </a:rPr>
+              <a:t>2</a:t>
+            </a:r>
+          </a:p>
+        </p:txBody>
+      </p:sp>
+      <p:sp>
+        <p:nvSpPr>
+          <p:cNvPr id="9" name="TextBox 8"/>
+          <p:cNvSpPr txBox="1"/>
+          <p:nvPr/>
+        </p:nvSpPr>
+        <p:spPr>
+          <a:xfrm>
+            <a:off x="1371600" y="3063240"/>
+            <a:ext cx="10271455" cy="1188720"/>
+          </a:xfrm>
+          <a:prstGeom prst="rect">
+            <a:avLst/>
+          </a:prstGeom>
+          <a:noFill/>
+        </p:spPr>
+        <p:txBody>
+          <a:bodyPr wrap="square" anchor="t" lIns="0" rIns="0" tIns="0" bIns="0"/>
+          <a:lstStyle/>
+          <a:p>
+            <a:pPr algn="l"/>
+            <a:r>
+              <a:rPr sz="2400" b="0" i="0">
+                <a:solidFill>
+                  <a:srgbClr val="202122"/>
+                </a:solidFill>
+                <a:latin typeface="Calibri"/>
+              </a:rPr>
+              <a:t>Should the private key be sent to the CA?</a:t>
+            </a:r>
+          </a:p>
+        </p:txBody>
+      </p:sp>
+      <p:sp>
+        <p:nvSpPr>
+          <p:cNvPr id="10" name="Oval 9"/>
+          <p:cNvSpPr/>
+          <p:nvPr/>
+        </p:nvSpPr>
+        <p:spPr>
+          <a:xfrm>
+            <a:off x="548640" y="4526280"/>
+            <a:ext cx="502920" cy="502920"/>
+          </a:xfrm>
+          <a:prstGeom prst="ellipse">
+            <a:avLst/>
+          </a:prstGeom>
+          <a:solidFill>
+            <a:srgbClr val="E0463A"/>
+          </a:solidFill>
+          <a:ln>
+            <a:noFill/>
+          </a:ln>
+          <a:effectLst/>
+        </p:spPr>
+        <p:style>
+          <a:lnRef idx="1">
+            <a:schemeClr val="accent1"/>
+          </a:lnRef>
+          <a:fillRef idx="3">
+            <a:schemeClr val="accent1"/>
+          </a:fillRef>
+          <a:effectRef idx="2">
+            <a:schemeClr val="accent1"/>
+          </a:effectRef>
+          <a:fontRef idx="minor">
+            <a:schemeClr val="lt1"/>
+          </a:fontRef>
+        </p:style>
+        <p:txBody>
+          <a:bodyPr rtlCol="0" anchor="ctr" lIns="0" rIns="0" tIns="0" bIns="0"/>
+          <a:lstStyle/>
+          <a:p>
+            <a:pPr algn="ctr"/>
+            <a:r>
+              <a:rPr sz="1600" b="1">
+                <a:solidFill>
+                  <a:srgbClr val="FFFFFF"/>
+                </a:solidFill>
+                <a:latin typeface="Calibri"/>
+              </a:rPr>
+              <a:t>3</a:t>
+            </a:r>
+          </a:p>
+        </p:txBody>
+      </p:sp>
+      <p:sp>
+        <p:nvSpPr>
+          <p:cNvPr id="11" name="TextBox 10"/>
+          <p:cNvSpPr txBox="1"/>
+          <p:nvPr/>
+        </p:nvSpPr>
+        <p:spPr>
+          <a:xfrm>
+            <a:off x="1371600" y="4480560"/>
+            <a:ext cx="10271455" cy="1188720"/>
+          </a:xfrm>
+          <a:prstGeom prst="rect">
+            <a:avLst/>
+          </a:prstGeom>
+          <a:noFill/>
+        </p:spPr>
+        <p:txBody>
+          <a:bodyPr wrap="square" anchor="t" lIns="0" rIns="0" tIns="0" bIns="0"/>
+          <a:lstStyle/>
+          <a:p>
+            <a:pPr algn="l"/>
+            <a:r>
+              <a:rPr sz="2400" b="0" i="0">
+                <a:solidFill>
+                  <a:srgbClr val="202122"/>
+                </a:solidFill>
+                <a:latin typeface="Calibri"/>
+              </a:rPr>
+              <a:t>Why revoke a certificate early?</a:t>
+            </a:r>
+          </a:p>
+        </p:txBody>
+      </p:sp>
+      <p:sp>
+        <p:nvSpPr>
+          <p:cNvPr id="12" name="TextBox 11"/>
+          <p:cNvSpPr txBox="1"/>
+          <p:nvPr/>
+        </p:nvSpPr>
+        <p:spPr>
+          <a:xfrm>
+            <a:off x="548640" y="5852160"/>
+            <a:ext cx="11094415" cy="365760"/>
+          </a:xfrm>
+          <a:prstGeom prst="rect">
+            <a:avLst/>
+          </a:prstGeom>
+          <a:noFill/>
+        </p:spPr>
+        <p:txBody>
+          <a:bodyPr wrap="square" anchor="t" lIns="0" rIns="0" tIns="0" bIns="0"/>
+          <a:lstStyle/>
+          <a:p>
+            <a:pPr algn="l"/>
+            <a:r>
+              <a:rPr sz="1300" b="0" i="1">
+                <a:solidFill>
+                  <a:srgbClr val="54595D"/>
+                </a:solidFill>
+                <a:latin typeface="Calibri"/>
+              </a:rPr>
+              <a:t>Answer on mini whiteboards or in your book. Answers are in the speaker notes.</a:t>
+            </a:r>
+          </a:p>
+        </p:txBody>
+      </p:sp>
+    </p:spTree>
+  </p:cSld>
+  <p:clrMapOvr>
+    <a:masterClrMapping/>
+  </p:clrMapOvr>
+</p:sld>
+</file>
+
+<file path=ppt/slides/slide16.xml><?xml version="1.0" encoding="utf-8"?>
+<p:sld xmlns:a="http://schemas.openxmlformats.org/drawingml/2006/main" xmlns:p="http://schemas.openxmlformats.org/presentationml/2006/main" xmlns:r="http://schemas.openxmlformats.org/officeDocument/2006/relationships">
+  <p:cSld>
+    <p:bg>
+      <p:bgPr>
+        <a:solidFill>
+          <a:srgbClr val="FFFFFF"/>
+        </a:solidFill>
+        <a:effectLst/>
+      </p:bgPr>
+    </p:bg>
+    <p:spTree>
+      <p:nvGrpSpPr>
+        <p:cNvPr id="1" name=""/>
+        <p:cNvGrpSpPr/>
+        <p:nvPr/>
+      </p:nvGrpSpPr>
+      <p:grpSpPr/>
+      <p:sp>
+        <p:nvSpPr>
+          <p:cNvPr id="2" name="TextBox 1"/>
+          <p:cNvSpPr txBox="1"/>
+          <p:nvPr/>
+        </p:nvSpPr>
+        <p:spPr>
+          <a:xfrm>
+            <a:off x="548640" y="320040"/>
+            <a:ext cx="11094415" cy="274320"/>
+          </a:xfrm>
+          <a:prstGeom prst="rect">
+            <a:avLst/>
+          </a:prstGeom>
+          <a:noFill/>
+        </p:spPr>
+        <p:txBody>
+          <a:bodyPr wrap="square" anchor="t" lIns="0" rIns="0" tIns="0" bIns="0"/>
+          <a:lstStyle/>
+          <a:p>
+            <a:pPr algn="l"/>
+            <a:r>
+              <a:rPr sz="1100" b="1" i="0">
+                <a:solidFill>
+                  <a:srgbClr val="54595D"/>
+                </a:solidFill>
+                <a:latin typeface="Calibri"/>
+              </a:rPr>
+              <a:t>CYBER SECURITY  ·  Cyber Security Content Areas 1 and 2</a:t>
+            </a:r>
+          </a:p>
+        </p:txBody>
+      </p:sp>
+      <p:sp>
+        <p:nvSpPr>
+          <p:cNvPr id="3" name="TextBox 2"/>
+          <p:cNvSpPr txBox="1"/>
+          <p:nvPr/>
+        </p:nvSpPr>
+        <p:spPr>
+          <a:xfrm>
+            <a:off x="548640" y="566928"/>
+            <a:ext cx="11094415" cy="822960"/>
+          </a:xfrm>
+          <a:prstGeom prst="rect">
+            <a:avLst/>
+          </a:prstGeom>
+          <a:noFill/>
+        </p:spPr>
+        <p:txBody>
+          <a:bodyPr wrap="square" anchor="ctr" lIns="0" rIns="0" tIns="0" bIns="0"/>
+          <a:lstStyle/>
+          <a:p>
+            <a:pPr algn="l"/>
+            <a:r>
+              <a:rPr sz="3200" b="1" i="0">
+                <a:solidFill>
+                  <a:srgbClr val="03306E"/>
+                </a:solidFill>
+                <a:latin typeface="Cambria"/>
+              </a:rPr>
+              <a:t>Check your understanding</a:t>
+            </a:r>
+          </a:p>
+        </p:txBody>
+      </p:sp>
+      <p:sp>
+        <p:nvSpPr>
+          <p:cNvPr id="4" name="TextBox 3"/>
+          <p:cNvSpPr txBox="1"/>
+          <p:nvPr/>
+        </p:nvSpPr>
+        <p:spPr>
+          <a:xfrm>
+            <a:off x="548640" y="6446520"/>
+            <a:ext cx="8229600" cy="274320"/>
+          </a:xfrm>
+          <a:prstGeom prst="rect">
+            <a:avLst/>
+          </a:prstGeom>
+          <a:noFill/>
+        </p:spPr>
+        <p:txBody>
+          <a:bodyPr wrap="square" anchor="t" lIns="0" rIns="0" tIns="0" bIns="0"/>
+          <a:lstStyle/>
+          <a:p>
+            <a:pPr algn="l"/>
+            <a:r>
+              <a:rPr sz="1000" b="0" i="0">
+                <a:solidFill>
+                  <a:srgbClr val="54595D"/>
+                </a:solidFill>
+                <a:latin typeface="Calibri"/>
+              </a:rPr>
+              <a:t>Digital Support and Security T Level  ·  Cryptography and Digital Certificates</a:t>
+            </a:r>
+          </a:p>
+        </p:txBody>
+      </p:sp>
+      <p:sp>
+        <p:nvSpPr>
+          <p:cNvPr id="5" name="TextBox 4"/>
+          <p:cNvSpPr txBox="1"/>
+          <p:nvPr/>
+        </p:nvSpPr>
+        <p:spPr>
+          <a:xfrm>
+            <a:off x="10728655" y="6446520"/>
+            <a:ext cx="914400" cy="274320"/>
+          </a:xfrm>
+          <a:prstGeom prst="rect">
+            <a:avLst/>
+          </a:prstGeom>
+          <a:noFill/>
+        </p:spPr>
+        <p:txBody>
+          <a:bodyPr wrap="square" anchor="t" lIns="0" rIns="0" tIns="0" bIns="0"/>
+          <a:lstStyle/>
+          <a:p>
+            <a:pPr algn="r"/>
+            <a:r>
+              <a:rPr sz="1000" b="0" i="0">
+                <a:solidFill>
+                  <a:srgbClr val="54595D"/>
+                </a:solidFill>
+                <a:latin typeface="Calibri"/>
+              </a:rPr>
+              <a:t>16</a:t>
+            </a:r>
+          </a:p>
+        </p:txBody>
+      </p:sp>
+      <p:sp>
+        <p:nvSpPr>
+          <p:cNvPr id="6" name="Oval 5"/>
+          <p:cNvSpPr/>
+          <p:nvPr/>
+        </p:nvSpPr>
+        <p:spPr>
+          <a:xfrm>
+            <a:off x="548640" y="1618488"/>
+            <a:ext cx="411480" cy="411480"/>
+          </a:xfrm>
+          <a:prstGeom prst="ellipse">
+            <a:avLst/>
+          </a:prstGeom>
+          <a:solidFill>
+            <a:srgbClr val="E0463A"/>
+          </a:solidFill>
+          <a:ln>
+            <a:noFill/>
+          </a:ln>
+          <a:effectLst/>
+        </p:spPr>
+        <p:style>
+          <a:lnRef idx="1">
+            <a:schemeClr val="accent1"/>
+          </a:lnRef>
+          <a:fillRef idx="3">
+            <a:schemeClr val="accent1"/>
+          </a:fillRef>
+          <a:effectRef idx="2">
+            <a:schemeClr val="accent1"/>
+          </a:effectRef>
+          <a:fontRef idx="minor">
+            <a:schemeClr val="lt1"/>
+          </a:fontRef>
+        </p:style>
+        <p:txBody>
+          <a:bodyPr rtlCol="0" anchor="ctr" lIns="0" rIns="0" tIns="0" bIns="0"/>
+          <a:lstStyle/>
+          <a:p>
+            <a:pPr algn="ctr"/>
+            <a:r>
+              <a:rPr sz="1400" b="1">
+                <a:solidFill>
+                  <a:srgbClr val="FFFFFF"/>
+                </a:solidFill>
+                <a:latin typeface="Calibri"/>
+              </a:rPr>
+              <a:t>1</a:t>
+            </a:r>
+          </a:p>
+        </p:txBody>
+      </p:sp>
+      <p:sp>
+        <p:nvSpPr>
+          <p:cNvPr id="7" name="TextBox 6"/>
+          <p:cNvSpPr txBox="1"/>
+          <p:nvPr/>
+        </p:nvSpPr>
+        <p:spPr>
+          <a:xfrm>
+            <a:off x="1234440" y="1600200"/>
+            <a:ext cx="10408615" cy="791870"/>
+          </a:xfrm>
+          <a:prstGeom prst="rect">
+            <a:avLst/>
+          </a:prstGeom>
+          <a:noFill/>
+        </p:spPr>
+        <p:txBody>
+          <a:bodyPr wrap="square" anchor="t" lIns="0" rIns="0" tIns="0" bIns="0"/>
+          <a:lstStyle/>
+          <a:p>
+            <a:pPr algn="l"/>
+            <a:r>
+              <a:rPr sz="2200" b="0" i="0">
+                <a:solidFill>
+                  <a:srgbClr val="202122"/>
+                </a:solidFill>
+                <a:latin typeface="Calibri"/>
+              </a:rPr>
+              <a:t>Why is hashing used for passwords rather than encryption?</a:t>
+            </a:r>
+          </a:p>
+        </p:txBody>
+      </p:sp>
+      <p:sp>
+        <p:nvSpPr>
+          <p:cNvPr id="8" name="Oval 7"/>
+          <p:cNvSpPr/>
+          <p:nvPr/>
+        </p:nvSpPr>
+        <p:spPr>
+          <a:xfrm>
+            <a:off x="548640" y="2574950"/>
+            <a:ext cx="411480" cy="411480"/>
+          </a:xfrm>
+          <a:prstGeom prst="ellipse">
+            <a:avLst/>
+          </a:prstGeom>
+          <a:solidFill>
+            <a:srgbClr val="E0463A"/>
+          </a:solidFill>
+          <a:ln>
+            <a:noFill/>
+          </a:ln>
+          <a:effectLst/>
+        </p:spPr>
+        <p:style>
+          <a:lnRef idx="1">
+            <a:schemeClr val="accent1"/>
+          </a:lnRef>
+          <a:fillRef idx="3">
+            <a:schemeClr val="accent1"/>
+          </a:fillRef>
+          <a:effectRef idx="2">
+            <a:schemeClr val="accent1"/>
+          </a:effectRef>
+          <a:fontRef idx="minor">
+            <a:schemeClr val="lt1"/>
+          </a:fontRef>
+        </p:style>
+        <p:txBody>
+          <a:bodyPr rtlCol="0" anchor="ctr" lIns="0" rIns="0" tIns="0" bIns="0"/>
+          <a:lstStyle/>
+          <a:p>
+            <a:pPr algn="ctr"/>
+            <a:r>
+              <a:rPr sz="1400" b="1">
+                <a:solidFill>
+                  <a:srgbClr val="FFFFFF"/>
+                </a:solidFill>
+                <a:latin typeface="Calibri"/>
+              </a:rPr>
+              <a:t>2</a:t>
+            </a:r>
+          </a:p>
+        </p:txBody>
+      </p:sp>
+      <p:sp>
+        <p:nvSpPr>
+          <p:cNvPr id="9" name="TextBox 8"/>
+          <p:cNvSpPr txBox="1"/>
+          <p:nvPr/>
+        </p:nvSpPr>
+        <p:spPr>
+          <a:xfrm>
+            <a:off x="1234440" y="2556662"/>
+            <a:ext cx="10408615" cy="791870"/>
+          </a:xfrm>
+          <a:prstGeom prst="rect">
+            <a:avLst/>
+          </a:prstGeom>
+          <a:noFill/>
+        </p:spPr>
+        <p:txBody>
+          <a:bodyPr wrap="square" anchor="t" lIns="0" rIns="0" tIns="0" bIns="0"/>
+          <a:lstStyle/>
+          <a:p>
+            <a:pPr algn="l"/>
+            <a:r>
+              <a:rPr sz="2200" b="0" i="0">
+                <a:solidFill>
+                  <a:srgbClr val="202122"/>
+                </a:solidFill>
+                <a:latin typeface="Calibri"/>
+              </a:rPr>
+              <a:t>Which type of encryption protects a stolen laptop's drive?</a:t>
+            </a:r>
+          </a:p>
+        </p:txBody>
+      </p:sp>
+      <p:sp>
+        <p:nvSpPr>
+          <p:cNvPr id="10" name="Oval 9"/>
+          <p:cNvSpPr/>
+          <p:nvPr/>
+        </p:nvSpPr>
+        <p:spPr>
+          <a:xfrm>
+            <a:off x="548640" y="3531412"/>
+            <a:ext cx="411480" cy="411480"/>
+          </a:xfrm>
+          <a:prstGeom prst="ellipse">
+            <a:avLst/>
+          </a:prstGeom>
+          <a:solidFill>
+            <a:srgbClr val="E0463A"/>
+          </a:solidFill>
+          <a:ln>
+            <a:noFill/>
+          </a:ln>
+          <a:effectLst/>
+        </p:spPr>
+        <p:style>
+          <a:lnRef idx="1">
+            <a:schemeClr val="accent1"/>
+          </a:lnRef>
+          <a:fillRef idx="3">
+            <a:schemeClr val="accent1"/>
+          </a:fillRef>
+          <a:effectRef idx="2">
+            <a:schemeClr val="accent1"/>
+          </a:effectRef>
+          <a:fontRef idx="minor">
+            <a:schemeClr val="lt1"/>
+          </a:fontRef>
+        </p:style>
+        <p:txBody>
+          <a:bodyPr rtlCol="0" anchor="ctr" lIns="0" rIns="0" tIns="0" bIns="0"/>
+          <a:lstStyle/>
+          <a:p>
+            <a:pPr algn="ctr"/>
+            <a:r>
+              <a:rPr sz="1400" b="1">
+                <a:solidFill>
+                  <a:srgbClr val="FFFFFF"/>
+                </a:solidFill>
+                <a:latin typeface="Calibri"/>
+              </a:rPr>
+              <a:t>3</a:t>
+            </a:r>
+          </a:p>
+        </p:txBody>
+      </p:sp>
+      <p:sp>
+        <p:nvSpPr>
+          <p:cNvPr id="11" name="TextBox 10"/>
+          <p:cNvSpPr txBox="1"/>
+          <p:nvPr/>
+        </p:nvSpPr>
+        <p:spPr>
+          <a:xfrm>
+            <a:off x="1234440" y="3513124"/>
+            <a:ext cx="10408615" cy="791870"/>
+          </a:xfrm>
+          <a:prstGeom prst="rect">
+            <a:avLst/>
+          </a:prstGeom>
+          <a:noFill/>
+        </p:spPr>
+        <p:txBody>
+          <a:bodyPr wrap="square" anchor="t" lIns="0" rIns="0" tIns="0" bIns="0"/>
+          <a:lstStyle/>
+          <a:p>
+            <a:pPr algn="l"/>
+            <a:r>
+              <a:rPr sz="2200" b="0" i="0">
+                <a:solidFill>
+                  <a:srgbClr val="202122"/>
+                </a:solidFill>
+                <a:latin typeface="Calibri"/>
+              </a:rPr>
+              <a:t>What does a digital signature prove?</a:t>
+            </a:r>
+          </a:p>
+        </p:txBody>
+      </p:sp>
+      <p:sp>
+        <p:nvSpPr>
+          <p:cNvPr id="12" name="Oval 11"/>
+          <p:cNvSpPr/>
+          <p:nvPr/>
+        </p:nvSpPr>
+        <p:spPr>
+          <a:xfrm>
+            <a:off x="548640" y="4487875"/>
+            <a:ext cx="411480" cy="411480"/>
+          </a:xfrm>
+          <a:prstGeom prst="ellipse">
+            <a:avLst/>
+          </a:prstGeom>
+          <a:solidFill>
+            <a:srgbClr val="E0463A"/>
+          </a:solidFill>
+          <a:ln>
+            <a:noFill/>
+          </a:ln>
+          <a:effectLst/>
+        </p:spPr>
+        <p:style>
+          <a:lnRef idx="1">
+            <a:schemeClr val="accent1"/>
+          </a:lnRef>
+          <a:fillRef idx="3">
+            <a:schemeClr val="accent1"/>
+          </a:fillRef>
+          <a:effectRef idx="2">
+            <a:schemeClr val="accent1"/>
+          </a:effectRef>
+          <a:fontRef idx="minor">
+            <a:schemeClr val="lt1"/>
+          </a:fontRef>
+        </p:style>
+        <p:txBody>
+          <a:bodyPr rtlCol="0" anchor="ctr" lIns="0" rIns="0" tIns="0" bIns="0"/>
+          <a:lstStyle/>
+          <a:p>
+            <a:pPr algn="ctr"/>
+            <a:r>
+              <a:rPr sz="1400" b="1">
+                <a:solidFill>
+                  <a:srgbClr val="FFFFFF"/>
+                </a:solidFill>
+                <a:latin typeface="Calibri"/>
+              </a:rPr>
+              <a:t>4</a:t>
+            </a:r>
+          </a:p>
+        </p:txBody>
+      </p:sp>
+      <p:sp>
+        <p:nvSpPr>
+          <p:cNvPr id="13" name="TextBox 12"/>
+          <p:cNvSpPr txBox="1"/>
+          <p:nvPr/>
+        </p:nvSpPr>
+        <p:spPr>
+          <a:xfrm>
+            <a:off x="1234440" y="4469587"/>
+            <a:ext cx="10408615" cy="791870"/>
+          </a:xfrm>
+          <a:prstGeom prst="rect">
+            <a:avLst/>
+          </a:prstGeom>
+          <a:noFill/>
+        </p:spPr>
+        <p:txBody>
+          <a:bodyPr wrap="square" anchor="t" lIns="0" rIns="0" tIns="0" bIns="0"/>
+          <a:lstStyle/>
+          <a:p>
+            <a:pPr algn="l"/>
+            <a:r>
+              <a:rPr sz="2200" b="0" i="0">
+                <a:solidFill>
+                  <a:srgbClr val="202122"/>
+                </a:solidFill>
+                <a:latin typeface="Calibri"/>
+              </a:rPr>
+              <a:t>What is a CSR?</a:t>
+            </a:r>
+          </a:p>
+        </p:txBody>
+      </p:sp>
+      <p:sp>
+        <p:nvSpPr>
+          <p:cNvPr id="14" name="Oval 13"/>
+          <p:cNvSpPr/>
+          <p:nvPr/>
+        </p:nvSpPr>
+        <p:spPr>
+          <a:xfrm>
+            <a:off x="548640" y="5444337"/>
+            <a:ext cx="411480" cy="411480"/>
+          </a:xfrm>
+          <a:prstGeom prst="ellipse">
+            <a:avLst/>
+          </a:prstGeom>
+          <a:solidFill>
+            <a:srgbClr val="E0463A"/>
+          </a:solidFill>
+          <a:ln>
+            <a:noFill/>
+          </a:ln>
+          <a:effectLst/>
+        </p:spPr>
+        <p:style>
+          <a:lnRef idx="1">
+            <a:schemeClr val="accent1"/>
+          </a:lnRef>
+          <a:fillRef idx="3">
+            <a:schemeClr val="accent1"/>
+          </a:fillRef>
+          <a:effectRef idx="2">
+            <a:schemeClr val="accent1"/>
+          </a:effectRef>
+          <a:fontRef idx="minor">
+            <a:schemeClr val="lt1"/>
+          </a:fontRef>
+        </p:style>
+        <p:txBody>
+          <a:bodyPr rtlCol="0" anchor="ctr" lIns="0" rIns="0" tIns="0" bIns="0"/>
+          <a:lstStyle/>
+          <a:p>
+            <a:pPr algn="ctr"/>
+            <a:r>
+              <a:rPr sz="1400" b="1">
+                <a:solidFill>
+                  <a:srgbClr val="FFFFFF"/>
+                </a:solidFill>
+                <a:latin typeface="Calibri"/>
+              </a:rPr>
+              <a:t>5</a:t>
+            </a:r>
+          </a:p>
+        </p:txBody>
+      </p:sp>
+      <p:sp>
+        <p:nvSpPr>
+          <p:cNvPr id="15" name="TextBox 14"/>
+          <p:cNvSpPr txBox="1"/>
+          <p:nvPr/>
+        </p:nvSpPr>
+        <p:spPr>
+          <a:xfrm>
+            <a:off x="1234440" y="5426049"/>
+            <a:ext cx="10408615" cy="791870"/>
+          </a:xfrm>
+          <a:prstGeom prst="rect">
+            <a:avLst/>
+          </a:prstGeom>
+          <a:noFill/>
+        </p:spPr>
+        <p:txBody>
+          <a:bodyPr wrap="square" anchor="t" lIns="0" rIns="0" tIns="0" bIns="0"/>
+          <a:lstStyle/>
+          <a:p>
+            <a:pPr algn="l"/>
+            <a:r>
+              <a:rPr sz="2200" b="0" i="0">
+                <a:solidFill>
+                  <a:srgbClr val="202122"/>
+                </a:solidFill>
+                <a:latin typeface="Calibri"/>
+              </a:rPr>
+              <a:t>Name two features of a digital certificate.</a:t>
+            </a:r>
+          </a:p>
+        </p:txBody>
+      </p:sp>
+    </p:spTree>
+  </p:cSld>
+  <p:clrMapOvr>
+    <a:masterClrMapping/>
+  </p:clrMapOvr>
+</p:sld>
+</file>
+
+<file path=ppt/slides/slide17.xml><?xml version="1.0" encoding="utf-8"?>
+<p:sld xmlns:a="http://schemas.openxmlformats.org/drawingml/2006/main" xmlns:p="http://schemas.openxmlformats.org/presentationml/2006/main" xmlns:r="http://schemas.openxmlformats.org/officeDocument/2006/relationships">
+  <p:cSld>
+    <p:bg>
+      <p:bgPr>
+        <a:solidFill>
+          <a:srgbClr val="FFFFFF"/>
+        </a:solidFill>
+        <a:effectLst/>
+      </p:bgPr>
+    </p:bg>
+    <p:spTree>
+      <p:nvGrpSpPr>
+        <p:cNvPr id="1" name=""/>
+        <p:cNvGrpSpPr/>
+        <p:nvPr/>
+      </p:nvGrpSpPr>
+      <p:grpSpPr/>
+      <p:sp>
+        <p:nvSpPr>
+          <p:cNvPr id="2" name="TextBox 1"/>
+          <p:cNvSpPr txBox="1"/>
+          <p:nvPr/>
+        </p:nvSpPr>
+        <p:spPr>
+          <a:xfrm>
+            <a:off x="548640" y="320040"/>
+            <a:ext cx="11094415" cy="274320"/>
+          </a:xfrm>
+          <a:prstGeom prst="rect">
+            <a:avLst/>
+          </a:prstGeom>
+          <a:noFill/>
+        </p:spPr>
+        <p:txBody>
+          <a:bodyPr wrap="square" anchor="t" lIns="0" rIns="0" tIns="0" bIns="0"/>
+          <a:lstStyle/>
+          <a:p>
+            <a:pPr algn="l"/>
+            <a:r>
+              <a:rPr sz="1100" b="1" i="0">
+                <a:solidFill>
+                  <a:srgbClr val="54595D"/>
+                </a:solidFill>
+                <a:latin typeface="Calibri"/>
+              </a:rPr>
+              <a:t>CYBER SECURITY  ·  Cyber Security Content Areas 1 and 2</a:t>
+            </a:r>
+          </a:p>
+        </p:txBody>
+      </p:sp>
+      <p:sp>
+        <p:nvSpPr>
+          <p:cNvPr id="3" name="TextBox 2"/>
+          <p:cNvSpPr txBox="1"/>
+          <p:nvPr/>
+        </p:nvSpPr>
+        <p:spPr>
+          <a:xfrm>
+            <a:off x="548640" y="566928"/>
+            <a:ext cx="11094415" cy="822960"/>
+          </a:xfrm>
+          <a:prstGeom prst="rect">
+            <a:avLst/>
+          </a:prstGeom>
+          <a:noFill/>
+        </p:spPr>
+        <p:txBody>
+          <a:bodyPr wrap="square" anchor="ctr" lIns="0" rIns="0" tIns="0" bIns="0"/>
+          <a:lstStyle/>
+          <a:p>
+            <a:pPr algn="l"/>
+            <a:r>
+              <a:rPr sz="3200" b="1" i="0">
+                <a:solidFill>
+                  <a:srgbClr val="03306E"/>
+                </a:solidFill>
+                <a:latin typeface="Cambria"/>
+              </a:rPr>
+              <a:t>Answers</a:t>
+            </a:r>
+          </a:p>
+        </p:txBody>
+      </p:sp>
+      <p:sp>
+        <p:nvSpPr>
+          <p:cNvPr id="4" name="TextBox 3"/>
+          <p:cNvSpPr txBox="1"/>
+          <p:nvPr/>
+        </p:nvSpPr>
+        <p:spPr>
+          <a:xfrm>
+            <a:off x="548640" y="6446520"/>
+            <a:ext cx="8229600" cy="274320"/>
+          </a:xfrm>
+          <a:prstGeom prst="rect">
+            <a:avLst/>
+          </a:prstGeom>
+          <a:noFill/>
+        </p:spPr>
+        <p:txBody>
+          <a:bodyPr wrap="square" anchor="t" lIns="0" rIns="0" tIns="0" bIns="0"/>
+          <a:lstStyle/>
+          <a:p>
+            <a:pPr algn="l"/>
+            <a:r>
+              <a:rPr sz="1000" b="0" i="0">
+                <a:solidFill>
+                  <a:srgbClr val="54595D"/>
+                </a:solidFill>
+                <a:latin typeface="Calibri"/>
+              </a:rPr>
+              <a:t>Digital Support and Security T Level  ·  Cryptography and Digital Certificates</a:t>
+            </a:r>
+          </a:p>
+        </p:txBody>
+      </p:sp>
+      <p:sp>
+        <p:nvSpPr>
+          <p:cNvPr id="5" name="TextBox 4"/>
+          <p:cNvSpPr txBox="1"/>
+          <p:nvPr/>
+        </p:nvSpPr>
+        <p:spPr>
+          <a:xfrm>
+            <a:off x="10728655" y="6446520"/>
+            <a:ext cx="914400" cy="274320"/>
+          </a:xfrm>
+          <a:prstGeom prst="rect">
+            <a:avLst/>
+          </a:prstGeom>
+          <a:noFill/>
+        </p:spPr>
+        <p:txBody>
+          <a:bodyPr wrap="square" anchor="t" lIns="0" rIns="0" tIns="0" bIns="0"/>
+          <a:lstStyle/>
+          <a:p>
+            <a:pPr algn="r"/>
+            <a:r>
+              <a:rPr sz="1000" b="0" i="0">
+                <a:solidFill>
+                  <a:srgbClr val="54595D"/>
+                </a:solidFill>
+                <a:latin typeface="Calibri"/>
+              </a:rPr>
+              <a:t>17</a:t>
+            </a:r>
+          </a:p>
+        </p:txBody>
+      </p:sp>
+      <p:sp>
+        <p:nvSpPr>
+          <p:cNvPr id="6" name="Oval 5"/>
+          <p:cNvSpPr/>
+          <p:nvPr/>
+        </p:nvSpPr>
+        <p:spPr>
+          <a:xfrm>
+            <a:off x="548640" y="1618488"/>
+            <a:ext cx="411480" cy="411480"/>
+          </a:xfrm>
+          <a:prstGeom prst="ellipse">
+            <a:avLst/>
+          </a:prstGeom>
+          <a:solidFill>
+            <a:srgbClr val="E0463A"/>
+          </a:solidFill>
+          <a:ln>
+            <a:noFill/>
+          </a:ln>
+          <a:effectLst/>
+        </p:spPr>
+        <p:style>
+          <a:lnRef idx="1">
+            <a:schemeClr val="accent1"/>
+          </a:lnRef>
+          <a:fillRef idx="3">
+            <a:schemeClr val="accent1"/>
+          </a:fillRef>
+          <a:effectRef idx="2">
+            <a:schemeClr val="accent1"/>
+          </a:effectRef>
+          <a:fontRef idx="minor">
+            <a:schemeClr val="lt1"/>
+          </a:fontRef>
+        </p:style>
+        <p:txBody>
+          <a:bodyPr rtlCol="0" anchor="ctr" lIns="0" rIns="0" tIns="0" bIns="0"/>
+          <a:lstStyle/>
+          <a:p>
+            <a:pPr algn="ctr"/>
+            <a:r>
+              <a:rPr sz="1400" b="1">
+                <a:solidFill>
+                  <a:srgbClr val="FFFFFF"/>
+                </a:solidFill>
+                <a:latin typeface="Calibri"/>
+              </a:rPr>
+              <a:t>1</a:t>
+            </a:r>
+          </a:p>
+        </p:txBody>
+      </p:sp>
+      <p:sp>
+        <p:nvSpPr>
+          <p:cNvPr id="7" name="TextBox 6"/>
+          <p:cNvSpPr txBox="1"/>
+          <p:nvPr/>
+        </p:nvSpPr>
+        <p:spPr>
+          <a:xfrm>
+            <a:off x="1234440" y="1600200"/>
+            <a:ext cx="10408615" cy="791870"/>
+          </a:xfrm>
+          <a:prstGeom prst="rect">
+            <a:avLst/>
+          </a:prstGeom>
+          <a:noFill/>
+        </p:spPr>
+        <p:txBody>
+          <a:bodyPr wrap="square" anchor="t" lIns="0" rIns="0" tIns="0" bIns="0"/>
+          <a:lstStyle/>
+          <a:p>
+            <a:pPr algn="l"/>
+            <a:r>
+              <a:rPr sz="1800" b="0" i="0">
+                <a:solidFill>
+                  <a:srgbClr val="54595D"/>
+                </a:solidFill>
+                <a:latin typeface="Calibri"/>
+              </a:rPr>
+              <a:t>Why is hashing used for passwords rather than encryption?</a:t>
+            </a:r>
+          </a:p>
+          <a:p>
+            <a:r>
+              <a:rPr sz="1800" b="1">
+                <a:solidFill>
+                  <a:srgbClr val="03306E"/>
+                </a:solidFill>
+                <a:latin typeface="Calibri"/>
+              </a:rPr>
+              <a:t>It is one way, so the stored hash cannot be turned back into the password.</a:t>
+            </a:r>
+          </a:p>
+        </p:txBody>
+      </p:sp>
+      <p:sp>
+        <p:nvSpPr>
+          <p:cNvPr id="8" name="Oval 7"/>
+          <p:cNvSpPr/>
+          <p:nvPr/>
+        </p:nvSpPr>
+        <p:spPr>
+          <a:xfrm>
+            <a:off x="548640" y="2574950"/>
+            <a:ext cx="411480" cy="411480"/>
+          </a:xfrm>
+          <a:prstGeom prst="ellipse">
+            <a:avLst/>
+          </a:prstGeom>
+          <a:solidFill>
+            <a:srgbClr val="E0463A"/>
+          </a:solidFill>
+          <a:ln>
+            <a:noFill/>
+          </a:ln>
+          <a:effectLst/>
+        </p:spPr>
+        <p:style>
+          <a:lnRef idx="1">
+            <a:schemeClr val="accent1"/>
+          </a:lnRef>
+          <a:fillRef idx="3">
+            <a:schemeClr val="accent1"/>
+          </a:fillRef>
+          <a:effectRef idx="2">
+            <a:schemeClr val="accent1"/>
+          </a:effectRef>
+          <a:fontRef idx="minor">
+            <a:schemeClr val="lt1"/>
+          </a:fontRef>
+        </p:style>
+        <p:txBody>
+          <a:bodyPr rtlCol="0" anchor="ctr" lIns="0" rIns="0" tIns="0" bIns="0"/>
+          <a:lstStyle/>
+          <a:p>
+            <a:pPr algn="ctr"/>
+            <a:r>
+              <a:rPr sz="1400" b="1">
+                <a:solidFill>
+                  <a:srgbClr val="FFFFFF"/>
+                </a:solidFill>
+                <a:latin typeface="Calibri"/>
+              </a:rPr>
+              <a:t>2</a:t>
+            </a:r>
+          </a:p>
+        </p:txBody>
+      </p:sp>
+      <p:sp>
+        <p:nvSpPr>
+          <p:cNvPr id="9" name="TextBox 8"/>
+          <p:cNvSpPr txBox="1"/>
+          <p:nvPr/>
+        </p:nvSpPr>
+        <p:spPr>
+          <a:xfrm>
+            <a:off x="1234440" y="2556662"/>
+            <a:ext cx="10408615" cy="791870"/>
+          </a:xfrm>
+          <a:prstGeom prst="rect">
+            <a:avLst/>
+          </a:prstGeom>
+          <a:noFill/>
+        </p:spPr>
+        <p:txBody>
+          <a:bodyPr wrap="square" anchor="t" lIns="0" rIns="0" tIns="0" bIns="0"/>
+          <a:lstStyle/>
+          <a:p>
+            <a:pPr algn="l"/>
+            <a:r>
+              <a:rPr sz="1800" b="0" i="0">
+                <a:solidFill>
+                  <a:srgbClr val="54595D"/>
+                </a:solidFill>
+                <a:latin typeface="Calibri"/>
+              </a:rPr>
+              <a:t>Which type of encryption protects a stolen laptop's drive?</a:t>
+            </a:r>
+          </a:p>
+          <a:p>
+            <a:r>
+              <a:rPr sz="1800" b="1">
+                <a:solidFill>
+                  <a:srgbClr val="03306E"/>
+                </a:solidFill>
+                <a:latin typeface="Calibri"/>
+              </a:rPr>
+              <a:t>Symmetric, via full disk encryption.</a:t>
+            </a:r>
+          </a:p>
+        </p:txBody>
+      </p:sp>
+      <p:sp>
+        <p:nvSpPr>
+          <p:cNvPr id="10" name="Oval 9"/>
+          <p:cNvSpPr/>
+          <p:nvPr/>
+        </p:nvSpPr>
+        <p:spPr>
+          <a:xfrm>
+            <a:off x="548640" y="3531412"/>
+            <a:ext cx="411480" cy="411480"/>
+          </a:xfrm>
+          <a:prstGeom prst="ellipse">
+            <a:avLst/>
+          </a:prstGeom>
+          <a:solidFill>
+            <a:srgbClr val="E0463A"/>
+          </a:solidFill>
+          <a:ln>
+            <a:noFill/>
+          </a:ln>
+          <a:effectLst/>
+        </p:spPr>
+        <p:style>
+          <a:lnRef idx="1">
+            <a:schemeClr val="accent1"/>
+          </a:lnRef>
+          <a:fillRef idx="3">
+            <a:schemeClr val="accent1"/>
+          </a:fillRef>
+          <a:effectRef idx="2">
+            <a:schemeClr val="accent1"/>
+          </a:effectRef>
+          <a:fontRef idx="minor">
+            <a:schemeClr val="lt1"/>
+          </a:fontRef>
+        </p:style>
+        <p:txBody>
+          <a:bodyPr rtlCol="0" anchor="ctr" lIns="0" rIns="0" tIns="0" bIns="0"/>
+          <a:lstStyle/>
+          <a:p>
+            <a:pPr algn="ctr"/>
+            <a:r>
+              <a:rPr sz="1400" b="1">
+                <a:solidFill>
+                  <a:srgbClr val="FFFFFF"/>
+                </a:solidFill>
+                <a:latin typeface="Calibri"/>
+              </a:rPr>
+              <a:t>3</a:t>
+            </a:r>
+          </a:p>
+        </p:txBody>
+      </p:sp>
+      <p:sp>
+        <p:nvSpPr>
+          <p:cNvPr id="11" name="TextBox 10"/>
+          <p:cNvSpPr txBox="1"/>
+          <p:nvPr/>
+        </p:nvSpPr>
+        <p:spPr>
+          <a:xfrm>
+            <a:off x="1234440" y="3513124"/>
+            <a:ext cx="10408615" cy="791870"/>
+          </a:xfrm>
+          <a:prstGeom prst="rect">
+            <a:avLst/>
+          </a:prstGeom>
+          <a:noFill/>
+        </p:spPr>
+        <p:txBody>
+          <a:bodyPr wrap="square" anchor="t" lIns="0" rIns="0" tIns="0" bIns="0"/>
+          <a:lstStyle/>
+          <a:p>
+            <a:pPr algn="l"/>
+            <a:r>
+              <a:rPr sz="1800" b="0" i="0">
+                <a:solidFill>
+                  <a:srgbClr val="54595D"/>
+                </a:solidFill>
+                <a:latin typeface="Calibri"/>
+              </a:rPr>
+              <a:t>What does a digital signature prove?</a:t>
+            </a:r>
+          </a:p>
+          <a:p>
+            <a:r>
+              <a:rPr sz="1800" b="1">
+                <a:solidFill>
+                  <a:srgbClr val="03306E"/>
+                </a:solidFill>
+                <a:latin typeface="Calibri"/>
+              </a:rPr>
+              <a:t>The authenticity of the sender.</a:t>
+            </a:r>
+          </a:p>
+        </p:txBody>
+      </p:sp>
+      <p:sp>
+        <p:nvSpPr>
+          <p:cNvPr id="12" name="Oval 11"/>
+          <p:cNvSpPr/>
+          <p:nvPr/>
+        </p:nvSpPr>
+        <p:spPr>
+          <a:xfrm>
+            <a:off x="548640" y="4487875"/>
+            <a:ext cx="411480" cy="411480"/>
+          </a:xfrm>
+          <a:prstGeom prst="ellipse">
+            <a:avLst/>
+          </a:prstGeom>
+          <a:solidFill>
+            <a:srgbClr val="E0463A"/>
+          </a:solidFill>
+          <a:ln>
+            <a:noFill/>
+          </a:ln>
+          <a:effectLst/>
+        </p:spPr>
+        <p:style>
+          <a:lnRef idx="1">
+            <a:schemeClr val="accent1"/>
+          </a:lnRef>
+          <a:fillRef idx="3">
+            <a:schemeClr val="accent1"/>
+          </a:fillRef>
+          <a:effectRef idx="2">
+            <a:schemeClr val="accent1"/>
+          </a:effectRef>
+          <a:fontRef idx="minor">
+            <a:schemeClr val="lt1"/>
+          </a:fontRef>
+        </p:style>
+        <p:txBody>
+          <a:bodyPr rtlCol="0" anchor="ctr" lIns="0" rIns="0" tIns="0" bIns="0"/>
+          <a:lstStyle/>
+          <a:p>
+            <a:pPr algn="ctr"/>
+            <a:r>
+              <a:rPr sz="1400" b="1">
+                <a:solidFill>
+                  <a:srgbClr val="FFFFFF"/>
+                </a:solidFill>
+                <a:latin typeface="Calibri"/>
+              </a:rPr>
+              <a:t>4</a:t>
+            </a:r>
+          </a:p>
+        </p:txBody>
+      </p:sp>
+      <p:sp>
+        <p:nvSpPr>
+          <p:cNvPr id="13" name="TextBox 12"/>
+          <p:cNvSpPr txBox="1"/>
+          <p:nvPr/>
+        </p:nvSpPr>
+        <p:spPr>
+          <a:xfrm>
+            <a:off x="1234440" y="4469587"/>
+            <a:ext cx="10408615" cy="791870"/>
+          </a:xfrm>
+          <a:prstGeom prst="rect">
+            <a:avLst/>
+          </a:prstGeom>
+          <a:noFill/>
+        </p:spPr>
+        <p:txBody>
+          <a:bodyPr wrap="square" anchor="t" lIns="0" rIns="0" tIns="0" bIns="0"/>
+          <a:lstStyle/>
+          <a:p>
+            <a:pPr algn="l"/>
+            <a:r>
+              <a:rPr sz="1800" b="0" i="0">
+                <a:solidFill>
+                  <a:srgbClr val="54595D"/>
+                </a:solidFill>
+                <a:latin typeface="Calibri"/>
+              </a:rPr>
+              <a:t>What is a CSR?</a:t>
+            </a:r>
+          </a:p>
+          <a:p>
+            <a:r>
+              <a:rPr sz="1800" b="1">
+                <a:solidFill>
+                  <a:srgbClr val="03306E"/>
+                </a:solidFill>
+                <a:latin typeface="Calibri"/>
+              </a:rPr>
+              <a:t>A Certificate Signing Request sent to a Certificate Authority.</a:t>
+            </a:r>
+          </a:p>
+        </p:txBody>
+      </p:sp>
+      <p:sp>
+        <p:nvSpPr>
+          <p:cNvPr id="14" name="Oval 13"/>
+          <p:cNvSpPr/>
+          <p:nvPr/>
+        </p:nvSpPr>
+        <p:spPr>
+          <a:xfrm>
+            <a:off x="548640" y="5444337"/>
+            <a:ext cx="411480" cy="411480"/>
+          </a:xfrm>
+          <a:prstGeom prst="ellipse">
+            <a:avLst/>
+          </a:prstGeom>
+          <a:solidFill>
+            <a:srgbClr val="E0463A"/>
+          </a:solidFill>
+          <a:ln>
+            <a:noFill/>
+          </a:ln>
+          <a:effectLst/>
+        </p:spPr>
+        <p:style>
+          <a:lnRef idx="1">
+            <a:schemeClr val="accent1"/>
+          </a:lnRef>
+          <a:fillRef idx="3">
+            <a:schemeClr val="accent1"/>
+          </a:fillRef>
+          <a:effectRef idx="2">
+            <a:schemeClr val="accent1"/>
+          </a:effectRef>
+          <a:fontRef idx="minor">
+            <a:schemeClr val="lt1"/>
+          </a:fontRef>
+        </p:style>
+        <p:txBody>
+          <a:bodyPr rtlCol="0" anchor="ctr" lIns="0" rIns="0" tIns="0" bIns="0"/>
+          <a:lstStyle/>
+          <a:p>
+            <a:pPr algn="ctr"/>
+            <a:r>
+              <a:rPr sz="1400" b="1">
+                <a:solidFill>
+                  <a:srgbClr val="FFFFFF"/>
+                </a:solidFill>
+                <a:latin typeface="Calibri"/>
+              </a:rPr>
+              <a:t>5</a:t>
+            </a:r>
+          </a:p>
+        </p:txBody>
+      </p:sp>
+      <p:sp>
+        <p:nvSpPr>
+          <p:cNvPr id="15" name="TextBox 14"/>
+          <p:cNvSpPr txBox="1"/>
+          <p:nvPr/>
+        </p:nvSpPr>
+        <p:spPr>
+          <a:xfrm>
+            <a:off x="1234440" y="5426049"/>
+            <a:ext cx="10408615" cy="791870"/>
+          </a:xfrm>
+          <a:prstGeom prst="rect">
+            <a:avLst/>
+          </a:prstGeom>
+          <a:noFill/>
+        </p:spPr>
+        <p:txBody>
+          <a:bodyPr wrap="square" anchor="t" lIns="0" rIns="0" tIns="0" bIns="0"/>
+          <a:lstStyle/>
+          <a:p>
+            <a:pPr algn="l"/>
+            <a:r>
+              <a:rPr sz="1800" b="0" i="0">
+                <a:solidFill>
+                  <a:srgbClr val="54595D"/>
+                </a:solidFill>
+                <a:latin typeface="Calibri"/>
+              </a:rPr>
+              <a:t>Name two features of a digital certificate.</a:t>
+            </a:r>
+          </a:p>
+          <a:p>
+            <a:r>
+              <a:rPr sz="1800" b="1">
+                <a:solidFill>
+                  <a:srgbClr val="03306E"/>
+                </a:solidFill>
+                <a:latin typeface="Calibri"/>
+              </a:rPr>
+              <a:t>Any two of: holder name, serial number, expiry, public key, issuer signature.</a:t>
+            </a:r>
+          </a:p>
+        </p:txBody>
+      </p:sp>
+    </p:spTree>
+  </p:cSld>
+  <p:clrMapOvr>
+    <a:masterClrMapping/>
+  </p:clrMapOvr>
+</p:sld>
+</file>
+
+<file path=ppt/slides/slide18.xml><?xml version="1.0" encoding="utf-8"?>
+<p:sld xmlns:a="http://schemas.openxmlformats.org/drawingml/2006/main" xmlns:p="http://schemas.openxmlformats.org/presentationml/2006/main" xmlns:r="http://schemas.openxmlformats.org/officeDocument/2006/relationships">
+  <p:cSld>
+    <p:bg>
+      <p:bgPr>
+        <a:solidFill>
+          <a:srgbClr val="FFFFFF"/>
+        </a:solidFill>
+        <a:effectLst/>
+      </p:bgPr>
+    </p:bg>
+    <p:spTree>
+      <p:nvGrpSpPr>
+        <p:cNvPr id="1" name=""/>
+        <p:cNvGrpSpPr/>
+        <p:nvPr/>
+      </p:nvGrpSpPr>
+      <p:grpSpPr/>
+      <p:sp>
+        <p:nvSpPr>
+          <p:cNvPr id="2" name="TextBox 1"/>
+          <p:cNvSpPr txBox="1"/>
+          <p:nvPr/>
+        </p:nvSpPr>
+        <p:spPr>
+          <a:xfrm>
+            <a:off x="548640" y="320040"/>
+            <a:ext cx="11094415" cy="274320"/>
+          </a:xfrm>
+          <a:prstGeom prst="rect">
+            <a:avLst/>
+          </a:prstGeom>
+          <a:noFill/>
+        </p:spPr>
+        <p:txBody>
+          <a:bodyPr wrap="square" anchor="t" lIns="0" rIns="0" tIns="0" bIns="0"/>
+          <a:lstStyle/>
+          <a:p>
+            <a:pPr algn="l"/>
+            <a:r>
+              <a:rPr sz="1100" b="1" i="0">
+                <a:solidFill>
+                  <a:srgbClr val="54595D"/>
+                </a:solidFill>
+                <a:latin typeface="Calibri"/>
+              </a:rPr>
+              <a:t>CYBER SECURITY  ·  Cyber Security Content Areas 1 and 2</a:t>
+            </a:r>
+          </a:p>
+        </p:txBody>
+      </p:sp>
+      <p:sp>
+        <p:nvSpPr>
+          <p:cNvPr id="3" name="TextBox 2"/>
+          <p:cNvSpPr txBox="1"/>
+          <p:nvPr/>
+        </p:nvSpPr>
+        <p:spPr>
+          <a:xfrm>
+            <a:off x="548640" y="566928"/>
+            <a:ext cx="11094415" cy="822960"/>
+          </a:xfrm>
+          <a:prstGeom prst="rect">
+            <a:avLst/>
+          </a:prstGeom>
+          <a:noFill/>
+        </p:spPr>
+        <p:txBody>
+          <a:bodyPr wrap="square" anchor="ctr" lIns="0" rIns="0" tIns="0" bIns="0"/>
+          <a:lstStyle/>
+          <a:p>
+            <a:pPr algn="l"/>
+            <a:r>
+              <a:rPr sz="3200" b="1" i="0">
+                <a:solidFill>
+                  <a:srgbClr val="03306E"/>
+                </a:solidFill>
+                <a:latin typeface="Cambria"/>
+              </a:rPr>
+              <a:t>Activity: Inspect and hash</a:t>
+            </a:r>
+          </a:p>
+        </p:txBody>
+      </p:sp>
+      <p:sp>
+        <p:nvSpPr>
+          <p:cNvPr id="4" name="TextBox 3"/>
+          <p:cNvSpPr txBox="1"/>
+          <p:nvPr/>
+        </p:nvSpPr>
+        <p:spPr>
+          <a:xfrm>
+            <a:off x="548640" y="6446520"/>
+            <a:ext cx="8229600" cy="274320"/>
+          </a:xfrm>
+          <a:prstGeom prst="rect">
+            <a:avLst/>
+          </a:prstGeom>
+          <a:noFill/>
+        </p:spPr>
+        <p:txBody>
+          <a:bodyPr wrap="square" anchor="t" lIns="0" rIns="0" tIns="0" bIns="0"/>
+          <a:lstStyle/>
+          <a:p>
+            <a:pPr algn="l"/>
+            <a:r>
+              <a:rPr sz="1000" b="0" i="0">
+                <a:solidFill>
+                  <a:srgbClr val="54595D"/>
+                </a:solidFill>
+                <a:latin typeface="Calibri"/>
+              </a:rPr>
+              <a:t>Digital Support and Security T Level  ·  Cryptography and Digital Certificates</a:t>
+            </a:r>
+          </a:p>
+        </p:txBody>
+      </p:sp>
+      <p:sp>
+        <p:nvSpPr>
+          <p:cNvPr id="5" name="TextBox 4"/>
+          <p:cNvSpPr txBox="1"/>
+          <p:nvPr/>
+        </p:nvSpPr>
+        <p:spPr>
+          <a:xfrm>
+            <a:off x="10728655" y="6446520"/>
+            <a:ext cx="914400" cy="274320"/>
+          </a:xfrm>
+          <a:prstGeom prst="rect">
+            <a:avLst/>
+          </a:prstGeom>
+          <a:noFill/>
+        </p:spPr>
+        <p:txBody>
+          <a:bodyPr wrap="square" anchor="t" lIns="0" rIns="0" tIns="0" bIns="0"/>
+          <a:lstStyle/>
+          <a:p>
+            <a:pPr algn="r"/>
+            <a:r>
+              <a:rPr sz="1000" b="0" i="0">
+                <a:solidFill>
+                  <a:srgbClr val="54595D"/>
+                </a:solidFill>
+                <a:latin typeface="Calibri"/>
+              </a:rPr>
+              <a:t>18</a:t>
             </a:r>
           </a:p>
         </p:txBody>
@@ -4822,7 +9663,7 @@
 </p:sld>
 </file>
 
-<file path=ppt/slides/slide11.xml><?xml version="1.0" encoding="utf-8"?>
+<file path=ppt/slides/slide19.xml><?xml version="1.0" encoding="utf-8"?>
 <p:sld xmlns:a="http://schemas.openxmlformats.org/drawingml/2006/main" xmlns:p="http://schemas.openxmlformats.org/presentationml/2006/main" xmlns:r="http://schemas.openxmlformats.org/officeDocument/2006/relationships">
   <p:cSld>
     <p:bg>
@@ -6145,22 +10986,177 @@
       </p:sp>
       <p:sp>
         <p:nvSpPr>
-          <p:cNvPr id="6" name="Rounded Rectangle 5"/>
+          <p:cNvPr id="6" name="TextBox 5"/>
+          <p:cNvSpPr txBox="1"/>
+          <p:nvPr/>
+        </p:nvSpPr>
+        <p:spPr>
+          <a:xfrm>
+            <a:off x="548640" y="1554480"/>
+            <a:ext cx="6720840" cy="4617720"/>
+          </a:xfrm>
+          <a:prstGeom prst="rect">
+            <a:avLst/>
+          </a:prstGeom>
+          <a:noFill/>
+        </p:spPr>
+        <p:txBody>
+          <a:bodyPr wrap="square" lIns="0" rIns="0" tIns="0" bIns="0">
+            <a:spAutoFit/>
+          </a:bodyPr>
+          <a:lstStyle/>
+          <a:p>
+            <a:pPr>
+              <a:spcAft>
+                <a:spcPts val="1140"/>
+              </a:spcAft>
+            </a:pPr>
+            <a:r>
+              <a:rPr sz="1900" b="0">
+                <a:solidFill>
+                  <a:srgbClr val="202122"/>
+                </a:solidFill>
+                <a:latin typeface="Calibri"/>
+              </a:rPr>
+              <a:t>Cryptography secures and authenticates data. It provides four things.</a:t>
+            </a:r>
+          </a:p>
+          <a:p>
+            <a:pPr>
+              <a:spcAft>
+                <a:spcPts val="1140"/>
+              </a:spcAft>
+            </a:pPr>
+            <a:r>
+              <a:rPr sz="1900" b="1">
+                <a:solidFill>
+                  <a:srgbClr val="202122"/>
+                </a:solidFill>
+                <a:latin typeface="Calibri"/>
+              </a:rPr>
+              <a:t>Confidentiality:</a:t>
+            </a:r>
+            <a:r>
+              <a:rPr sz="1900" b="0">
+                <a:solidFill>
+                  <a:srgbClr val="202122"/>
+                </a:solidFill>
+                <a:latin typeface="Calibri"/>
+              </a:rPr>
+              <a:t> only the intended recipient can decrypt and read the data.</a:t>
+            </a:r>
+          </a:p>
+          <a:p>
+            <a:pPr>
+              <a:spcAft>
+                <a:spcPts val="1140"/>
+              </a:spcAft>
+            </a:pPr>
+            <a:r>
+              <a:rPr sz="1900" b="1">
+                <a:solidFill>
+                  <a:srgbClr val="202122"/>
+                </a:solidFill>
+                <a:latin typeface="Calibri"/>
+              </a:rPr>
+              <a:t>Integrity:</a:t>
+            </a:r>
+            <a:r>
+              <a:rPr sz="1900" b="0">
+                <a:solidFill>
+                  <a:srgbClr val="202122"/>
+                </a:solidFill>
+                <a:latin typeface="Calibri"/>
+              </a:rPr>
+              <a:t> any change to the data in transit can be detected, for example with an HMAC.</a:t>
+            </a:r>
+          </a:p>
+          <a:p>
+            <a:pPr>
+              <a:spcAft>
+                <a:spcPts val="1140"/>
+              </a:spcAft>
+            </a:pPr>
+            <a:r>
+              <a:rPr sz="1900" b="1">
+                <a:solidFill>
+                  <a:srgbClr val="202122"/>
+                </a:solidFill>
+                <a:latin typeface="Calibri"/>
+              </a:rPr>
+              <a:t>Authenticity:</a:t>
+            </a:r>
+            <a:r>
+              <a:rPr sz="1900" b="0">
+                <a:solidFill>
+                  <a:srgbClr val="202122"/>
+                </a:solidFill>
+                <a:latin typeface="Calibri"/>
+              </a:rPr>
+              <a:t> the recipient can check who sent the data, using a digital signature made with the sender's private key.</a:t>
+            </a:r>
+          </a:p>
+          <a:p>
+            <a:pPr>
+              <a:spcAft>
+                <a:spcPts val="1140"/>
+              </a:spcAft>
+            </a:pPr>
+            <a:r>
+              <a:rPr sz="1900" b="1">
+                <a:solidFill>
+                  <a:srgbClr val="202122"/>
+                </a:solidFill>
+                <a:latin typeface="Calibri"/>
+              </a:rPr>
+              <a:t>Non-repudiation:</a:t>
+            </a:r>
+            <a:r>
+              <a:rPr sz="1900" b="0">
+                <a:solidFill>
+                  <a:srgbClr val="202122"/>
+                </a:solidFill>
+                <a:latin typeface="Calibri"/>
+              </a:rPr>
+              <a:t> the sender can't later deny sending it, because only they hold the private key.</a:t>
+            </a:r>
+          </a:p>
+          <a:p>
+            <a:pPr>
+              <a:spcAft>
+                <a:spcPts val="1140"/>
+              </a:spcAft>
+            </a:pPr>
+            <a:r>
+              <a:rPr sz="1900" b="0">
+                <a:solidFill>
+                  <a:srgbClr val="202122"/>
+                </a:solidFill>
+                <a:latin typeface="Calibri"/>
+              </a:rPr>
+              <a:t>When sending data, first identify which of the CIA properties it needs.</a:t>
+            </a:r>
+          </a:p>
+        </p:txBody>
+      </p:sp>
+      <p:sp>
+        <p:nvSpPr>
+          <p:cNvPr id="7" name="Rounded Rectangle 6"/>
           <p:cNvSpPr/>
           <p:nvPr/>
         </p:nvSpPr>
         <p:spPr>
           <a:xfrm>
-            <a:off x="548640" y="1600200"/>
-            <a:ext cx="5410047" cy="2148840"/>
+            <a:off x="7772400" y="1554480"/>
+            <a:ext cx="3867912" cy="4526280"/>
           </a:xfrm>
           <a:prstGeom prst="roundRect">
             <a:avLst>
-              <a:gd name="adj" fmla="val 6000"/>
+              <a:gd name="adj" fmla="val 8000"/>
             </a:avLst>
           </a:prstGeom>
           <a:solidFill>
-            <a:srgbClr val="EAF3FF"/>
+            <a:srgbClr val="03306E"/>
           </a:solidFill>
           <a:ln>
             <a:noFill/>
@@ -6189,14 +11185,14 @@
       </p:sp>
       <p:sp>
         <p:nvSpPr>
-          <p:cNvPr id="7" name="Oval 6"/>
+          <p:cNvPr id="8" name="Oval 7"/>
           <p:cNvSpPr/>
           <p:nvPr/>
         </p:nvSpPr>
         <p:spPr>
           <a:xfrm>
-            <a:off x="777240" y="1828800"/>
-            <a:ext cx="457200" cy="457200"/>
+            <a:off x="8046720" y="1828800"/>
+            <a:ext cx="548640" cy="548640"/>
           </a:xfrm>
           <a:prstGeom prst="ellipse">
             <a:avLst/>
@@ -6229,60 +11225,60 @@
           <a:p>
             <a:pPr algn="ctr"/>
             <a:r>
-              <a:rPr sz="1500" b="1">
+              <a:rPr sz="1300" b="1">
                 <a:solidFill>
                   <a:srgbClr val="FFFFFF"/>
                 </a:solidFill>
                 <a:latin typeface="Calibri"/>
               </a:rPr>
-              <a:t>1</a:t>
-            </a:r>
-          </a:p>
-        </p:txBody>
-      </p:sp>
-      <p:sp>
-        <p:nvSpPr>
-          <p:cNvPr id="8" name="TextBox 7"/>
-          <p:cNvSpPr txBox="1"/>
-          <p:nvPr/>
-        </p:nvSpPr>
-        <p:spPr>
-          <a:xfrm>
-            <a:off x="1371600" y="1801368"/>
-            <a:ext cx="4404207" cy="512064"/>
-          </a:xfrm>
-          <a:prstGeom prst="rect">
-            <a:avLst/>
-          </a:prstGeom>
-          <a:noFill/>
-        </p:spPr>
-        <p:txBody>
-          <a:bodyPr wrap="square" anchor="ctr" lIns="0" rIns="0" tIns="0" bIns="0"/>
+              <a:t>e.g.</a:t>
+            </a:r>
+          </a:p>
+        </p:txBody>
+      </p:sp>
+      <p:sp>
+        <p:nvSpPr>
+          <p:cNvPr id="9" name="TextBox 8"/>
+          <p:cNvSpPr txBox="1"/>
+          <p:nvPr/>
+        </p:nvSpPr>
+        <p:spPr>
+          <a:xfrm>
+            <a:off x="8046720" y="2560320"/>
+            <a:ext cx="3291840" cy="365760"/>
+          </a:xfrm>
+          <a:prstGeom prst="rect">
+            <a:avLst/>
+          </a:prstGeom>
+          <a:noFill/>
+        </p:spPr>
+        <p:txBody>
+          <a:bodyPr wrap="square" anchor="t" lIns="0" rIns="0" tIns="0" bIns="0"/>
           <a:lstStyle/>
           <a:p>
             <a:pPr algn="l"/>
             <a:r>
-              <a:rPr sz="1900" b="1" i="0">
-                <a:solidFill>
-                  <a:srgbClr val="03306E"/>
-                </a:solidFill>
-                <a:latin typeface="Calibri"/>
-              </a:rPr>
-              <a:t>Confidentiality</a:t>
-            </a:r>
-          </a:p>
-        </p:txBody>
-      </p:sp>
-      <p:sp>
-        <p:nvSpPr>
-          <p:cNvPr id="9" name="TextBox 8"/>
-          <p:cNvSpPr txBox="1"/>
-          <p:nvPr/>
-        </p:nvSpPr>
-        <p:spPr>
-          <a:xfrm>
-            <a:off x="777240" y="2468880"/>
-            <a:ext cx="4952847" cy="1143000"/>
+              <a:rPr sz="1300" b="1" i="0">
+                <a:solidFill>
+                  <a:srgbClr val="A9C8F0"/>
+                </a:solidFill>
+                <a:latin typeface="Calibri"/>
+              </a:rPr>
+              <a:t>EXAMPLE</a:t>
+            </a:r>
+          </a:p>
+        </p:txBody>
+      </p:sp>
+      <p:sp>
+        <p:nvSpPr>
+          <p:cNvPr id="10" name="TextBox 9"/>
+          <p:cNvSpPr txBox="1"/>
+          <p:nvPr/>
+        </p:nvSpPr>
+        <p:spPr>
+          <a:xfrm>
+            <a:off x="8046720" y="2971800"/>
+            <a:ext cx="3291840" cy="2971800"/>
           </a:xfrm>
           <a:prstGeom prst="rect">
             <a:avLst/>
@@ -6295,502 +11291,13 @@
           <a:p>
             <a:pPr algn="l"/>
             <a:r>
-              <a:rPr sz="2000" b="0" i="0">
-                <a:solidFill>
-                  <a:srgbClr val="202122"/>
-                </a:solidFill>
-                <a:latin typeface="Calibri"/>
-              </a:rPr>
-              <a:t>Only intended recipients can decrypt the data.</a:t>
-            </a:r>
-          </a:p>
-        </p:txBody>
-      </p:sp>
-      <p:sp>
-        <p:nvSpPr>
-          <p:cNvPr id="10" name="Rounded Rectangle 9"/>
-          <p:cNvSpPr/>
-          <p:nvPr/>
-        </p:nvSpPr>
-        <p:spPr>
-          <a:xfrm>
-            <a:off x="6233007" y="1600200"/>
-            <a:ext cx="5410047" cy="2148840"/>
-          </a:xfrm>
-          <a:prstGeom prst="roundRect">
-            <a:avLst>
-              <a:gd name="adj" fmla="val 6000"/>
-            </a:avLst>
-          </a:prstGeom>
-          <a:solidFill>
-            <a:srgbClr val="EAF3FF"/>
-          </a:solidFill>
-          <a:ln>
-            <a:noFill/>
-          </a:ln>
-          <a:effectLst/>
-        </p:spPr>
-        <p:style>
-          <a:lnRef idx="1">
-            <a:schemeClr val="accent1"/>
-          </a:lnRef>
-          <a:fillRef idx="3">
-            <a:schemeClr val="accent1"/>
-          </a:fillRef>
-          <a:effectRef idx="2">
-            <a:schemeClr val="accent1"/>
-          </a:effectRef>
-          <a:fontRef idx="minor">
-            <a:schemeClr val="lt1"/>
-          </a:fontRef>
-        </p:style>
-        <p:txBody>
-          <a:bodyPr rtlCol="0" anchor="ctr"/>
-          <a:lstStyle/>
-          <a:p/>
-        </p:txBody>
-      </p:sp>
-      <p:sp>
-        <p:nvSpPr>
-          <p:cNvPr id="11" name="Oval 10"/>
-          <p:cNvSpPr/>
-          <p:nvPr/>
-        </p:nvSpPr>
-        <p:spPr>
-          <a:xfrm>
-            <a:off x="6461607" y="1828800"/>
-            <a:ext cx="457200" cy="457200"/>
-          </a:xfrm>
-          <a:prstGeom prst="ellipse">
-            <a:avLst/>
-          </a:prstGeom>
-          <a:solidFill>
-            <a:srgbClr val="E0463A"/>
-          </a:solidFill>
-          <a:ln>
-            <a:noFill/>
-          </a:ln>
-          <a:effectLst/>
-        </p:spPr>
-        <p:style>
-          <a:lnRef idx="1">
-            <a:schemeClr val="accent1"/>
-          </a:lnRef>
-          <a:fillRef idx="3">
-            <a:schemeClr val="accent1"/>
-          </a:fillRef>
-          <a:effectRef idx="2">
-            <a:schemeClr val="accent1"/>
-          </a:effectRef>
-          <a:fontRef idx="minor">
-            <a:schemeClr val="lt1"/>
-          </a:fontRef>
-        </p:style>
-        <p:txBody>
-          <a:bodyPr rtlCol="0" anchor="ctr" lIns="0" rIns="0" tIns="0" bIns="0"/>
-          <a:lstStyle/>
-          <a:p>
-            <a:pPr algn="ctr"/>
-            <a:r>
-              <a:rPr sz="1500" b="1">
+              <a:rPr sz="1900" b="0" i="0">
                 <a:solidFill>
                   <a:srgbClr val="FFFFFF"/>
                 </a:solidFill>
-                <a:latin typeface="Calibri"/>
-              </a:rPr>
-              <a:t>2</a:t>
-            </a:r>
-          </a:p>
-        </p:txBody>
-      </p:sp>
-      <p:sp>
-        <p:nvSpPr>
-          <p:cNvPr id="12" name="TextBox 11"/>
-          <p:cNvSpPr txBox="1"/>
-          <p:nvPr/>
-        </p:nvSpPr>
-        <p:spPr>
-          <a:xfrm>
-            <a:off x="7055967" y="1801368"/>
-            <a:ext cx="4404207" cy="512064"/>
-          </a:xfrm>
-          <a:prstGeom prst="rect">
-            <a:avLst/>
-          </a:prstGeom>
-          <a:noFill/>
-        </p:spPr>
-        <p:txBody>
-          <a:bodyPr wrap="square" anchor="ctr" lIns="0" rIns="0" tIns="0" bIns="0"/>
-          <a:lstStyle/>
-          <a:p>
-            <a:pPr algn="l"/>
-            <a:r>
-              <a:rPr sz="1900" b="1" i="0">
-                <a:solidFill>
-                  <a:srgbClr val="03306E"/>
-                </a:solidFill>
-                <a:latin typeface="Calibri"/>
-              </a:rPr>
-              <a:t>Integrity</a:t>
-            </a:r>
-          </a:p>
-        </p:txBody>
-      </p:sp>
-      <p:sp>
-        <p:nvSpPr>
-          <p:cNvPr id="13" name="TextBox 12"/>
-          <p:cNvSpPr txBox="1"/>
-          <p:nvPr/>
-        </p:nvSpPr>
-        <p:spPr>
-          <a:xfrm>
-            <a:off x="6461607" y="2468880"/>
-            <a:ext cx="4952847" cy="1143000"/>
-          </a:xfrm>
-          <a:prstGeom prst="rect">
-            <a:avLst/>
-          </a:prstGeom>
-          <a:noFill/>
-        </p:spPr>
-        <p:txBody>
-          <a:bodyPr wrap="square" anchor="t" lIns="0" rIns="0" tIns="0" bIns="0"/>
-          <a:lstStyle/>
-          <a:p>
-            <a:pPr algn="l"/>
-            <a:r>
-              <a:rPr sz="2000" b="0" i="0">
-                <a:solidFill>
-                  <a:srgbClr val="202122"/>
-                </a:solidFill>
-                <a:latin typeface="Calibri"/>
-              </a:rPr>
-              <a:t>Data cannot be changed in transit without detection (HMAC).</a:t>
-            </a:r>
-          </a:p>
-        </p:txBody>
-      </p:sp>
-      <p:sp>
-        <p:nvSpPr>
-          <p:cNvPr id="14" name="Rounded Rectangle 13"/>
-          <p:cNvSpPr/>
-          <p:nvPr/>
-        </p:nvSpPr>
-        <p:spPr>
-          <a:xfrm>
-            <a:off x="548640" y="4023360"/>
-            <a:ext cx="5410047" cy="2148840"/>
-          </a:xfrm>
-          <a:prstGeom prst="roundRect">
-            <a:avLst>
-              <a:gd name="adj" fmla="val 6000"/>
-            </a:avLst>
-          </a:prstGeom>
-          <a:solidFill>
-            <a:srgbClr val="EAF3FF"/>
-          </a:solidFill>
-          <a:ln>
-            <a:noFill/>
-          </a:ln>
-          <a:effectLst/>
-        </p:spPr>
-        <p:style>
-          <a:lnRef idx="1">
-            <a:schemeClr val="accent1"/>
-          </a:lnRef>
-          <a:fillRef idx="3">
-            <a:schemeClr val="accent1"/>
-          </a:fillRef>
-          <a:effectRef idx="2">
-            <a:schemeClr val="accent1"/>
-          </a:effectRef>
-          <a:fontRef idx="minor">
-            <a:schemeClr val="lt1"/>
-          </a:fontRef>
-        </p:style>
-        <p:txBody>
-          <a:bodyPr rtlCol="0" anchor="ctr"/>
-          <a:lstStyle/>
-          <a:p/>
-        </p:txBody>
-      </p:sp>
-      <p:sp>
-        <p:nvSpPr>
-          <p:cNvPr id="15" name="Oval 14"/>
-          <p:cNvSpPr/>
-          <p:nvPr/>
-        </p:nvSpPr>
-        <p:spPr>
-          <a:xfrm>
-            <a:off x="777240" y="4251960"/>
-            <a:ext cx="457200" cy="457200"/>
-          </a:xfrm>
-          <a:prstGeom prst="ellipse">
-            <a:avLst/>
-          </a:prstGeom>
-          <a:solidFill>
-            <a:srgbClr val="E0463A"/>
-          </a:solidFill>
-          <a:ln>
-            <a:noFill/>
-          </a:ln>
-          <a:effectLst/>
-        </p:spPr>
-        <p:style>
-          <a:lnRef idx="1">
-            <a:schemeClr val="accent1"/>
-          </a:lnRef>
-          <a:fillRef idx="3">
-            <a:schemeClr val="accent1"/>
-          </a:fillRef>
-          <a:effectRef idx="2">
-            <a:schemeClr val="accent1"/>
-          </a:effectRef>
-          <a:fontRef idx="minor">
-            <a:schemeClr val="lt1"/>
-          </a:fontRef>
-        </p:style>
-        <p:txBody>
-          <a:bodyPr rtlCol="0" anchor="ctr" lIns="0" rIns="0" tIns="0" bIns="0"/>
-          <a:lstStyle/>
-          <a:p>
-            <a:pPr algn="ctr"/>
-            <a:r>
-              <a:rPr sz="1500" b="1">
-                <a:solidFill>
-                  <a:srgbClr val="FFFFFF"/>
-                </a:solidFill>
-                <a:latin typeface="Calibri"/>
-              </a:rPr>
-              <a:t>3</a:t>
-            </a:r>
-          </a:p>
-        </p:txBody>
-      </p:sp>
-      <p:sp>
-        <p:nvSpPr>
-          <p:cNvPr id="16" name="TextBox 15"/>
-          <p:cNvSpPr txBox="1"/>
-          <p:nvPr/>
-        </p:nvSpPr>
-        <p:spPr>
-          <a:xfrm>
-            <a:off x="1371600" y="4224528"/>
-            <a:ext cx="4404207" cy="512064"/>
-          </a:xfrm>
-          <a:prstGeom prst="rect">
-            <a:avLst/>
-          </a:prstGeom>
-          <a:noFill/>
-        </p:spPr>
-        <p:txBody>
-          <a:bodyPr wrap="square" anchor="ctr" lIns="0" rIns="0" tIns="0" bIns="0"/>
-          <a:lstStyle/>
-          <a:p>
-            <a:pPr algn="l"/>
-            <a:r>
-              <a:rPr sz="1900" b="1" i="0">
-                <a:solidFill>
-                  <a:srgbClr val="03306E"/>
-                </a:solidFill>
-                <a:latin typeface="Calibri"/>
-              </a:rPr>
-              <a:t>Authenticity</a:t>
-            </a:r>
-          </a:p>
-        </p:txBody>
-      </p:sp>
-      <p:sp>
-        <p:nvSpPr>
-          <p:cNvPr id="17" name="TextBox 16"/>
-          <p:cNvSpPr txBox="1"/>
-          <p:nvPr/>
-        </p:nvSpPr>
-        <p:spPr>
-          <a:xfrm>
-            <a:off x="777240" y="4892040"/>
-            <a:ext cx="4952847" cy="1143000"/>
-          </a:xfrm>
-          <a:prstGeom prst="rect">
-            <a:avLst/>
-          </a:prstGeom>
-          <a:noFill/>
-        </p:spPr>
-        <p:txBody>
-          <a:bodyPr wrap="square" anchor="t" lIns="0" rIns="0" tIns="0" bIns="0"/>
-          <a:lstStyle/>
-          <a:p>
-            <a:pPr algn="l"/>
-            <a:r>
-              <a:rPr sz="2000" b="0" i="0">
-                <a:solidFill>
-                  <a:srgbClr val="202122"/>
-                </a:solidFill>
-                <a:latin typeface="Calibri"/>
-              </a:rPr>
-              <a:t>The recipient can verify the sender with a digital signature.</a:t>
-            </a:r>
-          </a:p>
-        </p:txBody>
-      </p:sp>
-      <p:sp>
-        <p:nvSpPr>
-          <p:cNvPr id="18" name="Rounded Rectangle 17"/>
-          <p:cNvSpPr/>
-          <p:nvPr/>
-        </p:nvSpPr>
-        <p:spPr>
-          <a:xfrm>
-            <a:off x="6233007" y="4023360"/>
-            <a:ext cx="5410047" cy="2148840"/>
-          </a:xfrm>
-          <a:prstGeom prst="roundRect">
-            <a:avLst>
-              <a:gd name="adj" fmla="val 6000"/>
-            </a:avLst>
-          </a:prstGeom>
-          <a:solidFill>
-            <a:srgbClr val="EAF3FF"/>
-          </a:solidFill>
-          <a:ln>
-            <a:noFill/>
-          </a:ln>
-          <a:effectLst/>
-        </p:spPr>
-        <p:style>
-          <a:lnRef idx="1">
-            <a:schemeClr val="accent1"/>
-          </a:lnRef>
-          <a:fillRef idx="3">
-            <a:schemeClr val="accent1"/>
-          </a:fillRef>
-          <a:effectRef idx="2">
-            <a:schemeClr val="accent1"/>
-          </a:effectRef>
-          <a:fontRef idx="minor">
-            <a:schemeClr val="lt1"/>
-          </a:fontRef>
-        </p:style>
-        <p:txBody>
-          <a:bodyPr rtlCol="0" anchor="ctr"/>
-          <a:lstStyle/>
-          <a:p/>
-        </p:txBody>
-      </p:sp>
-      <p:sp>
-        <p:nvSpPr>
-          <p:cNvPr id="19" name="Oval 18"/>
-          <p:cNvSpPr/>
-          <p:nvPr/>
-        </p:nvSpPr>
-        <p:spPr>
-          <a:xfrm>
-            <a:off x="6461607" y="4251960"/>
-            <a:ext cx="457200" cy="457200"/>
-          </a:xfrm>
-          <a:prstGeom prst="ellipse">
-            <a:avLst/>
-          </a:prstGeom>
-          <a:solidFill>
-            <a:srgbClr val="E0463A"/>
-          </a:solidFill>
-          <a:ln>
-            <a:noFill/>
-          </a:ln>
-          <a:effectLst/>
-        </p:spPr>
-        <p:style>
-          <a:lnRef idx="1">
-            <a:schemeClr val="accent1"/>
-          </a:lnRef>
-          <a:fillRef idx="3">
-            <a:schemeClr val="accent1"/>
-          </a:fillRef>
-          <a:effectRef idx="2">
-            <a:schemeClr val="accent1"/>
-          </a:effectRef>
-          <a:fontRef idx="minor">
-            <a:schemeClr val="lt1"/>
-          </a:fontRef>
-        </p:style>
-        <p:txBody>
-          <a:bodyPr rtlCol="0" anchor="ctr" lIns="0" rIns="0" tIns="0" bIns="0"/>
-          <a:lstStyle/>
-          <a:p>
-            <a:pPr algn="ctr"/>
-            <a:r>
-              <a:rPr sz="1500" b="1">
-                <a:solidFill>
-                  <a:srgbClr val="FFFFFF"/>
-                </a:solidFill>
-                <a:latin typeface="Calibri"/>
-              </a:rPr>
-              <a:t>4</a:t>
-            </a:r>
-          </a:p>
-        </p:txBody>
-      </p:sp>
-      <p:sp>
-        <p:nvSpPr>
-          <p:cNvPr id="20" name="TextBox 19"/>
-          <p:cNvSpPr txBox="1"/>
-          <p:nvPr/>
-        </p:nvSpPr>
-        <p:spPr>
-          <a:xfrm>
-            <a:off x="7055967" y="4224528"/>
-            <a:ext cx="4404207" cy="512064"/>
-          </a:xfrm>
-          <a:prstGeom prst="rect">
-            <a:avLst/>
-          </a:prstGeom>
-          <a:noFill/>
-        </p:spPr>
-        <p:txBody>
-          <a:bodyPr wrap="square" anchor="ctr" lIns="0" rIns="0" tIns="0" bIns="0"/>
-          <a:lstStyle/>
-          <a:p>
-            <a:pPr algn="l"/>
-            <a:r>
-              <a:rPr sz="1900" b="1" i="0">
-                <a:solidFill>
-                  <a:srgbClr val="03306E"/>
-                </a:solidFill>
-                <a:latin typeface="Calibri"/>
-              </a:rPr>
-              <a:t>Non-repudiation</a:t>
-            </a:r>
-          </a:p>
-        </p:txBody>
-      </p:sp>
-      <p:sp>
-        <p:nvSpPr>
-          <p:cNvPr id="21" name="TextBox 20"/>
-          <p:cNvSpPr txBox="1"/>
-          <p:nvPr/>
-        </p:nvSpPr>
-        <p:spPr>
-          <a:xfrm>
-            <a:off x="6461607" y="4892040"/>
-            <a:ext cx="4952847" cy="1143000"/>
-          </a:xfrm>
-          <a:prstGeom prst="rect">
-            <a:avLst/>
-          </a:prstGeom>
-          <a:noFill/>
-        </p:spPr>
-        <p:txBody>
-          <a:bodyPr wrap="square" anchor="t" lIns="0" rIns="0" tIns="0" bIns="0"/>
-          <a:lstStyle/>
-          <a:p>
-            <a:pPr algn="l"/>
-            <a:r>
-              <a:rPr sz="2000" b="0" i="0">
-                <a:solidFill>
-                  <a:srgbClr val="202122"/>
-                </a:solidFill>
-                <a:latin typeface="Calibri"/>
-              </a:rPr>
-              <a:t>The sender cannot deny writing the message (MAC).</a:t>
+                <a:latin typeface="Cambria"/>
+              </a:rPr>
+              <a:t>A signed software update proves it came from the vendor (authenticity) and wasn't altered in transit (integrity).</a:t>
             </a:r>
           </a:p>
         </p:txBody>
@@ -6882,7 +11389,7 @@
                 </a:solidFill>
                 <a:latin typeface="Cambria"/>
               </a:rPr>
-              <a:t>Encryption and hashing</a:t>
+              <a:t>What cryptography provides</a:t>
             </a:r>
           </a:p>
         </p:txBody>
@@ -6962,88 +11469,11 @@
         <p:spPr>
           <a:xfrm>
             <a:off x="548640" y="1600200"/>
-            <a:ext cx="5364327" cy="640080"/>
+            <a:ext cx="5410047" cy="2148840"/>
           </a:xfrm>
           <a:prstGeom prst="roundRect">
             <a:avLst>
-              <a:gd name="adj" fmla="val 15000"/>
-            </a:avLst>
-          </a:prstGeom>
-          <a:solidFill>
-            <a:srgbClr val="03306E"/>
-          </a:solidFill>
-          <a:ln>
-            <a:noFill/>
-          </a:ln>
-          <a:effectLst/>
-        </p:spPr>
-        <p:style>
-          <a:lnRef idx="1">
-            <a:schemeClr val="accent1"/>
-          </a:lnRef>
-          <a:fillRef idx="3">
-            <a:schemeClr val="accent1"/>
-          </a:fillRef>
-          <a:effectRef idx="2">
-            <a:schemeClr val="accent1"/>
-          </a:effectRef>
-          <a:fontRef idx="minor">
-            <a:schemeClr val="lt1"/>
-          </a:fontRef>
-        </p:style>
-        <p:txBody>
-          <a:bodyPr rtlCol="0" anchor="ctr"/>
-          <a:lstStyle/>
-          <a:p/>
-        </p:txBody>
-      </p:sp>
-      <p:sp>
-        <p:nvSpPr>
-          <p:cNvPr id="7" name="TextBox 6"/>
-          <p:cNvSpPr txBox="1"/>
-          <p:nvPr/>
-        </p:nvSpPr>
-        <p:spPr>
-          <a:xfrm>
-            <a:off x="777240" y="1600200"/>
-            <a:ext cx="4907127" cy="640080"/>
-          </a:xfrm>
-          <a:prstGeom prst="rect">
-            <a:avLst/>
-          </a:prstGeom>
-          <a:noFill/>
-        </p:spPr>
-        <p:txBody>
-          <a:bodyPr wrap="square" anchor="ctr" lIns="0" rIns="0" tIns="0" bIns="0"/>
-          <a:lstStyle/>
-          <a:p>
-            <a:pPr algn="l"/>
-            <a:r>
-              <a:rPr sz="2000" b="1" i="0">
-                <a:solidFill>
-                  <a:srgbClr val="FFFFFF"/>
-                </a:solidFill>
-                <a:latin typeface="Calibri"/>
-              </a:rPr>
-              <a:t>Encryption</a:t>
-            </a:r>
-          </a:p>
-        </p:txBody>
-      </p:sp>
-      <p:sp>
-        <p:nvSpPr>
-          <p:cNvPr id="8" name="Rounded Rectangle 7"/>
-          <p:cNvSpPr/>
-          <p:nvPr/>
-        </p:nvSpPr>
-        <p:spPr>
-          <a:xfrm>
-            <a:off x="548640" y="2377440"/>
-            <a:ext cx="5364327" cy="3794760"/>
-          </a:xfrm>
-          <a:prstGeom prst="roundRect">
-            <a:avLst>
-              <a:gd name="adj" fmla="val 4000"/>
+              <a:gd name="adj" fmla="val 6000"/>
             </a:avLst>
           </a:prstGeom>
           <a:solidFill>
@@ -7076,126 +11506,20 @@
       </p:sp>
       <p:sp>
         <p:nvSpPr>
-          <p:cNvPr id="9" name="TextBox 8"/>
-          <p:cNvSpPr txBox="1"/>
-          <p:nvPr/>
-        </p:nvSpPr>
-        <p:spPr>
-          <a:xfrm>
-            <a:off x="822959" y="2606040"/>
-            <a:ext cx="4815687" cy="3337560"/>
-          </a:xfrm>
-          <a:prstGeom prst="rect">
-            <a:avLst/>
-          </a:prstGeom>
-          <a:noFill/>
-        </p:spPr>
-        <p:txBody>
-          <a:bodyPr wrap="square" lIns="0" rIns="0" tIns="0" bIns="0">
-            <a:spAutoFit/>
-          </a:bodyPr>
-          <a:lstStyle/>
-          <a:p>
-            <a:pPr marL="274320" indent="-274320">
-              <a:spcAft>
-                <a:spcPts val="990"/>
-              </a:spcAft>
-              <a:buClr>
-                <a:srgbClr val="0645AD"/>
-              </a:buClr>
-              <a:buFont typeface="Arial"/>
-              <a:buChar char="•"/>
-            </a:pPr>
-            <a:r>
-              <a:rPr sz="2200" b="0">
-                <a:solidFill>
-                  <a:srgbClr val="202122"/>
-                </a:solidFill>
-                <a:latin typeface="Calibri"/>
-              </a:rPr>
-              <a:t>Reversible with the right key</a:t>
-            </a:r>
-          </a:p>
-          <a:p>
-            <a:pPr marL="274320" indent="-274320">
-              <a:spcAft>
-                <a:spcPts val="990"/>
-              </a:spcAft>
-              <a:buClr>
-                <a:srgbClr val="0645AD"/>
-              </a:buClr>
-              <a:buFont typeface="Arial"/>
-              <a:buChar char="•"/>
-            </a:pPr>
-            <a:r>
-              <a:rPr sz="2200" b="1">
-                <a:solidFill>
-                  <a:srgbClr val="202122"/>
-                </a:solidFill>
-                <a:latin typeface="Calibri"/>
-              </a:rPr>
-              <a:t>Symmetric:</a:t>
-            </a:r>
-            <a:r>
-              <a:rPr sz="2200" b="0">
-                <a:solidFill>
-                  <a:srgbClr val="202122"/>
-                </a:solidFill>
-                <a:latin typeface="Calibri"/>
-              </a:rPr>
-              <a:t> one shared key, fast, e.g. card payments and data at rest</a:t>
-            </a:r>
-          </a:p>
-          <a:p>
-            <a:pPr marL="274320" indent="-274320">
-              <a:spcAft>
-                <a:spcPts val="990"/>
-              </a:spcAft>
-              <a:buClr>
-                <a:srgbClr val="0645AD"/>
-              </a:buClr>
-              <a:buFont typeface="Arial"/>
-              <a:buChar char="•"/>
-            </a:pPr>
-            <a:r>
-              <a:rPr sz="2200" b="1">
-                <a:solidFill>
-                  <a:srgbClr val="202122"/>
-                </a:solidFill>
-                <a:latin typeface="Calibri"/>
-              </a:rPr>
-              <a:t>Asymmetric:</a:t>
-            </a:r>
-            <a:r>
-              <a:rPr sz="2200" b="0">
-                <a:solidFill>
-                  <a:srgbClr val="202122"/>
-                </a:solidFill>
-                <a:latin typeface="Calibri"/>
-              </a:rPr>
-              <a:t> public and private key pair, e.g. email and TLS</a:t>
-            </a:r>
-          </a:p>
-        </p:txBody>
-      </p:sp>
-      <p:sp>
-        <p:nvSpPr>
-          <p:cNvPr id="10" name="Rounded Rectangle 9"/>
+          <p:cNvPr id="7" name="Oval 6"/>
           <p:cNvSpPr/>
           <p:nvPr/>
         </p:nvSpPr>
         <p:spPr>
           <a:xfrm>
-            <a:off x="6278727" y="1600200"/>
-            <a:ext cx="5364327" cy="640080"/>
-          </a:xfrm>
-          <a:prstGeom prst="roundRect">
-            <a:avLst>
-              <a:gd name="adj" fmla="val 15000"/>
-            </a:avLst>
+            <a:off x="777240" y="1828800"/>
+            <a:ext cx="457200" cy="457200"/>
+          </a:xfrm>
+          <a:prstGeom prst="ellipse">
+            <a:avLst/>
           </a:prstGeom>
           <a:solidFill>
-            <a:srgbClr val="0645AD"/>
+            <a:srgbClr val="E0463A"/>
           </a:solidFill>
           <a:ln>
             <a:noFill/>
@@ -7217,21 +11541,32 @@
           </a:fontRef>
         </p:style>
         <p:txBody>
-          <a:bodyPr rtlCol="0" anchor="ctr"/>
-          <a:lstStyle/>
-          <a:p/>
-        </p:txBody>
-      </p:sp>
-      <p:sp>
-        <p:nvSpPr>
-          <p:cNvPr id="11" name="TextBox 10"/>
-          <p:cNvSpPr txBox="1"/>
-          <p:nvPr/>
-        </p:nvSpPr>
-        <p:spPr>
-          <a:xfrm>
-            <a:off x="6507327" y="1600200"/>
-            <a:ext cx="4907127" cy="640080"/>
+          <a:bodyPr rtlCol="0" anchor="ctr" lIns="0" rIns="0" tIns="0" bIns="0"/>
+          <a:lstStyle/>
+          <a:p>
+            <a:pPr algn="ctr"/>
+            <a:r>
+              <a:rPr sz="1500" b="1">
+                <a:solidFill>
+                  <a:srgbClr val="FFFFFF"/>
+                </a:solidFill>
+                <a:latin typeface="Calibri"/>
+              </a:rPr>
+              <a:t>1</a:t>
+            </a:r>
+          </a:p>
+        </p:txBody>
+      </p:sp>
+      <p:sp>
+        <p:nvSpPr>
+          <p:cNvPr id="8" name="TextBox 7"/>
+          <p:cNvSpPr txBox="1"/>
+          <p:nvPr/>
+        </p:nvSpPr>
+        <p:spPr>
+          <a:xfrm>
+            <a:off x="1371600" y="1801368"/>
+            <a:ext cx="4404207" cy="512064"/>
           </a:xfrm>
           <a:prstGeom prst="rect">
             <a:avLst/>
@@ -7244,31 +11579,64 @@
           <a:p>
             <a:pPr algn="l"/>
             <a:r>
-              <a:rPr sz="2000" b="1" i="0">
-                <a:solidFill>
-                  <a:srgbClr val="FFFFFF"/>
-                </a:solidFill>
-                <a:latin typeface="Calibri"/>
-              </a:rPr>
-              <a:t>Hashing</a:t>
-            </a:r>
-          </a:p>
-        </p:txBody>
-      </p:sp>
-      <p:sp>
-        <p:nvSpPr>
-          <p:cNvPr id="12" name="Rounded Rectangle 11"/>
+              <a:rPr sz="1900" b="1" i="0">
+                <a:solidFill>
+                  <a:srgbClr val="03306E"/>
+                </a:solidFill>
+                <a:latin typeface="Calibri"/>
+              </a:rPr>
+              <a:t>Confidentiality</a:t>
+            </a:r>
+          </a:p>
+        </p:txBody>
+      </p:sp>
+      <p:sp>
+        <p:nvSpPr>
+          <p:cNvPr id="9" name="TextBox 8"/>
+          <p:cNvSpPr txBox="1"/>
+          <p:nvPr/>
+        </p:nvSpPr>
+        <p:spPr>
+          <a:xfrm>
+            <a:off x="777240" y="2468880"/>
+            <a:ext cx="4952847" cy="1143000"/>
+          </a:xfrm>
+          <a:prstGeom prst="rect">
+            <a:avLst/>
+          </a:prstGeom>
+          <a:noFill/>
+        </p:spPr>
+        <p:txBody>
+          <a:bodyPr wrap="square" anchor="t" lIns="0" rIns="0" tIns="0" bIns="0"/>
+          <a:lstStyle/>
+          <a:p>
+            <a:pPr algn="l"/>
+            <a:r>
+              <a:rPr sz="2000" b="0" i="0">
+                <a:solidFill>
+                  <a:srgbClr val="202122"/>
+                </a:solidFill>
+                <a:latin typeface="Calibri"/>
+              </a:rPr>
+              <a:t>Only intended recipients can decrypt the data.</a:t>
+            </a:r>
+          </a:p>
+        </p:txBody>
+      </p:sp>
+      <p:sp>
+        <p:nvSpPr>
+          <p:cNvPr id="10" name="Rounded Rectangle 9"/>
           <p:cNvSpPr/>
           <p:nvPr/>
         </p:nvSpPr>
         <p:spPr>
           <a:xfrm>
-            <a:off x="6278727" y="2377440"/>
-            <a:ext cx="5364327" cy="3794760"/>
+            <a:off x="6233007" y="1600200"/>
+            <a:ext cx="5410047" cy="2148840"/>
           </a:xfrm>
           <a:prstGeom prst="roundRect">
             <a:avLst>
-              <a:gd name="adj" fmla="val 4000"/>
+              <a:gd name="adj" fmla="val 6000"/>
             </a:avLst>
           </a:prstGeom>
           <a:solidFill>
@@ -7301,116 +11669,445 @@
       </p:sp>
       <p:sp>
         <p:nvSpPr>
+          <p:cNvPr id="11" name="Oval 10"/>
+          <p:cNvSpPr/>
+          <p:nvPr/>
+        </p:nvSpPr>
+        <p:spPr>
+          <a:xfrm>
+            <a:off x="6461607" y="1828800"/>
+            <a:ext cx="457200" cy="457200"/>
+          </a:xfrm>
+          <a:prstGeom prst="ellipse">
+            <a:avLst/>
+          </a:prstGeom>
+          <a:solidFill>
+            <a:srgbClr val="E0463A"/>
+          </a:solidFill>
+          <a:ln>
+            <a:noFill/>
+          </a:ln>
+          <a:effectLst/>
+        </p:spPr>
+        <p:style>
+          <a:lnRef idx="1">
+            <a:schemeClr val="accent1"/>
+          </a:lnRef>
+          <a:fillRef idx="3">
+            <a:schemeClr val="accent1"/>
+          </a:fillRef>
+          <a:effectRef idx="2">
+            <a:schemeClr val="accent1"/>
+          </a:effectRef>
+          <a:fontRef idx="minor">
+            <a:schemeClr val="lt1"/>
+          </a:fontRef>
+        </p:style>
+        <p:txBody>
+          <a:bodyPr rtlCol="0" anchor="ctr" lIns="0" rIns="0" tIns="0" bIns="0"/>
+          <a:lstStyle/>
+          <a:p>
+            <a:pPr algn="ctr"/>
+            <a:r>
+              <a:rPr sz="1500" b="1">
+                <a:solidFill>
+                  <a:srgbClr val="FFFFFF"/>
+                </a:solidFill>
+                <a:latin typeface="Calibri"/>
+              </a:rPr>
+              <a:t>2</a:t>
+            </a:r>
+          </a:p>
+        </p:txBody>
+      </p:sp>
+      <p:sp>
+        <p:nvSpPr>
+          <p:cNvPr id="12" name="TextBox 11"/>
+          <p:cNvSpPr txBox="1"/>
+          <p:nvPr/>
+        </p:nvSpPr>
+        <p:spPr>
+          <a:xfrm>
+            <a:off x="7055967" y="1801368"/>
+            <a:ext cx="4404207" cy="512064"/>
+          </a:xfrm>
+          <a:prstGeom prst="rect">
+            <a:avLst/>
+          </a:prstGeom>
+          <a:noFill/>
+        </p:spPr>
+        <p:txBody>
+          <a:bodyPr wrap="square" anchor="ctr" lIns="0" rIns="0" tIns="0" bIns="0"/>
+          <a:lstStyle/>
+          <a:p>
+            <a:pPr algn="l"/>
+            <a:r>
+              <a:rPr sz="1900" b="1" i="0">
+                <a:solidFill>
+                  <a:srgbClr val="03306E"/>
+                </a:solidFill>
+                <a:latin typeface="Calibri"/>
+              </a:rPr>
+              <a:t>Integrity</a:t>
+            </a:r>
+          </a:p>
+        </p:txBody>
+      </p:sp>
+      <p:sp>
+        <p:nvSpPr>
           <p:cNvPr id="13" name="TextBox 12"/>
           <p:cNvSpPr txBox="1"/>
           <p:nvPr/>
         </p:nvSpPr>
         <p:spPr>
           <a:xfrm>
-            <a:off x="6553047" y="2606040"/>
-            <a:ext cx="4815687" cy="3337560"/>
-          </a:xfrm>
-          <a:prstGeom prst="rect">
-            <a:avLst/>
-          </a:prstGeom>
-          <a:noFill/>
-        </p:spPr>
-        <p:txBody>
-          <a:bodyPr wrap="square" lIns="0" rIns="0" tIns="0" bIns="0">
-            <a:spAutoFit/>
-          </a:bodyPr>
-          <a:lstStyle/>
-          <a:p>
-            <a:pPr marL="274320" indent="-274320">
-              <a:spcAft>
-                <a:spcPts val="990"/>
-              </a:spcAft>
-              <a:buClr>
-                <a:srgbClr val="0645AD"/>
-              </a:buClr>
-              <a:buFont typeface="Arial"/>
-              <a:buChar char="•"/>
-            </a:pPr>
-            <a:r>
-              <a:rPr sz="2200" b="1">
+            <a:off x="6461607" y="2468880"/>
+            <a:ext cx="4952847" cy="1143000"/>
+          </a:xfrm>
+          <a:prstGeom prst="rect">
+            <a:avLst/>
+          </a:prstGeom>
+          <a:noFill/>
+        </p:spPr>
+        <p:txBody>
+          <a:bodyPr wrap="square" anchor="t" lIns="0" rIns="0" tIns="0" bIns="0"/>
+          <a:lstStyle/>
+          <a:p>
+            <a:pPr algn="l"/>
+            <a:r>
+              <a:rPr sz="2000" b="0" i="0">
                 <a:solidFill>
                   <a:srgbClr val="202122"/>
                 </a:solidFill>
                 <a:latin typeface="Calibri"/>
               </a:rPr>
-              <a:t>One way:</a:t>
-            </a:r>
-            <a:r>
-              <a:rPr sz="2200" b="0">
+              <a:t>Data cannot be changed in transit without detection (HMAC).</a:t>
+            </a:r>
+          </a:p>
+        </p:txBody>
+      </p:sp>
+      <p:sp>
+        <p:nvSpPr>
+          <p:cNvPr id="14" name="Rounded Rectangle 13"/>
+          <p:cNvSpPr/>
+          <p:nvPr/>
+        </p:nvSpPr>
+        <p:spPr>
+          <a:xfrm>
+            <a:off x="548640" y="4023360"/>
+            <a:ext cx="5410047" cy="2148840"/>
+          </a:xfrm>
+          <a:prstGeom prst="roundRect">
+            <a:avLst>
+              <a:gd name="adj" fmla="val 6000"/>
+            </a:avLst>
+          </a:prstGeom>
+          <a:solidFill>
+            <a:srgbClr val="EAF3FF"/>
+          </a:solidFill>
+          <a:ln>
+            <a:noFill/>
+          </a:ln>
+          <a:effectLst/>
+        </p:spPr>
+        <p:style>
+          <a:lnRef idx="1">
+            <a:schemeClr val="accent1"/>
+          </a:lnRef>
+          <a:fillRef idx="3">
+            <a:schemeClr val="accent1"/>
+          </a:fillRef>
+          <a:effectRef idx="2">
+            <a:schemeClr val="accent1"/>
+          </a:effectRef>
+          <a:fontRef idx="minor">
+            <a:schemeClr val="lt1"/>
+          </a:fontRef>
+        </p:style>
+        <p:txBody>
+          <a:bodyPr rtlCol="0" anchor="ctr"/>
+          <a:lstStyle/>
+          <a:p/>
+        </p:txBody>
+      </p:sp>
+      <p:sp>
+        <p:nvSpPr>
+          <p:cNvPr id="15" name="Oval 14"/>
+          <p:cNvSpPr/>
+          <p:nvPr/>
+        </p:nvSpPr>
+        <p:spPr>
+          <a:xfrm>
+            <a:off x="777240" y="4251960"/>
+            <a:ext cx="457200" cy="457200"/>
+          </a:xfrm>
+          <a:prstGeom prst="ellipse">
+            <a:avLst/>
+          </a:prstGeom>
+          <a:solidFill>
+            <a:srgbClr val="E0463A"/>
+          </a:solidFill>
+          <a:ln>
+            <a:noFill/>
+          </a:ln>
+          <a:effectLst/>
+        </p:spPr>
+        <p:style>
+          <a:lnRef idx="1">
+            <a:schemeClr val="accent1"/>
+          </a:lnRef>
+          <a:fillRef idx="3">
+            <a:schemeClr val="accent1"/>
+          </a:fillRef>
+          <a:effectRef idx="2">
+            <a:schemeClr val="accent1"/>
+          </a:effectRef>
+          <a:fontRef idx="minor">
+            <a:schemeClr val="lt1"/>
+          </a:fontRef>
+        </p:style>
+        <p:txBody>
+          <a:bodyPr rtlCol="0" anchor="ctr" lIns="0" rIns="0" tIns="0" bIns="0"/>
+          <a:lstStyle/>
+          <a:p>
+            <a:pPr algn="ctr"/>
+            <a:r>
+              <a:rPr sz="1500" b="1">
+                <a:solidFill>
+                  <a:srgbClr val="FFFFFF"/>
+                </a:solidFill>
+                <a:latin typeface="Calibri"/>
+              </a:rPr>
+              <a:t>3</a:t>
+            </a:r>
+          </a:p>
+        </p:txBody>
+      </p:sp>
+      <p:sp>
+        <p:nvSpPr>
+          <p:cNvPr id="16" name="TextBox 15"/>
+          <p:cNvSpPr txBox="1"/>
+          <p:nvPr/>
+        </p:nvSpPr>
+        <p:spPr>
+          <a:xfrm>
+            <a:off x="1371600" y="4224528"/>
+            <a:ext cx="4404207" cy="512064"/>
+          </a:xfrm>
+          <a:prstGeom prst="rect">
+            <a:avLst/>
+          </a:prstGeom>
+          <a:noFill/>
+        </p:spPr>
+        <p:txBody>
+          <a:bodyPr wrap="square" anchor="ctr" lIns="0" rIns="0" tIns="0" bIns="0"/>
+          <a:lstStyle/>
+          <a:p>
+            <a:pPr algn="l"/>
+            <a:r>
+              <a:rPr sz="1900" b="1" i="0">
+                <a:solidFill>
+                  <a:srgbClr val="03306E"/>
+                </a:solidFill>
+                <a:latin typeface="Calibri"/>
+              </a:rPr>
+              <a:t>Authenticity</a:t>
+            </a:r>
+          </a:p>
+        </p:txBody>
+      </p:sp>
+      <p:sp>
+        <p:nvSpPr>
+          <p:cNvPr id="17" name="TextBox 16"/>
+          <p:cNvSpPr txBox="1"/>
+          <p:nvPr/>
+        </p:nvSpPr>
+        <p:spPr>
+          <a:xfrm>
+            <a:off x="777240" y="4892040"/>
+            <a:ext cx="4952847" cy="1143000"/>
+          </a:xfrm>
+          <a:prstGeom prst="rect">
+            <a:avLst/>
+          </a:prstGeom>
+          <a:noFill/>
+        </p:spPr>
+        <p:txBody>
+          <a:bodyPr wrap="square" anchor="t" lIns="0" rIns="0" tIns="0" bIns="0"/>
+          <a:lstStyle/>
+          <a:p>
+            <a:pPr algn="l"/>
+            <a:r>
+              <a:rPr sz="2000" b="0" i="0">
                 <a:solidFill>
                   <a:srgbClr val="202122"/>
                 </a:solidFill>
                 <a:latin typeface="Calibri"/>
               </a:rPr>
-              <a:t> cannot be reversed</a:t>
-            </a:r>
-          </a:p>
-          <a:p>
-            <a:pPr marL="274320" indent="-274320">
-              <a:spcAft>
-                <a:spcPts val="990"/>
-              </a:spcAft>
-              <a:buClr>
-                <a:srgbClr val="0645AD"/>
-              </a:buClr>
-              <a:buFont typeface="Arial"/>
-              <a:buChar char="•"/>
-            </a:pPr>
-            <a:r>
-              <a:rPr sz="2200" b="0">
+              <a:t>The recipient can verify the sender with a digital signature.</a:t>
+            </a:r>
+          </a:p>
+        </p:txBody>
+      </p:sp>
+      <p:sp>
+        <p:nvSpPr>
+          <p:cNvPr id="18" name="Rounded Rectangle 17"/>
+          <p:cNvSpPr/>
+          <p:nvPr/>
+        </p:nvSpPr>
+        <p:spPr>
+          <a:xfrm>
+            <a:off x="6233007" y="4023360"/>
+            <a:ext cx="5410047" cy="2148840"/>
+          </a:xfrm>
+          <a:prstGeom prst="roundRect">
+            <a:avLst>
+              <a:gd name="adj" fmla="val 6000"/>
+            </a:avLst>
+          </a:prstGeom>
+          <a:solidFill>
+            <a:srgbClr val="EAF3FF"/>
+          </a:solidFill>
+          <a:ln>
+            <a:noFill/>
+          </a:ln>
+          <a:effectLst/>
+        </p:spPr>
+        <p:style>
+          <a:lnRef idx="1">
+            <a:schemeClr val="accent1"/>
+          </a:lnRef>
+          <a:fillRef idx="3">
+            <a:schemeClr val="accent1"/>
+          </a:fillRef>
+          <a:effectRef idx="2">
+            <a:schemeClr val="accent1"/>
+          </a:effectRef>
+          <a:fontRef idx="minor">
+            <a:schemeClr val="lt1"/>
+          </a:fontRef>
+        </p:style>
+        <p:txBody>
+          <a:bodyPr rtlCol="0" anchor="ctr"/>
+          <a:lstStyle/>
+          <a:p/>
+        </p:txBody>
+      </p:sp>
+      <p:sp>
+        <p:nvSpPr>
+          <p:cNvPr id="19" name="Oval 18"/>
+          <p:cNvSpPr/>
+          <p:nvPr/>
+        </p:nvSpPr>
+        <p:spPr>
+          <a:xfrm>
+            <a:off x="6461607" y="4251960"/>
+            <a:ext cx="457200" cy="457200"/>
+          </a:xfrm>
+          <a:prstGeom prst="ellipse">
+            <a:avLst/>
+          </a:prstGeom>
+          <a:solidFill>
+            <a:srgbClr val="E0463A"/>
+          </a:solidFill>
+          <a:ln>
+            <a:noFill/>
+          </a:ln>
+          <a:effectLst/>
+        </p:spPr>
+        <p:style>
+          <a:lnRef idx="1">
+            <a:schemeClr val="accent1"/>
+          </a:lnRef>
+          <a:fillRef idx="3">
+            <a:schemeClr val="accent1"/>
+          </a:fillRef>
+          <a:effectRef idx="2">
+            <a:schemeClr val="accent1"/>
+          </a:effectRef>
+          <a:fontRef idx="minor">
+            <a:schemeClr val="lt1"/>
+          </a:fontRef>
+        </p:style>
+        <p:txBody>
+          <a:bodyPr rtlCol="0" anchor="ctr" lIns="0" rIns="0" tIns="0" bIns="0"/>
+          <a:lstStyle/>
+          <a:p>
+            <a:pPr algn="ctr"/>
+            <a:r>
+              <a:rPr sz="1500" b="1">
+                <a:solidFill>
+                  <a:srgbClr val="FFFFFF"/>
+                </a:solidFill>
+                <a:latin typeface="Calibri"/>
+              </a:rPr>
+              <a:t>4</a:t>
+            </a:r>
+          </a:p>
+        </p:txBody>
+      </p:sp>
+      <p:sp>
+        <p:nvSpPr>
+          <p:cNvPr id="20" name="TextBox 19"/>
+          <p:cNvSpPr txBox="1"/>
+          <p:nvPr/>
+        </p:nvSpPr>
+        <p:spPr>
+          <a:xfrm>
+            <a:off x="7055967" y="4224528"/>
+            <a:ext cx="4404207" cy="512064"/>
+          </a:xfrm>
+          <a:prstGeom prst="rect">
+            <a:avLst/>
+          </a:prstGeom>
+          <a:noFill/>
+        </p:spPr>
+        <p:txBody>
+          <a:bodyPr wrap="square" anchor="ctr" lIns="0" rIns="0" tIns="0" bIns="0"/>
+          <a:lstStyle/>
+          <a:p>
+            <a:pPr algn="l"/>
+            <a:r>
+              <a:rPr sz="1900" b="1" i="0">
+                <a:solidFill>
+                  <a:srgbClr val="03306E"/>
+                </a:solidFill>
+                <a:latin typeface="Calibri"/>
+              </a:rPr>
+              <a:t>Non-repudiation</a:t>
+            </a:r>
+          </a:p>
+        </p:txBody>
+      </p:sp>
+      <p:sp>
+        <p:nvSpPr>
+          <p:cNvPr id="21" name="TextBox 20"/>
+          <p:cNvSpPr txBox="1"/>
+          <p:nvPr/>
+        </p:nvSpPr>
+        <p:spPr>
+          <a:xfrm>
+            <a:off x="6461607" y="4892040"/>
+            <a:ext cx="4952847" cy="1143000"/>
+          </a:xfrm>
+          <a:prstGeom prst="rect">
+            <a:avLst/>
+          </a:prstGeom>
+          <a:noFill/>
+        </p:spPr>
+        <p:txBody>
+          <a:bodyPr wrap="square" anchor="t" lIns="0" rIns="0" tIns="0" bIns="0"/>
+          <a:lstStyle/>
+          <a:p>
+            <a:pPr algn="l"/>
+            <a:r>
+              <a:rPr sz="2000" b="0" i="0">
                 <a:solidFill>
                   <a:srgbClr val="202122"/>
                 </a:solidFill>
                 <a:latin typeface="Calibri"/>
               </a:rPr>
-              <a:t>Fixed-length output</a:t>
-            </a:r>
-          </a:p>
-          <a:p>
-            <a:pPr marL="274320" indent="-274320">
-              <a:spcAft>
-                <a:spcPts val="990"/>
-              </a:spcAft>
-              <a:buClr>
-                <a:srgbClr val="0645AD"/>
-              </a:buClr>
-              <a:buFont typeface="Arial"/>
-              <a:buChar char="•"/>
-            </a:pPr>
-            <a:r>
-              <a:rPr sz="2200" b="0">
-                <a:solidFill>
-                  <a:srgbClr val="202122"/>
-                </a:solidFill>
-                <a:latin typeface="Calibri"/>
-              </a:rPr>
-              <a:t>Used to store passwords</a:t>
-            </a:r>
-          </a:p>
-          <a:p>
-            <a:pPr marL="274320" indent="-274320">
-              <a:spcAft>
-                <a:spcPts val="990"/>
-              </a:spcAft>
-              <a:buClr>
-                <a:srgbClr val="0645AD"/>
-              </a:buClr>
-              <a:buFont typeface="Arial"/>
-              <a:buChar char="•"/>
-            </a:pPr>
-            <a:r>
-              <a:rPr sz="2200" b="0">
-                <a:solidFill>
-                  <a:srgbClr val="202122"/>
-                </a:solidFill>
-                <a:latin typeface="Calibri"/>
-              </a:rPr>
-              <a:t>Any change to the input changes the hash</a:t>
+              <a:t>The sender cannot deny writing the message (MAC).</a:t>
             </a:r>
           </a:p>
         </p:txBody>
@@ -7502,7 +12199,7 @@
                 </a:solidFill>
                 <a:latin typeface="Cambria"/>
               </a:rPr>
-              <a:t>Encryption tools as risk mitigation</a:t>
+              <a:t>Quick check: What cryptography provides</a:t>
             </a:r>
           </a:p>
         </p:txBody>
@@ -7575,22 +12272,20 @@
       </p:sp>
       <p:sp>
         <p:nvSpPr>
-          <p:cNvPr id="6" name="Rounded Rectangle 5"/>
+          <p:cNvPr id="6" name="Oval 5"/>
           <p:cNvSpPr/>
           <p:nvPr/>
         </p:nvSpPr>
         <p:spPr>
           <a:xfrm>
-            <a:off x="548640" y="1600200"/>
-            <a:ext cx="5364327" cy="640080"/>
-          </a:xfrm>
-          <a:prstGeom prst="roundRect">
-            <a:avLst>
-              <a:gd name="adj" fmla="val 15000"/>
-            </a:avLst>
+            <a:off x="548640" y="1691640"/>
+            <a:ext cx="502920" cy="502920"/>
+          </a:xfrm>
+          <a:prstGeom prst="ellipse">
+            <a:avLst/>
           </a:prstGeom>
           <a:solidFill>
-            <a:srgbClr val="03306E"/>
+            <a:srgbClr val="E0463A"/>
           </a:solidFill>
           <a:ln>
             <a:noFill/>
@@ -7612,9 +12307,20 @@
           </a:fontRef>
         </p:style>
         <p:txBody>
-          <a:bodyPr rtlCol="0" anchor="ctr"/>
-          <a:lstStyle/>
-          <a:p/>
+          <a:bodyPr rtlCol="0" anchor="ctr" lIns="0" rIns="0" tIns="0" bIns="0"/>
+          <a:lstStyle/>
+          <a:p>
+            <a:pPr algn="ctr"/>
+            <a:r>
+              <a:rPr sz="1600" b="1">
+                <a:solidFill>
+                  <a:srgbClr val="FFFFFF"/>
+                </a:solidFill>
+                <a:latin typeface="Calibri"/>
+              </a:rPr>
+              <a:t>1</a:t>
+            </a:r>
+          </a:p>
         </p:txBody>
       </p:sp>
       <p:sp>
@@ -7625,49 +12331,47 @@
         </p:nvSpPr>
         <p:spPr>
           <a:xfrm>
-            <a:off x="777240" y="1600200"/>
-            <a:ext cx="4907127" cy="640080"/>
-          </a:xfrm>
-          <a:prstGeom prst="rect">
-            <a:avLst/>
-          </a:prstGeom>
-          <a:noFill/>
-        </p:spPr>
-        <p:txBody>
-          <a:bodyPr wrap="square" anchor="ctr" lIns="0" rIns="0" tIns="0" bIns="0"/>
+            <a:off x="1371600" y="1645920"/>
+            <a:ext cx="10271455" cy="1188720"/>
+          </a:xfrm>
+          <a:prstGeom prst="rect">
+            <a:avLst/>
+          </a:prstGeom>
+          <a:noFill/>
+        </p:spPr>
+        <p:txBody>
+          <a:bodyPr wrap="square" anchor="t" lIns="0" rIns="0" tIns="0" bIns="0"/>
           <a:lstStyle/>
           <a:p>
             <a:pPr algn="l"/>
             <a:r>
-              <a:rPr sz="2000" b="1" i="0">
-                <a:solidFill>
-                  <a:srgbClr val="FFFFFF"/>
-                </a:solidFill>
-                <a:latin typeface="Calibri"/>
-              </a:rPr>
-              <a:t>Data in transit</a:t>
-            </a:r>
-          </a:p>
-        </p:txBody>
-      </p:sp>
-      <p:sp>
-        <p:nvSpPr>
-          <p:cNvPr id="8" name="Rounded Rectangle 7"/>
+              <a:rPr sz="2400" b="0" i="0">
+                <a:solidFill>
+                  <a:srgbClr val="202122"/>
+                </a:solidFill>
+                <a:latin typeface="Calibri"/>
+              </a:rPr>
+              <a:t>What does non-repudiation mean?</a:t>
+            </a:r>
+          </a:p>
+        </p:txBody>
+      </p:sp>
+      <p:sp>
+        <p:nvSpPr>
+          <p:cNvPr id="8" name="Oval 7"/>
           <p:cNvSpPr/>
           <p:nvPr/>
         </p:nvSpPr>
         <p:spPr>
           <a:xfrm>
-            <a:off x="548640" y="2377440"/>
-            <a:ext cx="5364327" cy="3794760"/>
-          </a:xfrm>
-          <a:prstGeom prst="roundRect">
-            <a:avLst>
-              <a:gd name="adj" fmla="val 4000"/>
-            </a:avLst>
+            <a:off x="548640" y="3108960"/>
+            <a:ext cx="502920" cy="502920"/>
+          </a:xfrm>
+          <a:prstGeom prst="ellipse">
+            <a:avLst/>
           </a:prstGeom>
           <a:solidFill>
-            <a:srgbClr val="EAF3FF"/>
+            <a:srgbClr val="E0463A"/>
           </a:solidFill>
           <a:ln>
             <a:noFill/>
@@ -7689,9 +12393,20 @@
           </a:fontRef>
         </p:style>
         <p:txBody>
-          <a:bodyPr rtlCol="0" anchor="ctr"/>
-          <a:lstStyle/>
-          <a:p/>
+          <a:bodyPr rtlCol="0" anchor="ctr" lIns="0" rIns="0" tIns="0" bIns="0"/>
+          <a:lstStyle/>
+          <a:p>
+            <a:pPr algn="ctr"/>
+            <a:r>
+              <a:rPr sz="1600" b="1">
+                <a:solidFill>
+                  <a:srgbClr val="FFFFFF"/>
+                </a:solidFill>
+                <a:latin typeface="Calibri"/>
+              </a:rPr>
+              <a:t>2</a:t>
+            </a:r>
+          </a:p>
         </p:txBody>
       </p:sp>
       <p:sp>
@@ -7702,120 +12417,47 @@
         </p:nvSpPr>
         <p:spPr>
           <a:xfrm>
-            <a:off x="822959" y="2606040"/>
-            <a:ext cx="4815687" cy="3337560"/>
-          </a:xfrm>
-          <a:prstGeom prst="rect">
-            <a:avLst/>
-          </a:prstGeom>
-          <a:noFill/>
-        </p:spPr>
-        <p:txBody>
-          <a:bodyPr wrap="square" lIns="0" rIns="0" tIns="0" bIns="0">
-            <a:spAutoFit/>
-          </a:bodyPr>
-          <a:lstStyle/>
-          <a:p>
-            <a:pPr marL="274320" indent="-274320">
-              <a:spcAft>
-                <a:spcPts val="990"/>
-              </a:spcAft>
-              <a:buClr>
-                <a:srgbClr val="0645AD"/>
-              </a:buClr>
-              <a:buFont typeface="Arial"/>
-              <a:buChar char="•"/>
-            </a:pPr>
-            <a:r>
-              <a:rPr sz="2200" b="1">
+            <a:off x="1371600" y="3063240"/>
+            <a:ext cx="10271455" cy="1188720"/>
+          </a:xfrm>
+          <a:prstGeom prst="rect">
+            <a:avLst/>
+          </a:prstGeom>
+          <a:noFill/>
+        </p:spPr>
+        <p:txBody>
+          <a:bodyPr wrap="square" anchor="t" lIns="0" rIns="0" tIns="0" bIns="0"/>
+          <a:lstStyle/>
+          <a:p>
+            <a:pPr algn="l"/>
+            <a:r>
+              <a:rPr sz="2400" b="0" i="0">
                 <a:solidFill>
                   <a:srgbClr val="202122"/>
                 </a:solidFill>
                 <a:latin typeface="Calibri"/>
               </a:rPr>
-              <a:t>TLS:</a:t>
-            </a:r>
-            <a:r>
-              <a:rPr sz="2200" b="0">
-                <a:solidFill>
-                  <a:srgbClr val="202122"/>
-                </a:solidFill>
-                <a:latin typeface="Calibri"/>
-              </a:rPr>
-              <a:t> end-to-end encryption for email, web and messaging</a:t>
-            </a:r>
-          </a:p>
-          <a:p>
-            <a:pPr marL="274320" indent="-274320">
-              <a:spcAft>
-                <a:spcPts val="990"/>
-              </a:spcAft>
-              <a:buClr>
-                <a:srgbClr val="0645AD"/>
-              </a:buClr>
-              <a:buFont typeface="Arial"/>
-              <a:buChar char="•"/>
-            </a:pPr>
-            <a:r>
-              <a:rPr sz="2200" b="1">
-                <a:solidFill>
-                  <a:srgbClr val="202122"/>
-                </a:solidFill>
-                <a:latin typeface="Calibri"/>
-              </a:rPr>
-              <a:t>SSL:</a:t>
-            </a:r>
-            <a:r>
-              <a:rPr sz="2200" b="0">
-                <a:solidFill>
-                  <a:srgbClr val="202122"/>
-                </a:solidFill>
-                <a:latin typeface="Calibri"/>
-              </a:rPr>
-              <a:t> the legacy protocol TLS replaced</a:t>
-            </a:r>
-          </a:p>
-          <a:p>
-            <a:pPr marL="274320" indent="-274320">
-              <a:spcAft>
-                <a:spcPts val="990"/>
-              </a:spcAft>
-              <a:buClr>
-                <a:srgbClr val="0645AD"/>
-              </a:buClr>
-              <a:buFont typeface="Arial"/>
-              <a:buChar char="•"/>
-            </a:pPr>
-            <a:r>
-              <a:rPr sz="2200" b="0">
-                <a:solidFill>
-                  <a:srgbClr val="202122"/>
-                </a:solidFill>
-                <a:latin typeface="Calibri"/>
-              </a:rPr>
-              <a:t>Both rely on asymmetric encryption</a:t>
-            </a:r>
-          </a:p>
-        </p:txBody>
-      </p:sp>
-      <p:sp>
-        <p:nvSpPr>
-          <p:cNvPr id="10" name="Rounded Rectangle 9"/>
+              <a:t>What provides authenticity?</a:t>
+            </a:r>
+          </a:p>
+        </p:txBody>
+      </p:sp>
+      <p:sp>
+        <p:nvSpPr>
+          <p:cNvPr id="10" name="Oval 9"/>
           <p:cNvSpPr/>
           <p:nvPr/>
         </p:nvSpPr>
         <p:spPr>
           <a:xfrm>
-            <a:off x="6278727" y="1600200"/>
-            <a:ext cx="5364327" cy="640080"/>
-          </a:xfrm>
-          <a:prstGeom prst="roundRect">
-            <a:avLst>
-              <a:gd name="adj" fmla="val 15000"/>
-            </a:avLst>
+            <a:off x="548640" y="4526280"/>
+            <a:ext cx="502920" cy="502920"/>
+          </a:xfrm>
+          <a:prstGeom prst="ellipse">
+            <a:avLst/>
           </a:prstGeom>
           <a:solidFill>
-            <a:srgbClr val="0645AD"/>
+            <a:srgbClr val="E0463A"/>
           </a:solidFill>
           <a:ln>
             <a:noFill/>
@@ -7837,9 +12479,20 @@
           </a:fontRef>
         </p:style>
         <p:txBody>
-          <a:bodyPr rtlCol="0" anchor="ctr"/>
-          <a:lstStyle/>
-          <a:p/>
+          <a:bodyPr rtlCol="0" anchor="ctr" lIns="0" rIns="0" tIns="0" bIns="0"/>
+          <a:lstStyle/>
+          <a:p>
+            <a:pPr algn="ctr"/>
+            <a:r>
+              <a:rPr sz="1600" b="1">
+                <a:solidFill>
+                  <a:srgbClr val="FFFFFF"/>
+                </a:solidFill>
+                <a:latin typeface="Calibri"/>
+              </a:rPr>
+              <a:t>3</a:t>
+            </a:r>
+          </a:p>
         </p:txBody>
       </p:sp>
       <p:sp>
@@ -7850,175 +12503,60 @@
         </p:nvSpPr>
         <p:spPr>
           <a:xfrm>
-            <a:off x="6507327" y="1600200"/>
-            <a:ext cx="4907127" cy="640080"/>
-          </a:xfrm>
-          <a:prstGeom prst="rect">
-            <a:avLst/>
-          </a:prstGeom>
-          <a:noFill/>
-        </p:spPr>
-        <p:txBody>
-          <a:bodyPr wrap="square" anchor="ctr" lIns="0" rIns="0" tIns="0" bIns="0"/>
+            <a:off x="1371600" y="4480560"/>
+            <a:ext cx="10271455" cy="1188720"/>
+          </a:xfrm>
+          <a:prstGeom prst="rect">
+            <a:avLst/>
+          </a:prstGeom>
+          <a:noFill/>
+        </p:spPr>
+        <p:txBody>
+          <a:bodyPr wrap="square" anchor="t" lIns="0" rIns="0" tIns="0" bIns="0"/>
           <a:lstStyle/>
           <a:p>
             <a:pPr algn="l"/>
             <a:r>
-              <a:rPr sz="2000" b="1" i="0">
-                <a:solidFill>
-                  <a:srgbClr val="FFFFFF"/>
-                </a:solidFill>
-                <a:latin typeface="Calibri"/>
-              </a:rPr>
-              <a:t>Data at rest (DARE)</a:t>
-            </a:r>
-          </a:p>
-        </p:txBody>
-      </p:sp>
-      <p:sp>
-        <p:nvSpPr>
-          <p:cNvPr id="12" name="Rounded Rectangle 11"/>
-          <p:cNvSpPr/>
-          <p:nvPr/>
-        </p:nvSpPr>
-        <p:spPr>
-          <a:xfrm>
-            <a:off x="6278727" y="2377440"/>
-            <a:ext cx="5364327" cy="3794760"/>
-          </a:xfrm>
-          <a:prstGeom prst="roundRect">
-            <a:avLst>
-              <a:gd name="adj" fmla="val 4000"/>
-            </a:avLst>
-          </a:prstGeom>
-          <a:solidFill>
-            <a:srgbClr val="EAF3FF"/>
-          </a:solidFill>
-          <a:ln>
-            <a:noFill/>
-          </a:ln>
-          <a:effectLst/>
-        </p:spPr>
-        <p:style>
-          <a:lnRef idx="1">
-            <a:schemeClr val="accent1"/>
-          </a:lnRef>
-          <a:fillRef idx="3">
-            <a:schemeClr val="accent1"/>
-          </a:fillRef>
-          <a:effectRef idx="2">
-            <a:schemeClr val="accent1"/>
-          </a:effectRef>
-          <a:fontRef idx="minor">
-            <a:schemeClr val="lt1"/>
-          </a:fontRef>
-        </p:style>
-        <p:txBody>
-          <a:bodyPr rtlCol="0" anchor="ctr"/>
-          <a:lstStyle/>
-          <a:p/>
-        </p:txBody>
-      </p:sp>
-      <p:sp>
-        <p:nvSpPr>
-          <p:cNvPr id="13" name="TextBox 12"/>
-          <p:cNvSpPr txBox="1"/>
-          <p:nvPr/>
-        </p:nvSpPr>
-        <p:spPr>
-          <a:xfrm>
-            <a:off x="6553047" y="2606040"/>
-            <a:ext cx="4815687" cy="3337560"/>
-          </a:xfrm>
-          <a:prstGeom prst="rect">
-            <a:avLst/>
-          </a:prstGeom>
-          <a:noFill/>
-        </p:spPr>
-        <p:txBody>
-          <a:bodyPr wrap="square" lIns="0" rIns="0" tIns="0" bIns="0">
-            <a:spAutoFit/>
-          </a:bodyPr>
-          <a:lstStyle/>
-          <a:p>
-            <a:pPr marL="274320" indent="-274320">
-              <a:spcAft>
-                <a:spcPts val="990"/>
-              </a:spcAft>
-              <a:buClr>
-                <a:srgbClr val="0645AD"/>
-              </a:buClr>
-              <a:buFont typeface="Arial"/>
-              <a:buChar char="•"/>
-            </a:pPr>
-            <a:r>
-              <a:rPr sz="2200" b="1">
+              <a:rPr sz="2400" b="0" i="0">
                 <a:solidFill>
                   <a:srgbClr val="202122"/>
                 </a:solidFill>
                 <a:latin typeface="Calibri"/>
               </a:rPr>
-              <a:t>Full Disk Encryption (FDE):</a:t>
-            </a:r>
-            <a:r>
-              <a:rPr sz="2200" b="0">
-                <a:solidFill>
-                  <a:srgbClr val="202122"/>
-                </a:solidFill>
-                <a:latin typeface="Calibri"/>
-              </a:rPr>
-              <a:t> protects a stolen laptop</a:t>
-            </a:r>
-          </a:p>
-          <a:p>
-            <a:pPr marL="274320" indent="-274320">
-              <a:spcAft>
-                <a:spcPts val="990"/>
-              </a:spcAft>
-              <a:buClr>
-                <a:srgbClr val="0645AD"/>
-              </a:buClr>
-              <a:buFont typeface="Arial"/>
-              <a:buChar char="•"/>
-            </a:pPr>
-            <a:r>
-              <a:rPr sz="2200" b="1">
-                <a:solidFill>
-                  <a:srgbClr val="202122"/>
-                </a:solidFill>
-                <a:latin typeface="Calibri"/>
-              </a:rPr>
-              <a:t>File-Based Encryption (FBE):</a:t>
-            </a:r>
-            <a:r>
-              <a:rPr sz="2200" b="0">
-                <a:solidFill>
-                  <a:srgbClr val="202122"/>
-                </a:solidFill>
-                <a:latin typeface="Calibri"/>
-              </a:rPr>
-              <a:t> protects individual files and folders</a:t>
-            </a:r>
-          </a:p>
-          <a:p>
-            <a:pPr marL="274320" indent="-274320">
-              <a:spcAft>
-                <a:spcPts val="990"/>
-              </a:spcAft>
-              <a:buClr>
-                <a:srgbClr val="0645AD"/>
-              </a:buClr>
-              <a:buFont typeface="Arial"/>
-              <a:buChar char="•"/>
-            </a:pPr>
-            <a:r>
-              <a:rPr sz="2200" b="0">
-                <a:solidFill>
-                  <a:srgbClr val="202122"/>
-                </a:solidFill>
-                <a:latin typeface="Calibri"/>
-              </a:rPr>
-              <a:t>Both rely on symmetric encryption</a:t>
+              <a:t>What detects changes to data in transit?</a:t>
+            </a:r>
+          </a:p>
+        </p:txBody>
+      </p:sp>
+      <p:sp>
+        <p:nvSpPr>
+          <p:cNvPr id="12" name="TextBox 11"/>
+          <p:cNvSpPr txBox="1"/>
+          <p:nvPr/>
+        </p:nvSpPr>
+        <p:spPr>
+          <a:xfrm>
+            <a:off x="548640" y="5852160"/>
+            <a:ext cx="11094415" cy="365760"/>
+          </a:xfrm>
+          <a:prstGeom prst="rect">
+            <a:avLst/>
+          </a:prstGeom>
+          <a:noFill/>
+        </p:spPr>
+        <p:txBody>
+          <a:bodyPr wrap="square" anchor="t" lIns="0" rIns="0" tIns="0" bIns="0"/>
+          <a:lstStyle/>
+          <a:p>
+            <a:pPr algn="l"/>
+            <a:r>
+              <a:rPr sz="1300" b="0" i="1">
+                <a:solidFill>
+                  <a:srgbClr val="54595D"/>
+                </a:solidFill>
+                <a:latin typeface="Calibri"/>
+              </a:rPr>
+              <a:t>Answer on mini whiteboards or in your book. Answers are in the speaker notes.</a:t>
             </a:r>
           </a:p>
         </p:txBody>
@@ -8110,7 +12648,7 @@
                 </a:solidFill>
                 <a:latin typeface="Cambria"/>
               </a:rPr>
-              <a:t>Digital certificates</a:t>
+              <a:t>Encryption and hashing</a:t>
             </a:r>
           </a:p>
         </p:txBody>
@@ -8183,22 +12721,127 @@
       </p:sp>
       <p:sp>
         <p:nvSpPr>
-          <p:cNvPr id="6" name="Rounded Rectangle 5"/>
+          <p:cNvPr id="6" name="TextBox 5"/>
+          <p:cNvSpPr txBox="1"/>
+          <p:nvPr/>
+        </p:nvSpPr>
+        <p:spPr>
+          <a:xfrm>
+            <a:off x="548640" y="1554480"/>
+            <a:ext cx="6720840" cy="4617720"/>
+          </a:xfrm>
+          <a:prstGeom prst="rect">
+            <a:avLst/>
+          </a:prstGeom>
+          <a:noFill/>
+        </p:spPr>
+        <p:txBody>
+          <a:bodyPr wrap="square" lIns="0" rIns="0" tIns="0" bIns="0">
+            <a:spAutoFit/>
+          </a:bodyPr>
+          <a:lstStyle/>
+          <a:p>
+            <a:pPr>
+              <a:spcAft>
+                <a:spcPts val="1140"/>
+              </a:spcAft>
+            </a:pPr>
+            <a:r>
+              <a:rPr sz="1900" b="1">
+                <a:solidFill>
+                  <a:srgbClr val="202122"/>
+                </a:solidFill>
+                <a:latin typeface="Calibri"/>
+              </a:rPr>
+              <a:t>Encryption is reversible:</a:t>
+            </a:r>
+            <a:r>
+              <a:rPr sz="1900" b="0">
+                <a:solidFill>
+                  <a:srgbClr val="202122"/>
+                </a:solidFill>
+                <a:latin typeface="Calibri"/>
+              </a:rPr>
+              <a:t> with the right key, you get the original data back.</a:t>
+            </a:r>
+          </a:p>
+          <a:p>
+            <a:pPr>
+              <a:spcAft>
+                <a:spcPts val="1140"/>
+              </a:spcAft>
+            </a:pPr>
+            <a:r>
+              <a:rPr sz="1900" b="0">
+                <a:solidFill>
+                  <a:srgbClr val="202122"/>
+                </a:solidFill>
+                <a:latin typeface="Calibri"/>
+              </a:rPr>
+              <a:t>Symmetric encryption uses one shared key. It's fast, so it's used for large data and data at rest, but the key must be shared securely.</a:t>
+            </a:r>
+          </a:p>
+          <a:p>
+            <a:pPr>
+              <a:spcAft>
+                <a:spcPts val="1140"/>
+              </a:spcAft>
+            </a:pPr>
+            <a:r>
+              <a:rPr sz="1900" b="0">
+                <a:solidFill>
+                  <a:srgbClr val="202122"/>
+                </a:solidFill>
+                <a:latin typeface="Calibri"/>
+              </a:rPr>
+              <a:t>Asymmetric encryption uses a key pair: anyone can encrypt with the public key, but only the private key decrypts. It solves key sharing and underpins TLS and email encryption.</a:t>
+            </a:r>
+          </a:p>
+          <a:p>
+            <a:pPr>
+              <a:spcAft>
+                <a:spcPts val="1140"/>
+              </a:spcAft>
+            </a:pPr>
+            <a:r>
+              <a:rPr sz="1900" b="1">
+                <a:solidFill>
+                  <a:srgbClr val="202122"/>
+                </a:solidFill>
+                <a:latin typeface="Calibri"/>
+              </a:rPr>
+              <a:t>Hashing is one way:</a:t>
+            </a:r>
+            <a:r>
+              <a:rPr sz="1900" b="0">
+                <a:solidFill>
+                  <a:srgbClr val="202122"/>
+                </a:solidFill>
+                <a:latin typeface="Calibri"/>
+              </a:rPr>
+              <a:t> it turns data into a fixed-length fingerprint that can't be reversed. Any change to the input changes the hash completely, which makes it ideal for storing passwords and checking integrity.</a:t>
+            </a:r>
+          </a:p>
+        </p:txBody>
+      </p:sp>
+      <p:sp>
+        <p:nvSpPr>
+          <p:cNvPr id="7" name="Rounded Rectangle 6"/>
           <p:cNvSpPr/>
           <p:nvPr/>
         </p:nvSpPr>
         <p:spPr>
           <a:xfrm>
-            <a:off x="548640" y="1600200"/>
-            <a:ext cx="3515258" cy="4572000"/>
+            <a:off x="7772400" y="1554480"/>
+            <a:ext cx="3867912" cy="4526280"/>
           </a:xfrm>
           <a:prstGeom prst="roundRect">
             <a:avLst>
-              <a:gd name="adj" fmla="val 6000"/>
+              <a:gd name="adj" fmla="val 8000"/>
             </a:avLst>
           </a:prstGeom>
           <a:solidFill>
-            <a:srgbClr val="EAF3FF"/>
+            <a:srgbClr val="03306E"/>
           </a:solidFill>
           <a:ln>
             <a:noFill/>
@@ -8227,14 +12870,14 @@
       </p:sp>
       <p:sp>
         <p:nvSpPr>
-          <p:cNvPr id="7" name="Oval 6"/>
+          <p:cNvPr id="8" name="Oval 7"/>
           <p:cNvSpPr/>
           <p:nvPr/>
         </p:nvSpPr>
         <p:spPr>
           <a:xfrm>
-            <a:off x="777240" y="1828800"/>
-            <a:ext cx="457200" cy="457200"/>
+            <a:off x="8046720" y="1828800"/>
+            <a:ext cx="548640" cy="548640"/>
           </a:xfrm>
           <a:prstGeom prst="ellipse">
             <a:avLst/>
@@ -8267,60 +12910,60 @@
           <a:p>
             <a:pPr algn="ctr"/>
             <a:r>
-              <a:rPr sz="1500" b="1">
+              <a:rPr sz="1300" b="1">
                 <a:solidFill>
                   <a:srgbClr val="FFFFFF"/>
                 </a:solidFill>
                 <a:latin typeface="Calibri"/>
               </a:rPr>
-              <a:t>1</a:t>
-            </a:r>
-          </a:p>
-        </p:txBody>
-      </p:sp>
-      <p:sp>
-        <p:nvSpPr>
-          <p:cNvPr id="8" name="TextBox 7"/>
-          <p:cNvSpPr txBox="1"/>
-          <p:nvPr/>
-        </p:nvSpPr>
-        <p:spPr>
-          <a:xfrm>
-            <a:off x="1371600" y="1801368"/>
-            <a:ext cx="2509418" cy="512064"/>
-          </a:xfrm>
-          <a:prstGeom prst="rect">
-            <a:avLst/>
-          </a:prstGeom>
-          <a:noFill/>
-        </p:spPr>
-        <p:txBody>
-          <a:bodyPr wrap="square" anchor="ctr" lIns="0" rIns="0" tIns="0" bIns="0"/>
+              <a:t>e.g.</a:t>
+            </a:r>
+          </a:p>
+        </p:txBody>
+      </p:sp>
+      <p:sp>
+        <p:nvSpPr>
+          <p:cNvPr id="9" name="TextBox 8"/>
+          <p:cNvSpPr txBox="1"/>
+          <p:nvPr/>
+        </p:nvSpPr>
+        <p:spPr>
+          <a:xfrm>
+            <a:off x="8046720" y="2560320"/>
+            <a:ext cx="3291840" cy="365760"/>
+          </a:xfrm>
+          <a:prstGeom prst="rect">
+            <a:avLst/>
+          </a:prstGeom>
+          <a:noFill/>
+        </p:spPr>
+        <p:txBody>
+          <a:bodyPr wrap="square" anchor="t" lIns="0" rIns="0" tIns="0" bIns="0"/>
           <a:lstStyle/>
           <a:p>
             <a:pPr algn="l"/>
             <a:r>
-              <a:rPr sz="1900" b="1" i="0">
-                <a:solidFill>
-                  <a:srgbClr val="03306E"/>
-                </a:solidFill>
-                <a:latin typeface="Calibri"/>
-              </a:rPr>
-              <a:t>Purpose</a:t>
-            </a:r>
-          </a:p>
-        </p:txBody>
-      </p:sp>
-      <p:sp>
-        <p:nvSpPr>
-          <p:cNvPr id="9" name="TextBox 8"/>
-          <p:cNvSpPr txBox="1"/>
-          <p:nvPr/>
-        </p:nvSpPr>
-        <p:spPr>
-          <a:xfrm>
-            <a:off x="777240" y="2468880"/>
-            <a:ext cx="3058058" cy="3566160"/>
+              <a:rPr sz="1300" b="1" i="0">
+                <a:solidFill>
+                  <a:srgbClr val="A9C8F0"/>
+                </a:solidFill>
+                <a:latin typeface="Calibri"/>
+              </a:rPr>
+              <a:t>EXAMPLE</a:t>
+            </a:r>
+          </a:p>
+        </p:txBody>
+      </p:sp>
+      <p:sp>
+        <p:nvSpPr>
+          <p:cNvPr id="10" name="TextBox 9"/>
+          <p:cNvSpPr txBox="1"/>
+          <p:nvPr/>
+        </p:nvSpPr>
+        <p:spPr>
+          <a:xfrm>
+            <a:off x="8046720" y="2971800"/>
+            <a:ext cx="3291840" cy="2971800"/>
           </a:xfrm>
           <a:prstGeom prst="rect">
             <a:avLst/>
@@ -8333,339 +12976,13 @@
           <a:p>
             <a:pPr algn="l"/>
             <a:r>
-              <a:rPr sz="2000" b="0" i="0">
-                <a:solidFill>
-                  <a:srgbClr val="202122"/>
-                </a:solidFill>
-                <a:latin typeface="Calibri"/>
-              </a:rPr>
-              <a:t>Prove the authenticity of a device, server or user using asymmetric cryptography.</a:t>
-            </a:r>
-          </a:p>
-        </p:txBody>
-      </p:sp>
-      <p:sp>
-        <p:nvSpPr>
-          <p:cNvPr id="10" name="Rounded Rectangle 9"/>
-          <p:cNvSpPr/>
-          <p:nvPr/>
-        </p:nvSpPr>
-        <p:spPr>
-          <a:xfrm>
-            <a:off x="4338218" y="1600200"/>
-            <a:ext cx="3515258" cy="4572000"/>
-          </a:xfrm>
-          <a:prstGeom prst="roundRect">
-            <a:avLst>
-              <a:gd name="adj" fmla="val 6000"/>
-            </a:avLst>
-          </a:prstGeom>
-          <a:solidFill>
-            <a:srgbClr val="EAF3FF"/>
-          </a:solidFill>
-          <a:ln>
-            <a:noFill/>
-          </a:ln>
-          <a:effectLst/>
-        </p:spPr>
-        <p:style>
-          <a:lnRef idx="1">
-            <a:schemeClr val="accent1"/>
-          </a:lnRef>
-          <a:fillRef idx="3">
-            <a:schemeClr val="accent1"/>
-          </a:fillRef>
-          <a:effectRef idx="2">
-            <a:schemeClr val="accent1"/>
-          </a:effectRef>
-          <a:fontRef idx="minor">
-            <a:schemeClr val="lt1"/>
-          </a:fontRef>
-        </p:style>
-        <p:txBody>
-          <a:bodyPr rtlCol="0" anchor="ctr"/>
-          <a:lstStyle/>
-          <a:p/>
-        </p:txBody>
-      </p:sp>
-      <p:sp>
-        <p:nvSpPr>
-          <p:cNvPr id="11" name="Oval 10"/>
-          <p:cNvSpPr/>
-          <p:nvPr/>
-        </p:nvSpPr>
-        <p:spPr>
-          <a:xfrm>
-            <a:off x="4566818" y="1828800"/>
-            <a:ext cx="457200" cy="457200"/>
-          </a:xfrm>
-          <a:prstGeom prst="ellipse">
-            <a:avLst/>
-          </a:prstGeom>
-          <a:solidFill>
-            <a:srgbClr val="E0463A"/>
-          </a:solidFill>
-          <a:ln>
-            <a:noFill/>
-          </a:ln>
-          <a:effectLst/>
-        </p:spPr>
-        <p:style>
-          <a:lnRef idx="1">
-            <a:schemeClr val="accent1"/>
-          </a:lnRef>
-          <a:fillRef idx="3">
-            <a:schemeClr val="accent1"/>
-          </a:fillRef>
-          <a:effectRef idx="2">
-            <a:schemeClr val="accent1"/>
-          </a:effectRef>
-          <a:fontRef idx="minor">
-            <a:schemeClr val="lt1"/>
-          </a:fontRef>
-        </p:style>
-        <p:txBody>
-          <a:bodyPr rtlCol="0" anchor="ctr" lIns="0" rIns="0" tIns="0" bIns="0"/>
-          <a:lstStyle/>
-          <a:p>
-            <a:pPr algn="ctr"/>
-            <a:r>
-              <a:rPr sz="1500" b="1">
+              <a:rPr sz="1900" b="0" i="0">
                 <a:solidFill>
                   <a:srgbClr val="FFFFFF"/>
                 </a:solidFill>
-                <a:latin typeface="Calibri"/>
-              </a:rPr>
-              <a:t>2</a:t>
-            </a:r>
-          </a:p>
-        </p:txBody>
-      </p:sp>
-      <p:sp>
-        <p:nvSpPr>
-          <p:cNvPr id="12" name="TextBox 11"/>
-          <p:cNvSpPr txBox="1"/>
-          <p:nvPr/>
-        </p:nvSpPr>
-        <p:spPr>
-          <a:xfrm>
-            <a:off x="5161178" y="1801368"/>
-            <a:ext cx="2509418" cy="512064"/>
-          </a:xfrm>
-          <a:prstGeom prst="rect">
-            <a:avLst/>
-          </a:prstGeom>
-          <a:noFill/>
-        </p:spPr>
-        <p:txBody>
-          <a:bodyPr wrap="square" anchor="ctr" lIns="0" rIns="0" tIns="0" bIns="0"/>
-          <a:lstStyle/>
-          <a:p>
-            <a:pPr algn="l"/>
-            <a:r>
-              <a:rPr sz="1900" b="1" i="0">
-                <a:solidFill>
-                  <a:srgbClr val="03306E"/>
-                </a:solidFill>
-                <a:latin typeface="Calibri"/>
-              </a:rPr>
-              <a:t>Features</a:t>
-            </a:r>
-          </a:p>
-        </p:txBody>
-      </p:sp>
-      <p:sp>
-        <p:nvSpPr>
-          <p:cNvPr id="13" name="TextBox 12"/>
-          <p:cNvSpPr txBox="1"/>
-          <p:nvPr/>
-        </p:nvSpPr>
-        <p:spPr>
-          <a:xfrm>
-            <a:off x="4566818" y="2468880"/>
-            <a:ext cx="3058058" cy="3566160"/>
-          </a:xfrm>
-          <a:prstGeom prst="rect">
-            <a:avLst/>
-          </a:prstGeom>
-          <a:noFill/>
-        </p:spPr>
-        <p:txBody>
-          <a:bodyPr wrap="square" anchor="t" lIns="0" rIns="0" tIns="0" bIns="0"/>
-          <a:lstStyle/>
-          <a:p>
-            <a:pPr algn="l"/>
-            <a:r>
-              <a:rPr sz="2000" b="0" i="0">
-                <a:solidFill>
-                  <a:srgbClr val="202122"/>
-                </a:solidFill>
-                <a:latin typeface="Calibri"/>
-              </a:rPr>
-              <a:t>Holder name, serial number, expiry date, holder's public key, issuer's signature.</a:t>
-            </a:r>
-          </a:p>
-        </p:txBody>
-      </p:sp>
-      <p:sp>
-        <p:nvSpPr>
-          <p:cNvPr id="14" name="Rounded Rectangle 13"/>
-          <p:cNvSpPr/>
-          <p:nvPr/>
-        </p:nvSpPr>
-        <p:spPr>
-          <a:xfrm>
-            <a:off x="8127796" y="1600200"/>
-            <a:ext cx="3515258" cy="4572000"/>
-          </a:xfrm>
-          <a:prstGeom prst="roundRect">
-            <a:avLst>
-              <a:gd name="adj" fmla="val 6000"/>
-            </a:avLst>
-          </a:prstGeom>
-          <a:solidFill>
-            <a:srgbClr val="EAF3FF"/>
-          </a:solidFill>
-          <a:ln>
-            <a:noFill/>
-          </a:ln>
-          <a:effectLst/>
-        </p:spPr>
-        <p:style>
-          <a:lnRef idx="1">
-            <a:schemeClr val="accent1"/>
-          </a:lnRef>
-          <a:fillRef idx="3">
-            <a:schemeClr val="accent1"/>
-          </a:fillRef>
-          <a:effectRef idx="2">
-            <a:schemeClr val="accent1"/>
-          </a:effectRef>
-          <a:fontRef idx="minor">
-            <a:schemeClr val="lt1"/>
-          </a:fontRef>
-        </p:style>
-        <p:txBody>
-          <a:bodyPr rtlCol="0" anchor="ctr"/>
-          <a:lstStyle/>
-          <a:p/>
-        </p:txBody>
-      </p:sp>
-      <p:sp>
-        <p:nvSpPr>
-          <p:cNvPr id="15" name="Oval 14"/>
-          <p:cNvSpPr/>
-          <p:nvPr/>
-        </p:nvSpPr>
-        <p:spPr>
-          <a:xfrm>
-            <a:off x="8356396" y="1828800"/>
-            <a:ext cx="457200" cy="457200"/>
-          </a:xfrm>
-          <a:prstGeom prst="ellipse">
-            <a:avLst/>
-          </a:prstGeom>
-          <a:solidFill>
-            <a:srgbClr val="E0463A"/>
-          </a:solidFill>
-          <a:ln>
-            <a:noFill/>
-          </a:ln>
-          <a:effectLst/>
-        </p:spPr>
-        <p:style>
-          <a:lnRef idx="1">
-            <a:schemeClr val="accent1"/>
-          </a:lnRef>
-          <a:fillRef idx="3">
-            <a:schemeClr val="accent1"/>
-          </a:fillRef>
-          <a:effectRef idx="2">
-            <a:schemeClr val="accent1"/>
-          </a:effectRef>
-          <a:fontRef idx="minor">
-            <a:schemeClr val="lt1"/>
-          </a:fontRef>
-        </p:style>
-        <p:txBody>
-          <a:bodyPr rtlCol="0" anchor="ctr" lIns="0" rIns="0" tIns="0" bIns="0"/>
-          <a:lstStyle/>
-          <a:p>
-            <a:pPr algn="ctr"/>
-            <a:r>
-              <a:rPr sz="1500" b="1">
-                <a:solidFill>
-                  <a:srgbClr val="FFFFFF"/>
-                </a:solidFill>
-                <a:latin typeface="Calibri"/>
-              </a:rPr>
-              <a:t>3</a:t>
-            </a:r>
-          </a:p>
-        </p:txBody>
-      </p:sp>
-      <p:sp>
-        <p:nvSpPr>
-          <p:cNvPr id="16" name="TextBox 15"/>
-          <p:cNvSpPr txBox="1"/>
-          <p:nvPr/>
-        </p:nvSpPr>
-        <p:spPr>
-          <a:xfrm>
-            <a:off x="8950756" y="1801368"/>
-            <a:ext cx="2509418" cy="512064"/>
-          </a:xfrm>
-          <a:prstGeom prst="rect">
-            <a:avLst/>
-          </a:prstGeom>
-          <a:noFill/>
-        </p:spPr>
-        <p:txBody>
-          <a:bodyPr wrap="square" anchor="ctr" lIns="0" rIns="0" tIns="0" bIns="0"/>
-          <a:lstStyle/>
-          <a:p>
-            <a:pPr algn="l"/>
-            <a:r>
-              <a:rPr sz="1900" b="1" i="0">
-                <a:solidFill>
-                  <a:srgbClr val="03306E"/>
-                </a:solidFill>
-                <a:latin typeface="Calibri"/>
-              </a:rPr>
-              <a:t>Types</a:t>
-            </a:r>
-          </a:p>
-        </p:txBody>
-      </p:sp>
-      <p:sp>
-        <p:nvSpPr>
-          <p:cNvPr id="17" name="TextBox 16"/>
-          <p:cNvSpPr txBox="1"/>
-          <p:nvPr/>
-        </p:nvSpPr>
-        <p:spPr>
-          <a:xfrm>
-            <a:off x="8356396" y="2468880"/>
-            <a:ext cx="3058058" cy="3566160"/>
-          </a:xfrm>
-          <a:prstGeom prst="rect">
-            <a:avLst/>
-          </a:prstGeom>
-          <a:noFill/>
-        </p:spPr>
-        <p:txBody>
-          <a:bodyPr wrap="square" anchor="t" lIns="0" rIns="0" tIns="0" bIns="0"/>
-          <a:lstStyle/>
-          <a:p>
-            <a:pPr algn="l"/>
-            <a:r>
-              <a:rPr sz="2000" b="0" i="0">
-                <a:solidFill>
-                  <a:srgbClr val="202122"/>
-                </a:solidFill>
-                <a:latin typeface="Calibri"/>
-              </a:rPr>
-              <a:t>Server-side (client checks server), client-side (client proves itself), code signing (OS checks software).</a:t>
+                <a:latin typeface="Cambria"/>
+              </a:rPr>
+              <a:t>When you log in, your password is hashed and compared with the stored hash. The site never needs to store your actual password.</a:t>
             </a:r>
           </a:p>
         </p:txBody>
@@ -8757,7 +13074,7 @@
                 </a:solidFill>
                 <a:latin typeface="Cambria"/>
               </a:rPr>
-              <a:t>Generating a certificate</a:t>
+              <a:t>Encryption and hashing</a:t>
             </a:r>
           </a:p>
         </p:txBody>
@@ -8830,20 +13147,22 @@
       </p:sp>
       <p:sp>
         <p:nvSpPr>
-          <p:cNvPr id="6" name="Rectangle 5"/>
+          <p:cNvPr id="6" name="Rounded Rectangle 5"/>
           <p:cNvSpPr/>
           <p:nvPr/>
         </p:nvSpPr>
         <p:spPr>
           <a:xfrm>
-            <a:off x="1884006" y="2382012"/>
-            <a:ext cx="8423681" cy="36576"/>
-          </a:xfrm>
-          <a:prstGeom prst="rect">
-            <a:avLst/>
+            <a:off x="548640" y="1600200"/>
+            <a:ext cx="5364327" cy="640080"/>
+          </a:xfrm>
+          <a:prstGeom prst="roundRect">
+            <a:avLst>
+              <a:gd name="adj" fmla="val 15000"/>
+            </a:avLst>
           </a:prstGeom>
           <a:solidFill>
-            <a:srgbClr val="A9C8F0"/>
+            <a:srgbClr val="03306E"/>
           </a:solidFill>
           <a:ln>
             <a:noFill/>
@@ -8872,104 +13191,51 @@
       </p:sp>
       <p:sp>
         <p:nvSpPr>
-          <p:cNvPr id="7" name="Oval 6"/>
+          <p:cNvPr id="7" name="TextBox 6"/>
+          <p:cNvSpPr txBox="1"/>
+          <p:nvPr/>
+        </p:nvSpPr>
+        <p:spPr>
+          <a:xfrm>
+            <a:off x="777240" y="1600200"/>
+            <a:ext cx="4907127" cy="640080"/>
+          </a:xfrm>
+          <a:prstGeom prst="rect">
+            <a:avLst/>
+          </a:prstGeom>
+          <a:noFill/>
+        </p:spPr>
+        <p:txBody>
+          <a:bodyPr wrap="square" anchor="ctr" lIns="0" rIns="0" tIns="0" bIns="0"/>
+          <a:lstStyle/>
+          <a:p>
+            <a:pPr algn="l"/>
+            <a:r>
+              <a:rPr sz="2000" b="1" i="0">
+                <a:solidFill>
+                  <a:srgbClr val="FFFFFF"/>
+                </a:solidFill>
+                <a:latin typeface="Calibri"/>
+              </a:rPr>
+              <a:t>Encryption</a:t>
+            </a:r>
+          </a:p>
+        </p:txBody>
+      </p:sp>
+      <p:sp>
+        <p:nvSpPr>
+          <p:cNvPr id="8" name="Rounded Rectangle 7"/>
           <p:cNvSpPr/>
           <p:nvPr/>
         </p:nvSpPr>
         <p:spPr>
           <a:xfrm>
-            <a:off x="1563966" y="2080260"/>
-            <a:ext cx="640080" cy="640080"/>
-          </a:xfrm>
-          <a:prstGeom prst="ellipse">
-            <a:avLst/>
-          </a:prstGeom>
-          <a:solidFill>
-            <a:srgbClr val="E0463A"/>
-          </a:solidFill>
-          <a:ln>
-            <a:noFill/>
-          </a:ln>
-          <a:effectLst/>
-        </p:spPr>
-        <p:style>
-          <a:lnRef idx="1">
-            <a:schemeClr val="accent1"/>
-          </a:lnRef>
-          <a:fillRef idx="3">
-            <a:schemeClr val="accent1"/>
-          </a:fillRef>
-          <a:effectRef idx="2">
-            <a:schemeClr val="accent1"/>
-          </a:effectRef>
-          <a:fontRef idx="minor">
-            <a:schemeClr val="lt1"/>
-          </a:fontRef>
-        </p:style>
-        <p:txBody>
-          <a:bodyPr rtlCol="0" anchor="ctr" lIns="0" rIns="0" tIns="0" bIns="0"/>
-          <a:lstStyle/>
-          <a:p>
-            <a:pPr algn="ctr"/>
-            <a:r>
-              <a:rPr sz="2000" b="1">
-                <a:solidFill>
-                  <a:srgbClr val="FFFFFF"/>
-                </a:solidFill>
-                <a:latin typeface="Calibri"/>
-              </a:rPr>
-              <a:t>1</a:t>
-            </a:r>
-          </a:p>
-        </p:txBody>
-      </p:sp>
-      <p:sp>
-        <p:nvSpPr>
-          <p:cNvPr id="8" name="TextBox 7"/>
-          <p:cNvSpPr txBox="1"/>
-          <p:nvPr/>
-        </p:nvSpPr>
-        <p:spPr>
-          <a:xfrm>
-            <a:off x="548640" y="2857500"/>
-            <a:ext cx="2670733" cy="731520"/>
-          </a:xfrm>
-          <a:prstGeom prst="rect">
-            <a:avLst/>
-          </a:prstGeom>
-          <a:noFill/>
-        </p:spPr>
-        <p:txBody>
-          <a:bodyPr wrap="square" anchor="t" lIns="0" rIns="0" tIns="0" bIns="0"/>
-          <a:lstStyle/>
-          <a:p>
-            <a:pPr algn="ctr"/>
-            <a:r>
-              <a:rPr sz="1700" b="1" i="0">
-                <a:solidFill>
-                  <a:srgbClr val="03306E"/>
-                </a:solidFill>
-                <a:latin typeface="Calibri"/>
-              </a:rPr>
-              <a:t>Key pair</a:t>
-            </a:r>
-          </a:p>
-        </p:txBody>
-      </p:sp>
-      <p:sp>
-        <p:nvSpPr>
-          <p:cNvPr id="9" name="Rounded Rectangle 8"/>
-          <p:cNvSpPr/>
-          <p:nvPr/>
-        </p:nvSpPr>
-        <p:spPr>
-          <a:xfrm>
-            <a:off x="548640" y="3634740"/>
-            <a:ext cx="2670733" cy="1234439"/>
+            <a:off x="548640" y="2377440"/>
+            <a:ext cx="5364327" cy="3794760"/>
           </a:xfrm>
           <a:prstGeom prst="roundRect">
             <a:avLst>
-              <a:gd name="adj" fmla="val 6000"/>
+              <a:gd name="adj" fmla="val 4000"/>
             </a:avLst>
           </a:prstGeom>
           <a:solidFill>
@@ -9002,53 +13268,126 @@
       </p:sp>
       <p:sp>
         <p:nvSpPr>
-          <p:cNvPr id="10" name="TextBox 9"/>
-          <p:cNvSpPr txBox="1"/>
-          <p:nvPr/>
-        </p:nvSpPr>
-        <p:spPr>
-          <a:xfrm>
-            <a:off x="685800" y="3771900"/>
-            <a:ext cx="2396413" cy="960119"/>
-          </a:xfrm>
-          <a:prstGeom prst="rect">
-            <a:avLst/>
-          </a:prstGeom>
-          <a:noFill/>
-        </p:spPr>
-        <p:txBody>
-          <a:bodyPr wrap="square" anchor="t" lIns="0" rIns="0" tIns="0" bIns="0"/>
-          <a:lstStyle/>
-          <a:p>
-            <a:pPr algn="l"/>
-            <a:r>
-              <a:rPr sz="1800" b="0" i="0">
+          <p:cNvPr id="9" name="TextBox 8"/>
+          <p:cNvSpPr txBox="1"/>
+          <p:nvPr/>
+        </p:nvSpPr>
+        <p:spPr>
+          <a:xfrm>
+            <a:off x="822959" y="2606040"/>
+            <a:ext cx="4815687" cy="3337560"/>
+          </a:xfrm>
+          <a:prstGeom prst="rect">
+            <a:avLst/>
+          </a:prstGeom>
+          <a:noFill/>
+        </p:spPr>
+        <p:txBody>
+          <a:bodyPr wrap="square" lIns="0" rIns="0" tIns="0" bIns="0">
+            <a:spAutoFit/>
+          </a:bodyPr>
+          <a:lstStyle/>
+          <a:p>
+            <a:pPr marL="274320" indent="-274320">
+              <a:spcAft>
+                <a:spcPts val="990"/>
+              </a:spcAft>
+              <a:buClr>
+                <a:srgbClr val="0645AD"/>
+              </a:buClr>
+              <a:buFont typeface="Arial"/>
+              <a:buChar char="•"/>
+            </a:pPr>
+            <a:r>
+              <a:rPr sz="2200" b="0">
                 <a:solidFill>
                   <a:srgbClr val="202122"/>
                 </a:solidFill>
                 <a:latin typeface="Calibri"/>
               </a:rPr>
-              <a:t>Generate a public and private key.</a:t>
-            </a:r>
-          </a:p>
-        </p:txBody>
-      </p:sp>
-      <p:sp>
-        <p:nvSpPr>
-          <p:cNvPr id="11" name="Oval 10"/>
+              <a:t>Reversible with the right key</a:t>
+            </a:r>
+          </a:p>
+          <a:p>
+            <a:pPr marL="274320" indent="-274320">
+              <a:spcAft>
+                <a:spcPts val="990"/>
+              </a:spcAft>
+              <a:buClr>
+                <a:srgbClr val="0645AD"/>
+              </a:buClr>
+              <a:buFont typeface="Arial"/>
+              <a:buChar char="•"/>
+            </a:pPr>
+            <a:r>
+              <a:rPr sz="2200" b="1">
+                <a:solidFill>
+                  <a:srgbClr val="202122"/>
+                </a:solidFill>
+                <a:latin typeface="Calibri"/>
+              </a:rPr>
+              <a:t>Symmetric:</a:t>
+            </a:r>
+            <a:r>
+              <a:rPr sz="2200" b="0">
+                <a:solidFill>
+                  <a:srgbClr val="202122"/>
+                </a:solidFill>
+                <a:latin typeface="Calibri"/>
+              </a:rPr>
+              <a:t> one shared key, fast, e.g. card payments and data at rest</a:t>
+            </a:r>
+          </a:p>
+          <a:p>
+            <a:pPr marL="274320" indent="-274320">
+              <a:spcAft>
+                <a:spcPts val="990"/>
+              </a:spcAft>
+              <a:buClr>
+                <a:srgbClr val="0645AD"/>
+              </a:buClr>
+              <a:buFont typeface="Arial"/>
+              <a:buChar char="•"/>
+            </a:pPr>
+            <a:r>
+              <a:rPr sz="2200" b="1">
+                <a:solidFill>
+                  <a:srgbClr val="202122"/>
+                </a:solidFill>
+                <a:latin typeface="Calibri"/>
+              </a:rPr>
+              <a:t>Asymmetric:</a:t>
+            </a:r>
+            <a:r>
+              <a:rPr sz="2200" b="0">
+                <a:solidFill>
+                  <a:srgbClr val="202122"/>
+                </a:solidFill>
+                <a:latin typeface="Calibri"/>
+              </a:rPr>
+              <a:t> public and private key pair, e.g. email and TLS</a:t>
+            </a:r>
+          </a:p>
+        </p:txBody>
+      </p:sp>
+      <p:sp>
+        <p:nvSpPr>
+          <p:cNvPr id="10" name="Rounded Rectangle 9"/>
           <p:cNvSpPr/>
           <p:nvPr/>
         </p:nvSpPr>
         <p:spPr>
           <a:xfrm>
-            <a:off x="4371860" y="2080260"/>
-            <a:ext cx="640080" cy="640080"/>
-          </a:xfrm>
-          <a:prstGeom prst="ellipse">
-            <a:avLst/>
+            <a:off x="6278727" y="1600200"/>
+            <a:ext cx="5364327" cy="640080"/>
+          </a:xfrm>
+          <a:prstGeom prst="roundRect">
+            <a:avLst>
+              <a:gd name="adj" fmla="val 15000"/>
+            </a:avLst>
           </a:prstGeom>
           <a:solidFill>
-            <a:srgbClr val="E0463A"/>
+            <a:srgbClr val="0645AD"/>
           </a:solidFill>
           <a:ln>
             <a:noFill/>
@@ -9070,69 +13409,58 @@
           </a:fontRef>
         </p:style>
         <p:txBody>
-          <a:bodyPr rtlCol="0" anchor="ctr" lIns="0" rIns="0" tIns="0" bIns="0"/>
-          <a:lstStyle/>
-          <a:p>
-            <a:pPr algn="ctr"/>
-            <a:r>
-              <a:rPr sz="2000" b="1">
+          <a:bodyPr rtlCol="0" anchor="ctr"/>
+          <a:lstStyle/>
+          <a:p/>
+        </p:txBody>
+      </p:sp>
+      <p:sp>
+        <p:nvSpPr>
+          <p:cNvPr id="11" name="TextBox 10"/>
+          <p:cNvSpPr txBox="1"/>
+          <p:nvPr/>
+        </p:nvSpPr>
+        <p:spPr>
+          <a:xfrm>
+            <a:off x="6507327" y="1600200"/>
+            <a:ext cx="4907127" cy="640080"/>
+          </a:xfrm>
+          <a:prstGeom prst="rect">
+            <a:avLst/>
+          </a:prstGeom>
+          <a:noFill/>
+        </p:spPr>
+        <p:txBody>
+          <a:bodyPr wrap="square" anchor="ctr" lIns="0" rIns="0" tIns="0" bIns="0"/>
+          <a:lstStyle/>
+          <a:p>
+            <a:pPr algn="l"/>
+            <a:r>
+              <a:rPr sz="2000" b="1" i="0">
                 <a:solidFill>
                   <a:srgbClr val="FFFFFF"/>
                 </a:solidFill>
                 <a:latin typeface="Calibri"/>
               </a:rPr>
-              <a:t>2</a:t>
-            </a:r>
-          </a:p>
-        </p:txBody>
-      </p:sp>
-      <p:sp>
-        <p:nvSpPr>
-          <p:cNvPr id="12" name="TextBox 11"/>
-          <p:cNvSpPr txBox="1"/>
-          <p:nvPr/>
-        </p:nvSpPr>
-        <p:spPr>
-          <a:xfrm>
-            <a:off x="3356533" y="2857500"/>
-            <a:ext cx="2670733" cy="731520"/>
-          </a:xfrm>
-          <a:prstGeom prst="rect">
-            <a:avLst/>
-          </a:prstGeom>
-          <a:noFill/>
-        </p:spPr>
-        <p:txBody>
-          <a:bodyPr wrap="square" anchor="t" lIns="0" rIns="0" tIns="0" bIns="0"/>
-          <a:lstStyle/>
-          <a:p>
-            <a:pPr algn="ctr"/>
-            <a:r>
-              <a:rPr sz="1700" b="1" i="0">
-                <a:solidFill>
-                  <a:srgbClr val="03306E"/>
-                </a:solidFill>
-                <a:latin typeface="Calibri"/>
-              </a:rPr>
-              <a:t>CSR</a:t>
-            </a:r>
-          </a:p>
-        </p:txBody>
-      </p:sp>
-      <p:sp>
-        <p:nvSpPr>
-          <p:cNvPr id="13" name="Rounded Rectangle 12"/>
+              <a:t>Hashing</a:t>
+            </a:r>
+          </a:p>
+        </p:txBody>
+      </p:sp>
+      <p:sp>
+        <p:nvSpPr>
+          <p:cNvPr id="12" name="Rounded Rectangle 11"/>
           <p:cNvSpPr/>
           <p:nvPr/>
         </p:nvSpPr>
         <p:spPr>
           <a:xfrm>
-            <a:off x="3356533" y="3634740"/>
-            <a:ext cx="2670733" cy="1234439"/>
+            <a:off x="6278727" y="2377440"/>
+            <a:ext cx="5364327" cy="3794760"/>
           </a:xfrm>
           <a:prstGeom prst="roundRect">
             <a:avLst>
-              <a:gd name="adj" fmla="val 6000"/>
+              <a:gd name="adj" fmla="val 4000"/>
             </a:avLst>
           </a:prstGeom>
           <a:solidFill>
@@ -9165,392 +13493,116 @@
       </p:sp>
       <p:sp>
         <p:nvSpPr>
-          <p:cNvPr id="14" name="TextBox 13"/>
-          <p:cNvSpPr txBox="1"/>
-          <p:nvPr/>
-        </p:nvSpPr>
-        <p:spPr>
-          <a:xfrm>
-            <a:off x="3493693" y="3771900"/>
-            <a:ext cx="2396413" cy="960119"/>
-          </a:xfrm>
-          <a:prstGeom prst="rect">
-            <a:avLst/>
-          </a:prstGeom>
-          <a:noFill/>
-        </p:spPr>
-        <p:txBody>
-          <a:bodyPr wrap="square" anchor="t" lIns="0" rIns="0" tIns="0" bIns="0"/>
-          <a:lstStyle/>
-          <a:p>
-            <a:pPr algn="l"/>
-            <a:r>
-              <a:rPr sz="1800" b="0" i="0">
+          <p:cNvPr id="13" name="TextBox 12"/>
+          <p:cNvSpPr txBox="1"/>
+          <p:nvPr/>
+        </p:nvSpPr>
+        <p:spPr>
+          <a:xfrm>
+            <a:off x="6553047" y="2606040"/>
+            <a:ext cx="4815687" cy="3337560"/>
+          </a:xfrm>
+          <a:prstGeom prst="rect">
+            <a:avLst/>
+          </a:prstGeom>
+          <a:noFill/>
+        </p:spPr>
+        <p:txBody>
+          <a:bodyPr wrap="square" lIns="0" rIns="0" tIns="0" bIns="0">
+            <a:spAutoFit/>
+          </a:bodyPr>
+          <a:lstStyle/>
+          <a:p>
+            <a:pPr marL="274320" indent="-274320">
+              <a:spcAft>
+                <a:spcPts val="990"/>
+              </a:spcAft>
+              <a:buClr>
+                <a:srgbClr val="0645AD"/>
+              </a:buClr>
+              <a:buFont typeface="Arial"/>
+              <a:buChar char="•"/>
+            </a:pPr>
+            <a:r>
+              <a:rPr sz="2200" b="1">
                 <a:solidFill>
                   <a:srgbClr val="202122"/>
                 </a:solidFill>
                 <a:latin typeface="Calibri"/>
               </a:rPr>
-              <a:t>Create a Certificate Signing Request.</a:t>
-            </a:r>
-          </a:p>
-        </p:txBody>
-      </p:sp>
-      <p:sp>
-        <p:nvSpPr>
-          <p:cNvPr id="15" name="Oval 14"/>
-          <p:cNvSpPr/>
-          <p:nvPr/>
-        </p:nvSpPr>
-        <p:spPr>
-          <a:xfrm>
-            <a:off x="7179754" y="2080260"/>
-            <a:ext cx="640080" cy="640080"/>
-          </a:xfrm>
-          <a:prstGeom prst="ellipse">
-            <a:avLst/>
-          </a:prstGeom>
-          <a:solidFill>
-            <a:srgbClr val="E0463A"/>
-          </a:solidFill>
-          <a:ln>
-            <a:noFill/>
-          </a:ln>
-          <a:effectLst/>
-        </p:spPr>
-        <p:style>
-          <a:lnRef idx="1">
-            <a:schemeClr val="accent1"/>
-          </a:lnRef>
-          <a:fillRef idx="3">
-            <a:schemeClr val="accent1"/>
-          </a:fillRef>
-          <a:effectRef idx="2">
-            <a:schemeClr val="accent1"/>
-          </a:effectRef>
-          <a:fontRef idx="minor">
-            <a:schemeClr val="lt1"/>
-          </a:fontRef>
-        </p:style>
-        <p:txBody>
-          <a:bodyPr rtlCol="0" anchor="ctr" lIns="0" rIns="0" tIns="0" bIns="0"/>
-          <a:lstStyle/>
-          <a:p>
-            <a:pPr algn="ctr"/>
-            <a:r>
-              <a:rPr sz="2000" b="1">
-                <a:solidFill>
-                  <a:srgbClr val="FFFFFF"/>
-                </a:solidFill>
-                <a:latin typeface="Calibri"/>
-              </a:rPr>
-              <a:t>3</a:t>
-            </a:r>
-          </a:p>
-        </p:txBody>
-      </p:sp>
-      <p:sp>
-        <p:nvSpPr>
-          <p:cNvPr id="16" name="TextBox 15"/>
-          <p:cNvSpPr txBox="1"/>
-          <p:nvPr/>
-        </p:nvSpPr>
-        <p:spPr>
-          <a:xfrm>
-            <a:off x="6164427" y="2857500"/>
-            <a:ext cx="2670733" cy="731520"/>
-          </a:xfrm>
-          <a:prstGeom prst="rect">
-            <a:avLst/>
-          </a:prstGeom>
-          <a:noFill/>
-        </p:spPr>
-        <p:txBody>
-          <a:bodyPr wrap="square" anchor="t" lIns="0" rIns="0" tIns="0" bIns="0"/>
-          <a:lstStyle/>
-          <a:p>
-            <a:pPr algn="ctr"/>
-            <a:r>
-              <a:rPr sz="1700" b="1" i="0">
-                <a:solidFill>
-                  <a:srgbClr val="03306E"/>
-                </a:solidFill>
-                <a:latin typeface="Calibri"/>
-              </a:rPr>
-              <a:t>CA signs</a:t>
-            </a:r>
-          </a:p>
-        </p:txBody>
-      </p:sp>
-      <p:sp>
-        <p:nvSpPr>
-          <p:cNvPr id="17" name="Rounded Rectangle 16"/>
-          <p:cNvSpPr/>
-          <p:nvPr/>
-        </p:nvSpPr>
-        <p:spPr>
-          <a:xfrm>
-            <a:off x="6164427" y="3634740"/>
-            <a:ext cx="2670733" cy="1234439"/>
-          </a:xfrm>
-          <a:prstGeom prst="roundRect">
-            <a:avLst>
-              <a:gd name="adj" fmla="val 6000"/>
-            </a:avLst>
-          </a:prstGeom>
-          <a:solidFill>
-            <a:srgbClr val="EAF3FF"/>
-          </a:solidFill>
-          <a:ln>
-            <a:noFill/>
-          </a:ln>
-          <a:effectLst/>
-        </p:spPr>
-        <p:style>
-          <a:lnRef idx="1">
-            <a:schemeClr val="accent1"/>
-          </a:lnRef>
-          <a:fillRef idx="3">
-            <a:schemeClr val="accent1"/>
-          </a:fillRef>
-          <a:effectRef idx="2">
-            <a:schemeClr val="accent1"/>
-          </a:effectRef>
-          <a:fontRef idx="minor">
-            <a:schemeClr val="lt1"/>
-          </a:fontRef>
-        </p:style>
-        <p:txBody>
-          <a:bodyPr rtlCol="0" anchor="ctr"/>
-          <a:lstStyle/>
-          <a:p/>
-        </p:txBody>
-      </p:sp>
-      <p:sp>
-        <p:nvSpPr>
-          <p:cNvPr id="18" name="TextBox 17"/>
-          <p:cNvSpPr txBox="1"/>
-          <p:nvPr/>
-        </p:nvSpPr>
-        <p:spPr>
-          <a:xfrm>
-            <a:off x="6301587" y="3771900"/>
-            <a:ext cx="2396413" cy="960119"/>
-          </a:xfrm>
-          <a:prstGeom prst="rect">
-            <a:avLst/>
-          </a:prstGeom>
-          <a:noFill/>
-        </p:spPr>
-        <p:txBody>
-          <a:bodyPr wrap="square" anchor="t" lIns="0" rIns="0" tIns="0" bIns="0"/>
-          <a:lstStyle/>
-          <a:p>
-            <a:pPr algn="l"/>
-            <a:r>
-              <a:rPr sz="1800" b="0" i="0">
+              <a:t>One way:</a:t>
+            </a:r>
+            <a:r>
+              <a:rPr sz="2200" b="0">
                 <a:solidFill>
                   <a:srgbClr val="202122"/>
                 </a:solidFill>
                 <a:latin typeface="Calibri"/>
               </a:rPr>
-              <a:t>A trusted Certificate Authority issues and signs it.</a:t>
-            </a:r>
-          </a:p>
-        </p:txBody>
-      </p:sp>
-      <p:sp>
-        <p:nvSpPr>
-          <p:cNvPr id="19" name="Oval 18"/>
-          <p:cNvSpPr/>
-          <p:nvPr/>
-        </p:nvSpPr>
-        <p:spPr>
-          <a:xfrm>
-            <a:off x="9987648" y="2080260"/>
-            <a:ext cx="640080" cy="640080"/>
-          </a:xfrm>
-          <a:prstGeom prst="ellipse">
-            <a:avLst/>
-          </a:prstGeom>
-          <a:solidFill>
-            <a:srgbClr val="E0463A"/>
-          </a:solidFill>
-          <a:ln>
-            <a:noFill/>
-          </a:ln>
-          <a:effectLst/>
-        </p:spPr>
-        <p:style>
-          <a:lnRef idx="1">
-            <a:schemeClr val="accent1"/>
-          </a:lnRef>
-          <a:fillRef idx="3">
-            <a:schemeClr val="accent1"/>
-          </a:fillRef>
-          <a:effectRef idx="2">
-            <a:schemeClr val="accent1"/>
-          </a:effectRef>
-          <a:fontRef idx="minor">
-            <a:schemeClr val="lt1"/>
-          </a:fontRef>
-        </p:style>
-        <p:txBody>
-          <a:bodyPr rtlCol="0" anchor="ctr" lIns="0" rIns="0" tIns="0" bIns="0"/>
-          <a:lstStyle/>
-          <a:p>
-            <a:pPr algn="ctr"/>
-            <a:r>
-              <a:rPr sz="2000" b="1">
-                <a:solidFill>
-                  <a:srgbClr val="FFFFFF"/>
-                </a:solidFill>
-                <a:latin typeface="Calibri"/>
-              </a:rPr>
-              <a:t>4</a:t>
-            </a:r>
-          </a:p>
-        </p:txBody>
-      </p:sp>
-      <p:sp>
-        <p:nvSpPr>
-          <p:cNvPr id="20" name="TextBox 19"/>
-          <p:cNvSpPr txBox="1"/>
-          <p:nvPr/>
-        </p:nvSpPr>
-        <p:spPr>
-          <a:xfrm>
-            <a:off x="8972321" y="2857500"/>
-            <a:ext cx="2670733" cy="731520"/>
-          </a:xfrm>
-          <a:prstGeom prst="rect">
-            <a:avLst/>
-          </a:prstGeom>
-          <a:noFill/>
-        </p:spPr>
-        <p:txBody>
-          <a:bodyPr wrap="square" anchor="t" lIns="0" rIns="0" tIns="0" bIns="0"/>
-          <a:lstStyle/>
-          <a:p>
-            <a:pPr algn="ctr"/>
-            <a:r>
-              <a:rPr sz="1700" b="1" i="0">
-                <a:solidFill>
-                  <a:srgbClr val="03306E"/>
-                </a:solidFill>
-                <a:latin typeface="Calibri"/>
-              </a:rPr>
-              <a:t>Install</a:t>
-            </a:r>
-          </a:p>
-        </p:txBody>
-      </p:sp>
-      <p:sp>
-        <p:nvSpPr>
-          <p:cNvPr id="21" name="Rounded Rectangle 20"/>
-          <p:cNvSpPr/>
-          <p:nvPr/>
-        </p:nvSpPr>
-        <p:spPr>
-          <a:xfrm>
-            <a:off x="8972321" y="3634740"/>
-            <a:ext cx="2670733" cy="1234439"/>
-          </a:xfrm>
-          <a:prstGeom prst="roundRect">
-            <a:avLst>
-              <a:gd name="adj" fmla="val 6000"/>
-            </a:avLst>
-          </a:prstGeom>
-          <a:solidFill>
-            <a:srgbClr val="EAF3FF"/>
-          </a:solidFill>
-          <a:ln>
-            <a:noFill/>
-          </a:ln>
-          <a:effectLst/>
-        </p:spPr>
-        <p:style>
-          <a:lnRef idx="1">
-            <a:schemeClr val="accent1"/>
-          </a:lnRef>
-          <a:fillRef idx="3">
-            <a:schemeClr val="accent1"/>
-          </a:fillRef>
-          <a:effectRef idx="2">
-            <a:schemeClr val="accent1"/>
-          </a:effectRef>
-          <a:fontRef idx="minor">
-            <a:schemeClr val="lt1"/>
-          </a:fontRef>
-        </p:style>
-        <p:txBody>
-          <a:bodyPr rtlCol="0" anchor="ctr"/>
-          <a:lstStyle/>
-          <a:p/>
-        </p:txBody>
-      </p:sp>
-      <p:sp>
-        <p:nvSpPr>
-          <p:cNvPr id="22" name="TextBox 21"/>
-          <p:cNvSpPr txBox="1"/>
-          <p:nvPr/>
-        </p:nvSpPr>
-        <p:spPr>
-          <a:xfrm>
-            <a:off x="9109481" y="3771900"/>
-            <a:ext cx="2396413" cy="960119"/>
-          </a:xfrm>
-          <a:prstGeom prst="rect">
-            <a:avLst/>
-          </a:prstGeom>
-          <a:noFill/>
-        </p:spPr>
-        <p:txBody>
-          <a:bodyPr wrap="square" anchor="t" lIns="0" rIns="0" tIns="0" bIns="0"/>
-          <a:lstStyle/>
-          <a:p>
-            <a:pPr algn="l"/>
-            <a:r>
-              <a:rPr sz="1800" b="0" i="0">
+              <a:t> cannot be reversed</a:t>
+            </a:r>
+          </a:p>
+          <a:p>
+            <a:pPr marL="274320" indent="-274320">
+              <a:spcAft>
+                <a:spcPts val="990"/>
+              </a:spcAft>
+              <a:buClr>
+                <a:srgbClr val="0645AD"/>
+              </a:buClr>
+              <a:buFont typeface="Arial"/>
+              <a:buChar char="•"/>
+            </a:pPr>
+            <a:r>
+              <a:rPr sz="2200" b="0">
                 <a:solidFill>
                   <a:srgbClr val="202122"/>
                 </a:solidFill>
                 <a:latin typeface="Calibri"/>
               </a:rPr>
-              <a:t>Install it on the server or client.</a:t>
-            </a:r>
-          </a:p>
-        </p:txBody>
-      </p:sp>
-      <p:sp>
-        <p:nvSpPr>
-          <p:cNvPr id="23" name="TextBox 22"/>
-          <p:cNvSpPr txBox="1"/>
-          <p:nvPr/>
-        </p:nvSpPr>
-        <p:spPr>
-          <a:xfrm>
-            <a:off x="548640" y="5143500"/>
-            <a:ext cx="11094415" cy="548640"/>
-          </a:xfrm>
-          <a:prstGeom prst="rect">
-            <a:avLst/>
-          </a:prstGeom>
-          <a:noFill/>
-        </p:spPr>
-        <p:txBody>
-          <a:bodyPr wrap="square" anchor="t" lIns="0" rIns="0" tIns="0" bIns="0"/>
-          <a:lstStyle/>
-          <a:p>
-            <a:pPr algn="l"/>
-            <a:r>
-              <a:rPr sz="1600" b="0" i="1">
-                <a:solidFill>
-                  <a:srgbClr val="54595D"/>
-                </a:solidFill>
-                <a:latin typeface="Calibri"/>
-              </a:rPr>
-              <a:t>Management tools monitor expiry, revoke early, auto-renew, audit deployment and diagnose certificate problems.</a:t>
+              <a:t>Fixed-length output</a:t>
+            </a:r>
+          </a:p>
+          <a:p>
+            <a:pPr marL="274320" indent="-274320">
+              <a:spcAft>
+                <a:spcPts val="990"/>
+              </a:spcAft>
+              <a:buClr>
+                <a:srgbClr val="0645AD"/>
+              </a:buClr>
+              <a:buFont typeface="Arial"/>
+              <a:buChar char="•"/>
+            </a:pPr>
+            <a:r>
+              <a:rPr sz="2200" b="0">
+                <a:solidFill>
+                  <a:srgbClr val="202122"/>
+                </a:solidFill>
+                <a:latin typeface="Calibri"/>
+              </a:rPr>
+              <a:t>Used to store passwords</a:t>
+            </a:r>
+          </a:p>
+          <a:p>
+            <a:pPr marL="274320" indent="-274320">
+              <a:spcAft>
+                <a:spcPts val="990"/>
+              </a:spcAft>
+              <a:buClr>
+                <a:srgbClr val="0645AD"/>
+              </a:buClr>
+              <a:buFont typeface="Arial"/>
+              <a:buChar char="•"/>
+            </a:pPr>
+            <a:r>
+              <a:rPr sz="2200" b="0">
+                <a:solidFill>
+                  <a:srgbClr val="202122"/>
+                </a:solidFill>
+                <a:latin typeface="Calibri"/>
+              </a:rPr>
+              <a:t>Any change to the input changes the hash</a:t>
             </a:r>
           </a:p>
         </p:txBody>
@@ -9642,7 +13694,7 @@
                 </a:solidFill>
                 <a:latin typeface="Cambria"/>
               </a:rPr>
-              <a:t>Check your understanding</a:t>
+              <a:t>Quick check: Encryption and hashing</a:t>
             </a:r>
           </a:p>
         </p:txBody>
@@ -9721,8 +13773,8 @@
         </p:nvSpPr>
         <p:spPr>
           <a:xfrm>
-            <a:off x="548640" y="1618488"/>
-            <a:ext cx="411480" cy="411480"/>
+            <a:off x="548640" y="1691640"/>
+            <a:ext cx="502920" cy="502920"/>
           </a:xfrm>
           <a:prstGeom prst="ellipse">
             <a:avLst/>
@@ -9755,7 +13807,7 @@
           <a:p>
             <a:pPr algn="ctr"/>
             <a:r>
-              <a:rPr sz="1400" b="1">
+              <a:rPr sz="1600" b="1">
                 <a:solidFill>
                   <a:srgbClr val="FFFFFF"/>
                 </a:solidFill>
@@ -9774,8 +13826,8 @@
         </p:nvSpPr>
         <p:spPr>
           <a:xfrm>
-            <a:off x="1234440" y="1600200"/>
-            <a:ext cx="10408615" cy="791870"/>
+            <a:off x="1371600" y="1645920"/>
+            <a:ext cx="10271455" cy="1188720"/>
           </a:xfrm>
           <a:prstGeom prst="rect">
             <a:avLst/>
@@ -9788,13 +13840,13 @@
           <a:p>
             <a:pPr algn="l"/>
             <a:r>
-              <a:rPr sz="2200" b="0" i="0">
+              <a:rPr sz="2400" b="0" i="0">
                 <a:solidFill>
                   <a:srgbClr val="202122"/>
                 </a:solidFill>
                 <a:latin typeface="Calibri"/>
               </a:rPr>
-              <a:t>Why is hashing used for passwords rather than encryption?</a:t>
+              <a:t>Can a hash be reversed?</a:t>
             </a:r>
           </a:p>
         </p:txBody>
@@ -9807,8 +13859,8 @@
         </p:nvSpPr>
         <p:spPr>
           <a:xfrm>
-            <a:off x="548640" y="2574950"/>
-            <a:ext cx="411480" cy="411480"/>
+            <a:off x="548640" y="3108960"/>
+            <a:ext cx="502920" cy="502920"/>
           </a:xfrm>
           <a:prstGeom prst="ellipse">
             <a:avLst/>
@@ -9841,7 +13893,7 @@
           <a:p>
             <a:pPr algn="ctr"/>
             <a:r>
-              <a:rPr sz="1400" b="1">
+              <a:rPr sz="1600" b="1">
                 <a:solidFill>
                   <a:srgbClr val="FFFFFF"/>
                 </a:solidFill>
@@ -9860,8 +13912,8 @@
         </p:nvSpPr>
         <p:spPr>
           <a:xfrm>
-            <a:off x="1234440" y="2556662"/>
-            <a:ext cx="10408615" cy="791870"/>
+            <a:off x="1371600" y="3063240"/>
+            <a:ext cx="10271455" cy="1188720"/>
           </a:xfrm>
           <a:prstGeom prst="rect">
             <a:avLst/>
@@ -9874,13 +13926,13 @@
           <a:p>
             <a:pPr algn="l"/>
             <a:r>
-              <a:rPr sz="2200" b="0" i="0">
+              <a:rPr sz="2400" b="0" i="0">
                 <a:solidFill>
                   <a:srgbClr val="202122"/>
                 </a:solidFill>
                 <a:latin typeface="Calibri"/>
               </a:rPr>
-              <a:t>Which type of encryption protects a stolen laptop's drive?</a:t>
+              <a:t>Which encryption type uses one shared key?</a:t>
             </a:r>
           </a:p>
         </p:txBody>
@@ -9893,8 +13945,8 @@
         </p:nvSpPr>
         <p:spPr>
           <a:xfrm>
-            <a:off x="548640" y="3531412"/>
-            <a:ext cx="411480" cy="411480"/>
+            <a:off x="548640" y="4526280"/>
+            <a:ext cx="502920" cy="502920"/>
           </a:xfrm>
           <a:prstGeom prst="ellipse">
             <a:avLst/>
@@ -9927,7 +13979,7 @@
           <a:p>
             <a:pPr algn="ctr"/>
             <a:r>
-              <a:rPr sz="1400" b="1">
+              <a:rPr sz="1600" b="1">
                 <a:solidFill>
                   <a:srgbClr val="FFFFFF"/>
                 </a:solidFill>
@@ -9946,8 +13998,8 @@
         </p:nvSpPr>
         <p:spPr>
           <a:xfrm>
-            <a:off x="1234440" y="3513124"/>
-            <a:ext cx="10408615" cy="791870"/>
+            <a:off x="1371600" y="4480560"/>
+            <a:ext cx="10271455" cy="1188720"/>
           </a:xfrm>
           <a:prstGeom prst="rect">
             <a:avLst/>
@@ -9960,80 +14012,27 @@
           <a:p>
             <a:pPr algn="l"/>
             <a:r>
-              <a:rPr sz="2200" b="0" i="0">
+              <a:rPr sz="2400" b="0" i="0">
                 <a:solidFill>
                   <a:srgbClr val="202122"/>
                 </a:solidFill>
                 <a:latin typeface="Calibri"/>
               </a:rPr>
-              <a:t>What does a digital signature prove?</a:t>
-            </a:r>
-          </a:p>
-        </p:txBody>
-      </p:sp>
-      <p:sp>
-        <p:nvSpPr>
-          <p:cNvPr id="12" name="Oval 11"/>
-          <p:cNvSpPr/>
-          <p:nvPr/>
-        </p:nvSpPr>
-        <p:spPr>
-          <a:xfrm>
-            <a:off x="548640" y="4487875"/>
-            <a:ext cx="411480" cy="411480"/>
-          </a:xfrm>
-          <a:prstGeom prst="ellipse">
-            <a:avLst/>
-          </a:prstGeom>
-          <a:solidFill>
-            <a:srgbClr val="E0463A"/>
-          </a:solidFill>
-          <a:ln>
-            <a:noFill/>
-          </a:ln>
-          <a:effectLst/>
-        </p:spPr>
-        <p:style>
-          <a:lnRef idx="1">
-            <a:schemeClr val="accent1"/>
-          </a:lnRef>
-          <a:fillRef idx="3">
-            <a:schemeClr val="accent1"/>
-          </a:fillRef>
-          <a:effectRef idx="2">
-            <a:schemeClr val="accent1"/>
-          </a:effectRef>
-          <a:fontRef idx="minor">
-            <a:schemeClr val="lt1"/>
-          </a:fontRef>
-        </p:style>
-        <p:txBody>
-          <a:bodyPr rtlCol="0" anchor="ctr" lIns="0" rIns="0" tIns="0" bIns="0"/>
-          <a:lstStyle/>
-          <a:p>
-            <a:pPr algn="ctr"/>
-            <a:r>
-              <a:rPr sz="1400" b="1">
-                <a:solidFill>
-                  <a:srgbClr val="FFFFFF"/>
-                </a:solidFill>
-                <a:latin typeface="Calibri"/>
-              </a:rPr>
-              <a:t>4</a:t>
-            </a:r>
-          </a:p>
-        </p:txBody>
-      </p:sp>
-      <p:sp>
-        <p:nvSpPr>
-          <p:cNvPr id="13" name="TextBox 12"/>
-          <p:cNvSpPr txBox="1"/>
-          <p:nvPr/>
-        </p:nvSpPr>
-        <p:spPr>
-          <a:xfrm>
-            <a:off x="1234440" y="4469587"/>
-            <a:ext cx="10408615" cy="791870"/>
+              <a:t>Why are passwords hashed rather than encrypted?</a:t>
+            </a:r>
+          </a:p>
+        </p:txBody>
+      </p:sp>
+      <p:sp>
+        <p:nvSpPr>
+          <p:cNvPr id="12" name="TextBox 11"/>
+          <p:cNvSpPr txBox="1"/>
+          <p:nvPr/>
+        </p:nvSpPr>
+        <p:spPr>
+          <a:xfrm>
+            <a:off x="548640" y="5852160"/>
+            <a:ext cx="11094415" cy="365760"/>
           </a:xfrm>
           <a:prstGeom prst="rect">
             <a:avLst/>
@@ -10046,99 +14045,13 @@
           <a:p>
             <a:pPr algn="l"/>
             <a:r>
-              <a:rPr sz="2200" b="0" i="0">
-                <a:solidFill>
-                  <a:srgbClr val="202122"/>
-                </a:solidFill>
-                <a:latin typeface="Calibri"/>
-              </a:rPr>
-              <a:t>What is a CSR?</a:t>
-            </a:r>
-          </a:p>
-        </p:txBody>
-      </p:sp>
-      <p:sp>
-        <p:nvSpPr>
-          <p:cNvPr id="14" name="Oval 13"/>
-          <p:cNvSpPr/>
-          <p:nvPr/>
-        </p:nvSpPr>
-        <p:spPr>
-          <a:xfrm>
-            <a:off x="548640" y="5444337"/>
-            <a:ext cx="411480" cy="411480"/>
-          </a:xfrm>
-          <a:prstGeom prst="ellipse">
-            <a:avLst/>
-          </a:prstGeom>
-          <a:solidFill>
-            <a:srgbClr val="E0463A"/>
-          </a:solidFill>
-          <a:ln>
-            <a:noFill/>
-          </a:ln>
-          <a:effectLst/>
-        </p:spPr>
-        <p:style>
-          <a:lnRef idx="1">
-            <a:schemeClr val="accent1"/>
-          </a:lnRef>
-          <a:fillRef idx="3">
-            <a:schemeClr val="accent1"/>
-          </a:fillRef>
-          <a:effectRef idx="2">
-            <a:schemeClr val="accent1"/>
-          </a:effectRef>
-          <a:fontRef idx="minor">
-            <a:schemeClr val="lt1"/>
-          </a:fontRef>
-        </p:style>
-        <p:txBody>
-          <a:bodyPr rtlCol="0" anchor="ctr" lIns="0" rIns="0" tIns="0" bIns="0"/>
-          <a:lstStyle/>
-          <a:p>
-            <a:pPr algn="ctr"/>
-            <a:r>
-              <a:rPr sz="1400" b="1">
-                <a:solidFill>
-                  <a:srgbClr val="FFFFFF"/>
-                </a:solidFill>
-                <a:latin typeface="Calibri"/>
-              </a:rPr>
-              <a:t>5</a:t>
-            </a:r>
-          </a:p>
-        </p:txBody>
-      </p:sp>
-      <p:sp>
-        <p:nvSpPr>
-          <p:cNvPr id="15" name="TextBox 14"/>
-          <p:cNvSpPr txBox="1"/>
-          <p:nvPr/>
-        </p:nvSpPr>
-        <p:spPr>
-          <a:xfrm>
-            <a:off x="1234440" y="5426049"/>
-            <a:ext cx="10408615" cy="791870"/>
-          </a:xfrm>
-          <a:prstGeom prst="rect">
-            <a:avLst/>
-          </a:prstGeom>
-          <a:noFill/>
-        </p:spPr>
-        <p:txBody>
-          <a:bodyPr wrap="square" anchor="t" lIns="0" rIns="0" tIns="0" bIns="0"/>
-          <a:lstStyle/>
-          <a:p>
-            <a:pPr algn="l"/>
-            <a:r>
-              <a:rPr sz="2200" b="0" i="0">
-                <a:solidFill>
-                  <a:srgbClr val="202122"/>
-                </a:solidFill>
-                <a:latin typeface="Calibri"/>
-              </a:rPr>
-              <a:t>Name two features of a digital certificate.</a:t>
+              <a:rPr sz="1300" b="0" i="1">
+                <a:solidFill>
+                  <a:srgbClr val="54595D"/>
+                </a:solidFill>
+                <a:latin typeface="Calibri"/>
+              </a:rPr>
+              <a:t>Answer on mini whiteboards or in your book. Answers are in the speaker notes.</a:t>
             </a:r>
           </a:p>
         </p:txBody>
@@ -10230,7 +14143,7 @@
                 </a:solidFill>
                 <a:latin typeface="Cambria"/>
               </a:rPr>
-              <a:t>Answers</a:t>
+              <a:t>Encryption tools as risk mitigation</a:t>
             </a:r>
           </a:p>
         </p:txBody>
@@ -10303,20 +14216,22 @@
       </p:sp>
       <p:sp>
         <p:nvSpPr>
-          <p:cNvPr id="6" name="Oval 5"/>
+          <p:cNvPr id="6" name="Rounded Rectangle 5"/>
           <p:cNvSpPr/>
           <p:nvPr/>
         </p:nvSpPr>
         <p:spPr>
           <a:xfrm>
-            <a:off x="548640" y="1618488"/>
-            <a:ext cx="411480" cy="411480"/>
-          </a:xfrm>
-          <a:prstGeom prst="ellipse">
-            <a:avLst/>
+            <a:off x="548640" y="1600200"/>
+            <a:ext cx="5364327" cy="640080"/>
+          </a:xfrm>
+          <a:prstGeom prst="roundRect">
+            <a:avLst>
+              <a:gd name="adj" fmla="val 15000"/>
+            </a:avLst>
           </a:prstGeom>
           <a:solidFill>
-            <a:srgbClr val="E0463A"/>
+            <a:srgbClr val="03306E"/>
           </a:solidFill>
           <a:ln>
             <a:noFill/>
@@ -10338,82 +14253,62 @@
           </a:fontRef>
         </p:style>
         <p:txBody>
-          <a:bodyPr rtlCol="0" anchor="ctr" lIns="0" rIns="0" tIns="0" bIns="0"/>
-          <a:lstStyle/>
-          <a:p>
-            <a:pPr algn="ctr"/>
-            <a:r>
-              <a:rPr sz="1400" b="1">
+          <a:bodyPr rtlCol="0" anchor="ctr"/>
+          <a:lstStyle/>
+          <a:p/>
+        </p:txBody>
+      </p:sp>
+      <p:sp>
+        <p:nvSpPr>
+          <p:cNvPr id="7" name="TextBox 6"/>
+          <p:cNvSpPr txBox="1"/>
+          <p:nvPr/>
+        </p:nvSpPr>
+        <p:spPr>
+          <a:xfrm>
+            <a:off x="777240" y="1600200"/>
+            <a:ext cx="4907127" cy="640080"/>
+          </a:xfrm>
+          <a:prstGeom prst="rect">
+            <a:avLst/>
+          </a:prstGeom>
+          <a:noFill/>
+        </p:spPr>
+        <p:txBody>
+          <a:bodyPr wrap="square" anchor="ctr" lIns="0" rIns="0" tIns="0" bIns="0"/>
+          <a:lstStyle/>
+          <a:p>
+            <a:pPr algn="l"/>
+            <a:r>
+              <a:rPr sz="2000" b="1" i="0">
                 <a:solidFill>
                   <a:srgbClr val="FFFFFF"/>
                 </a:solidFill>
                 <a:latin typeface="Calibri"/>
               </a:rPr>
-              <a:t>1</a:t>
-            </a:r>
-          </a:p>
-        </p:txBody>
-      </p:sp>
-      <p:sp>
-        <p:nvSpPr>
-          <p:cNvPr id="7" name="TextBox 6"/>
-          <p:cNvSpPr txBox="1"/>
-          <p:nvPr/>
-        </p:nvSpPr>
-        <p:spPr>
-          <a:xfrm>
-            <a:off x="1234440" y="1600200"/>
-            <a:ext cx="10408615" cy="791870"/>
-          </a:xfrm>
-          <a:prstGeom prst="rect">
-            <a:avLst/>
-          </a:prstGeom>
-          <a:noFill/>
-        </p:spPr>
-        <p:txBody>
-          <a:bodyPr wrap="square" anchor="t" lIns="0" rIns="0" tIns="0" bIns="0"/>
-          <a:lstStyle/>
-          <a:p>
-            <a:pPr algn="l"/>
-            <a:r>
-              <a:rPr sz="1800" b="0" i="0">
-                <a:solidFill>
-                  <a:srgbClr val="54595D"/>
-                </a:solidFill>
-                <a:latin typeface="Calibri"/>
-              </a:rPr>
-              <a:t>Why is hashing used for passwords rather than encryption?</a:t>
-            </a:r>
-          </a:p>
-          <a:p>
-            <a:r>
-              <a:rPr sz="1800" b="1">
-                <a:solidFill>
-                  <a:srgbClr val="03306E"/>
-                </a:solidFill>
-                <a:latin typeface="Calibri"/>
-              </a:rPr>
-              <a:t>It is one way, so the stored hash cannot be turned back into the password.</a:t>
-            </a:r>
-          </a:p>
-        </p:txBody>
-      </p:sp>
-      <p:sp>
-        <p:nvSpPr>
-          <p:cNvPr id="8" name="Oval 7"/>
+              <a:t>Data in transit</a:t>
+            </a:r>
+          </a:p>
+        </p:txBody>
+      </p:sp>
+      <p:sp>
+        <p:nvSpPr>
+          <p:cNvPr id="8" name="Rounded Rectangle 7"/>
           <p:cNvSpPr/>
           <p:nvPr/>
         </p:nvSpPr>
         <p:spPr>
           <a:xfrm>
-            <a:off x="548640" y="2574950"/>
-            <a:ext cx="411480" cy="411480"/>
-          </a:xfrm>
-          <a:prstGeom prst="ellipse">
-            <a:avLst/>
+            <a:off x="548640" y="2377440"/>
+            <a:ext cx="5364327" cy="3794760"/>
+          </a:xfrm>
+          <a:prstGeom prst="roundRect">
+            <a:avLst>
+              <a:gd name="adj" fmla="val 4000"/>
+            </a:avLst>
           </a:prstGeom>
           <a:solidFill>
-            <a:srgbClr val="E0463A"/>
+            <a:srgbClr val="EAF3FF"/>
           </a:solidFill>
           <a:ln>
             <a:noFill/>
@@ -10435,20 +14330,9 @@
           </a:fontRef>
         </p:style>
         <p:txBody>
-          <a:bodyPr rtlCol="0" anchor="ctr" lIns="0" rIns="0" tIns="0" bIns="0"/>
-          <a:lstStyle/>
-          <a:p>
-            <a:pPr algn="ctr"/>
-            <a:r>
-              <a:rPr sz="1400" b="1">
-                <a:solidFill>
-                  <a:srgbClr val="FFFFFF"/>
-                </a:solidFill>
-                <a:latin typeface="Calibri"/>
-              </a:rPr>
-              <a:t>2</a:t>
-            </a:r>
-          </a:p>
+          <a:bodyPr rtlCol="0" anchor="ctr"/>
+          <a:lstStyle/>
+          <a:p/>
         </p:txBody>
       </p:sp>
       <p:sp>
@@ -10459,58 +14343,120 @@
         </p:nvSpPr>
         <p:spPr>
           <a:xfrm>
-            <a:off x="1234440" y="2556662"/>
-            <a:ext cx="10408615" cy="791870"/>
-          </a:xfrm>
-          <a:prstGeom prst="rect">
-            <a:avLst/>
-          </a:prstGeom>
-          <a:noFill/>
-        </p:spPr>
-        <p:txBody>
-          <a:bodyPr wrap="square" anchor="t" lIns="0" rIns="0" tIns="0" bIns="0"/>
-          <a:lstStyle/>
-          <a:p>
-            <a:pPr algn="l"/>
-            <a:r>
-              <a:rPr sz="1800" b="0" i="0">
-                <a:solidFill>
-                  <a:srgbClr val="54595D"/>
-                </a:solidFill>
-                <a:latin typeface="Calibri"/>
-              </a:rPr>
-              <a:t>Which type of encryption protects a stolen laptop's drive?</a:t>
-            </a:r>
-          </a:p>
-          <a:p>
-            <a:r>
-              <a:rPr sz="1800" b="1">
-                <a:solidFill>
-                  <a:srgbClr val="03306E"/>
-                </a:solidFill>
-                <a:latin typeface="Calibri"/>
-              </a:rPr>
-              <a:t>Symmetric, via full disk encryption.</a:t>
-            </a:r>
-          </a:p>
-        </p:txBody>
-      </p:sp>
-      <p:sp>
-        <p:nvSpPr>
-          <p:cNvPr id="10" name="Oval 9"/>
+            <a:off x="822959" y="2606040"/>
+            <a:ext cx="4815687" cy="3337560"/>
+          </a:xfrm>
+          <a:prstGeom prst="rect">
+            <a:avLst/>
+          </a:prstGeom>
+          <a:noFill/>
+        </p:spPr>
+        <p:txBody>
+          <a:bodyPr wrap="square" lIns="0" rIns="0" tIns="0" bIns="0">
+            <a:spAutoFit/>
+          </a:bodyPr>
+          <a:lstStyle/>
+          <a:p>
+            <a:pPr marL="274320" indent="-274320">
+              <a:spcAft>
+                <a:spcPts val="990"/>
+              </a:spcAft>
+              <a:buClr>
+                <a:srgbClr val="0645AD"/>
+              </a:buClr>
+              <a:buFont typeface="Arial"/>
+              <a:buChar char="•"/>
+            </a:pPr>
+            <a:r>
+              <a:rPr sz="2200" b="1">
+                <a:solidFill>
+                  <a:srgbClr val="202122"/>
+                </a:solidFill>
+                <a:latin typeface="Calibri"/>
+              </a:rPr>
+              <a:t>TLS:</a:t>
+            </a:r>
+            <a:r>
+              <a:rPr sz="2200" b="0">
+                <a:solidFill>
+                  <a:srgbClr val="202122"/>
+                </a:solidFill>
+                <a:latin typeface="Calibri"/>
+              </a:rPr>
+              <a:t> end-to-end encryption for email, web and messaging</a:t>
+            </a:r>
+          </a:p>
+          <a:p>
+            <a:pPr marL="274320" indent="-274320">
+              <a:spcAft>
+                <a:spcPts val="990"/>
+              </a:spcAft>
+              <a:buClr>
+                <a:srgbClr val="0645AD"/>
+              </a:buClr>
+              <a:buFont typeface="Arial"/>
+              <a:buChar char="•"/>
+            </a:pPr>
+            <a:r>
+              <a:rPr sz="2200" b="1">
+                <a:solidFill>
+                  <a:srgbClr val="202122"/>
+                </a:solidFill>
+                <a:latin typeface="Calibri"/>
+              </a:rPr>
+              <a:t>SSL:</a:t>
+            </a:r>
+            <a:r>
+              <a:rPr sz="2200" b="0">
+                <a:solidFill>
+                  <a:srgbClr val="202122"/>
+                </a:solidFill>
+                <a:latin typeface="Calibri"/>
+              </a:rPr>
+              <a:t> the legacy protocol TLS replaced</a:t>
+            </a:r>
+          </a:p>
+          <a:p>
+            <a:pPr marL="274320" indent="-274320">
+              <a:spcAft>
+                <a:spcPts val="990"/>
+              </a:spcAft>
+              <a:buClr>
+                <a:srgbClr val="0645AD"/>
+              </a:buClr>
+              <a:buFont typeface="Arial"/>
+              <a:buChar char="•"/>
+            </a:pPr>
+            <a:r>
+              <a:rPr sz="2200" b="0">
+                <a:solidFill>
+                  <a:srgbClr val="202122"/>
+                </a:solidFill>
+                <a:latin typeface="Calibri"/>
+              </a:rPr>
+              <a:t>Both rely on asymmetric encryption</a:t>
+            </a:r>
+          </a:p>
+        </p:txBody>
+      </p:sp>
+      <p:sp>
+        <p:nvSpPr>
+          <p:cNvPr id="10" name="Rounded Rectangle 9"/>
           <p:cNvSpPr/>
           <p:nvPr/>
         </p:nvSpPr>
         <p:spPr>
           <a:xfrm>
-            <a:off x="548640" y="3531412"/>
-            <a:ext cx="411480" cy="411480"/>
-          </a:xfrm>
-          <a:prstGeom prst="ellipse">
-            <a:avLst/>
+            <a:off x="6278727" y="1600200"/>
+            <a:ext cx="5364327" cy="640080"/>
+          </a:xfrm>
+          <a:prstGeom prst="roundRect">
+            <a:avLst>
+              <a:gd name="adj" fmla="val 15000"/>
+            </a:avLst>
           </a:prstGeom>
           <a:solidFill>
-            <a:srgbClr val="E0463A"/>
+            <a:srgbClr val="0645AD"/>
           </a:solidFill>
           <a:ln>
             <a:noFill/>
@@ -10532,82 +14478,62 @@
           </a:fontRef>
         </p:style>
         <p:txBody>
-          <a:bodyPr rtlCol="0" anchor="ctr" lIns="0" rIns="0" tIns="0" bIns="0"/>
-          <a:lstStyle/>
-          <a:p>
-            <a:pPr algn="ctr"/>
-            <a:r>
-              <a:rPr sz="1400" b="1">
+          <a:bodyPr rtlCol="0" anchor="ctr"/>
+          <a:lstStyle/>
+          <a:p/>
+        </p:txBody>
+      </p:sp>
+      <p:sp>
+        <p:nvSpPr>
+          <p:cNvPr id="11" name="TextBox 10"/>
+          <p:cNvSpPr txBox="1"/>
+          <p:nvPr/>
+        </p:nvSpPr>
+        <p:spPr>
+          <a:xfrm>
+            <a:off x="6507327" y="1600200"/>
+            <a:ext cx="4907127" cy="640080"/>
+          </a:xfrm>
+          <a:prstGeom prst="rect">
+            <a:avLst/>
+          </a:prstGeom>
+          <a:noFill/>
+        </p:spPr>
+        <p:txBody>
+          <a:bodyPr wrap="square" anchor="ctr" lIns="0" rIns="0" tIns="0" bIns="0"/>
+          <a:lstStyle/>
+          <a:p>
+            <a:pPr algn="l"/>
+            <a:r>
+              <a:rPr sz="2000" b="1" i="0">
                 <a:solidFill>
                   <a:srgbClr val="FFFFFF"/>
                 </a:solidFill>
                 <a:latin typeface="Calibri"/>
               </a:rPr>
-              <a:t>3</a:t>
-            </a:r>
-          </a:p>
-        </p:txBody>
-      </p:sp>
-      <p:sp>
-        <p:nvSpPr>
-          <p:cNvPr id="11" name="TextBox 10"/>
-          <p:cNvSpPr txBox="1"/>
-          <p:nvPr/>
-        </p:nvSpPr>
-        <p:spPr>
-          <a:xfrm>
-            <a:off x="1234440" y="3513124"/>
-            <a:ext cx="10408615" cy="791870"/>
-          </a:xfrm>
-          <a:prstGeom prst="rect">
-            <a:avLst/>
-          </a:prstGeom>
-          <a:noFill/>
-        </p:spPr>
-        <p:txBody>
-          <a:bodyPr wrap="square" anchor="t" lIns="0" rIns="0" tIns="0" bIns="0"/>
-          <a:lstStyle/>
-          <a:p>
-            <a:pPr algn="l"/>
-            <a:r>
-              <a:rPr sz="1800" b="0" i="0">
-                <a:solidFill>
-                  <a:srgbClr val="54595D"/>
-                </a:solidFill>
-                <a:latin typeface="Calibri"/>
-              </a:rPr>
-              <a:t>What does a digital signature prove?</a:t>
-            </a:r>
-          </a:p>
-          <a:p>
-            <a:r>
-              <a:rPr sz="1800" b="1">
-                <a:solidFill>
-                  <a:srgbClr val="03306E"/>
-                </a:solidFill>
-                <a:latin typeface="Calibri"/>
-              </a:rPr>
-              <a:t>The authenticity of the sender.</a:t>
-            </a:r>
-          </a:p>
-        </p:txBody>
-      </p:sp>
-      <p:sp>
-        <p:nvSpPr>
-          <p:cNvPr id="12" name="Oval 11"/>
+              <a:t>Data at rest (DARE)</a:t>
+            </a:r>
+          </a:p>
+        </p:txBody>
+      </p:sp>
+      <p:sp>
+        <p:nvSpPr>
+          <p:cNvPr id="12" name="Rounded Rectangle 11"/>
           <p:cNvSpPr/>
           <p:nvPr/>
         </p:nvSpPr>
         <p:spPr>
           <a:xfrm>
-            <a:off x="548640" y="4487875"/>
-            <a:ext cx="411480" cy="411480"/>
-          </a:xfrm>
-          <a:prstGeom prst="ellipse">
-            <a:avLst/>
+            <a:off x="6278727" y="2377440"/>
+            <a:ext cx="5364327" cy="3794760"/>
+          </a:xfrm>
+          <a:prstGeom prst="roundRect">
+            <a:avLst>
+              <a:gd name="adj" fmla="val 4000"/>
+            </a:avLst>
           </a:prstGeom>
           <a:solidFill>
-            <a:srgbClr val="E0463A"/>
+            <a:srgbClr val="EAF3FF"/>
           </a:solidFill>
           <a:ln>
             <a:noFill/>
@@ -10629,20 +14555,9 @@
           </a:fontRef>
         </p:style>
         <p:txBody>
-          <a:bodyPr rtlCol="0" anchor="ctr" lIns="0" rIns="0" tIns="0" bIns="0"/>
-          <a:lstStyle/>
-          <a:p>
-            <a:pPr algn="ctr"/>
-            <a:r>
-              <a:rPr sz="1400" b="1">
-                <a:solidFill>
-                  <a:srgbClr val="FFFFFF"/>
-                </a:solidFill>
-                <a:latin typeface="Calibri"/>
-              </a:rPr>
-              <a:t>4</a:t>
-            </a:r>
-          </a:p>
+          <a:bodyPr rtlCol="0" anchor="ctr"/>
+          <a:lstStyle/>
+          <a:p/>
         </p:txBody>
       </p:sp>
       <p:sp>
@@ -10653,135 +14568,98 @@
         </p:nvSpPr>
         <p:spPr>
           <a:xfrm>
-            <a:off x="1234440" y="4469587"/>
-            <a:ext cx="10408615" cy="791870"/>
-          </a:xfrm>
-          <a:prstGeom prst="rect">
-            <a:avLst/>
-          </a:prstGeom>
-          <a:noFill/>
-        </p:spPr>
-        <p:txBody>
-          <a:bodyPr wrap="square" anchor="t" lIns="0" rIns="0" tIns="0" bIns="0"/>
-          <a:lstStyle/>
-          <a:p>
-            <a:pPr algn="l"/>
-            <a:r>
-              <a:rPr sz="1800" b="0" i="0">
-                <a:solidFill>
-                  <a:srgbClr val="54595D"/>
-                </a:solidFill>
-                <a:latin typeface="Calibri"/>
-              </a:rPr>
-              <a:t>What is a CSR?</a:t>
-            </a:r>
-          </a:p>
-          <a:p>
-            <a:r>
-              <a:rPr sz="1800" b="1">
-                <a:solidFill>
-                  <a:srgbClr val="03306E"/>
-                </a:solidFill>
-                <a:latin typeface="Calibri"/>
-              </a:rPr>
-              <a:t>A Certificate Signing Request sent to a Certificate Authority.</a:t>
-            </a:r>
-          </a:p>
-        </p:txBody>
-      </p:sp>
-      <p:sp>
-        <p:nvSpPr>
-          <p:cNvPr id="14" name="Oval 13"/>
-          <p:cNvSpPr/>
-          <p:nvPr/>
-        </p:nvSpPr>
-        <p:spPr>
-          <a:xfrm>
-            <a:off x="548640" y="5444337"/>
-            <a:ext cx="411480" cy="411480"/>
-          </a:xfrm>
-          <a:prstGeom prst="ellipse">
-            <a:avLst/>
-          </a:prstGeom>
-          <a:solidFill>
-            <a:srgbClr val="E0463A"/>
-          </a:solidFill>
-          <a:ln>
-            <a:noFill/>
-          </a:ln>
-          <a:effectLst/>
-        </p:spPr>
-        <p:style>
-          <a:lnRef idx="1">
-            <a:schemeClr val="accent1"/>
-          </a:lnRef>
-          <a:fillRef idx="3">
-            <a:schemeClr val="accent1"/>
-          </a:fillRef>
-          <a:effectRef idx="2">
-            <a:schemeClr val="accent1"/>
-          </a:effectRef>
-          <a:fontRef idx="minor">
-            <a:schemeClr val="lt1"/>
-          </a:fontRef>
-        </p:style>
-        <p:txBody>
-          <a:bodyPr rtlCol="0" anchor="ctr" lIns="0" rIns="0" tIns="0" bIns="0"/>
-          <a:lstStyle/>
-          <a:p>
-            <a:pPr algn="ctr"/>
-            <a:r>
-              <a:rPr sz="1400" b="1">
-                <a:solidFill>
-                  <a:srgbClr val="FFFFFF"/>
-                </a:solidFill>
-                <a:latin typeface="Calibri"/>
-              </a:rPr>
-              <a:t>5</a:t>
-            </a:r>
-          </a:p>
-        </p:txBody>
-      </p:sp>
-      <p:sp>
-        <p:nvSpPr>
-          <p:cNvPr id="15" name="TextBox 14"/>
-          <p:cNvSpPr txBox="1"/>
-          <p:nvPr/>
-        </p:nvSpPr>
-        <p:spPr>
-          <a:xfrm>
-            <a:off x="1234440" y="5426049"/>
-            <a:ext cx="10408615" cy="791870"/>
-          </a:xfrm>
-          <a:prstGeom prst="rect">
-            <a:avLst/>
-          </a:prstGeom>
-          <a:noFill/>
-        </p:spPr>
-        <p:txBody>
-          <a:bodyPr wrap="square" anchor="t" lIns="0" rIns="0" tIns="0" bIns="0"/>
-          <a:lstStyle/>
-          <a:p>
-            <a:pPr algn="l"/>
-            <a:r>
-              <a:rPr sz="1800" b="0" i="0">
-                <a:solidFill>
-                  <a:srgbClr val="54595D"/>
-                </a:solidFill>
-                <a:latin typeface="Calibri"/>
-              </a:rPr>
-              <a:t>Name two features of a digital certificate.</a:t>
-            </a:r>
-          </a:p>
-          <a:p>
-            <a:r>
-              <a:rPr sz="1800" b="1">
-                <a:solidFill>
-                  <a:srgbClr val="03306E"/>
-                </a:solidFill>
-                <a:latin typeface="Calibri"/>
-              </a:rPr>
-              <a:t>Any two of: holder name, serial number, expiry, public key, issuer signature.</a:t>
+            <a:off x="6553047" y="2606040"/>
+            <a:ext cx="4815687" cy="3337560"/>
+          </a:xfrm>
+          <a:prstGeom prst="rect">
+            <a:avLst/>
+          </a:prstGeom>
+          <a:noFill/>
+        </p:spPr>
+        <p:txBody>
+          <a:bodyPr wrap="square" lIns="0" rIns="0" tIns="0" bIns="0">
+            <a:spAutoFit/>
+          </a:bodyPr>
+          <a:lstStyle/>
+          <a:p>
+            <a:pPr marL="274320" indent="-274320">
+              <a:spcAft>
+                <a:spcPts val="990"/>
+              </a:spcAft>
+              <a:buClr>
+                <a:srgbClr val="0645AD"/>
+              </a:buClr>
+              <a:buFont typeface="Arial"/>
+              <a:buChar char="•"/>
+            </a:pPr>
+            <a:r>
+              <a:rPr sz="2200" b="1">
+                <a:solidFill>
+                  <a:srgbClr val="202122"/>
+                </a:solidFill>
+                <a:latin typeface="Calibri"/>
+              </a:rPr>
+              <a:t>Full Disk Encryption (FDE):</a:t>
+            </a:r>
+            <a:r>
+              <a:rPr sz="2200" b="0">
+                <a:solidFill>
+                  <a:srgbClr val="202122"/>
+                </a:solidFill>
+                <a:latin typeface="Calibri"/>
+              </a:rPr>
+              <a:t> protects a stolen laptop</a:t>
+            </a:r>
+          </a:p>
+          <a:p>
+            <a:pPr marL="274320" indent="-274320">
+              <a:spcAft>
+                <a:spcPts val="990"/>
+              </a:spcAft>
+              <a:buClr>
+                <a:srgbClr val="0645AD"/>
+              </a:buClr>
+              <a:buFont typeface="Arial"/>
+              <a:buChar char="•"/>
+            </a:pPr>
+            <a:r>
+              <a:rPr sz="2200" b="1">
+                <a:solidFill>
+                  <a:srgbClr val="202122"/>
+                </a:solidFill>
+                <a:latin typeface="Calibri"/>
+              </a:rPr>
+              <a:t>File-Based Encryption (FBE):</a:t>
+            </a:r>
+            <a:r>
+              <a:rPr sz="2200" b="0">
+                <a:solidFill>
+                  <a:srgbClr val="202122"/>
+                </a:solidFill>
+                <a:latin typeface="Calibri"/>
+              </a:rPr>
+              <a:t> protects individual files and folders</a:t>
+            </a:r>
+          </a:p>
+          <a:p>
+            <a:pPr marL="274320" indent="-274320">
+              <a:spcAft>
+                <a:spcPts val="990"/>
+              </a:spcAft>
+              <a:buClr>
+                <a:srgbClr val="0645AD"/>
+              </a:buClr>
+              <a:buFont typeface="Arial"/>
+              <a:buChar char="•"/>
+            </a:pPr>
+            <a:r>
+              <a:rPr sz="2200" b="0">
+                <a:solidFill>
+                  <a:srgbClr val="202122"/>
+                </a:solidFill>
+                <a:latin typeface="Calibri"/>
+              </a:rPr>
+              <a:t>Both rely on symmetric encryption</a:t>
             </a:r>
           </a:p>
         </p:txBody>
